--- a/docs/slides/AI부동산경매투자_강의슬라이드.pptx
+++ b/docs/slides/AI부동산경매투자_강의슬라이드.pptx
@@ -5241,8 +5241,8 @@
         </p:nvSpPr>
         <p:spPr>
           <a:xfrm>
-            <a:off x="502920" y="1298448"/>
-            <a:ext cx="8138160" cy="566928"/>
+            <a:off x="502920" y="1225296"/>
+            <a:ext cx="8138160" cy="548640"/>
           </a:xfrm>
           <a:prstGeom prst="rect">
             <a:avLst/>
@@ -5256,12 +5256,12 @@
           <a:p>
             <a:pPr indent="0" marL="0">
               <a:lnSpc>
-                <a:spcPct val="122000"/>
+                <a:spcPct val="120000"/>
               </a:lnSpc>
               <a:buNone/>
             </a:pPr>
             <a:r>
-              <a:rPr lang="en-US" sz="1150" dirty="0">
+              <a:rPr lang="en-US" sz="1100" dirty="0">
                 <a:solidFill>
                   <a:srgbClr val="26262E"/>
                 </a:solidFill>
@@ -5269,9 +5269,9 @@
                 <a:ea typeface="Apple SD Gothic Neo" pitchFamily="34" charset="-122"/>
                 <a:cs typeface="Apple SD Gothic Neo" pitchFamily="34" charset="-120"/>
               </a:rPr>
-              <a:t>근저당권 · 압류 · 가압류 · 담보가등기 · 경매개시결정등기 중 등기부상 가장 먼저 설정된 것이 말소기준권리입니다. 낙찰되면 말소기준권리와 그보다 늦은 권리는 전부 소멸(말소)되고, 그보다 빠른 권리만 낙찰자가 인수합니다.</a:t>
-            </a:r>
-            <a:endParaRPr lang="en-US" sz="1150" dirty="0"/>
+              <a:t>근저당권 · 저당권 · 압류 · 가압류 · 담보가등기 · 선순위전세권 · 경매개시결정등기 중 등기부상 가장 먼저 설정된 것이 말소기준권리입니다. 그보다 늦은 권리는 낙찰로 전부 소멸(말소)되고, 빠른 권리만 낙찰자가 인수합니다.</a:t>
+            </a:r>
+            <a:endParaRPr lang="en-US" sz="1100" dirty="0"/>
           </a:p>
         </p:txBody>
       </p:sp>
@@ -5283,7 +5283,7 @@
         </p:nvSpPr>
         <p:spPr>
           <a:xfrm>
-            <a:off x="822960" y="2788920"/>
+            <a:off x="822960" y="2606040"/>
             <a:ext cx="7863840" cy="0"/>
           </a:xfrm>
           <a:prstGeom prst="line">
@@ -5306,7 +5306,7 @@
         </p:nvSpPr>
         <p:spPr>
           <a:xfrm>
-            <a:off x="1133856" y="2688336"/>
+            <a:off x="1133856" y="2505456"/>
             <a:ext cx="201168" cy="201168"/>
           </a:xfrm>
           <a:prstGeom prst="ellipse">
@@ -5326,8 +5326,8 @@
         </p:nvSpPr>
         <p:spPr>
           <a:xfrm>
-            <a:off x="457200" y="1965960"/>
-            <a:ext cx="1554480" cy="201168"/>
+            <a:off x="457200" y="1892808"/>
+            <a:ext cx="1554480" cy="182880"/>
           </a:xfrm>
           <a:prstGeom prst="rect">
             <a:avLst/>
@@ -5343,7 +5343,7 @@
               <a:buNone/>
             </a:pPr>
             <a:r>
-              <a:rPr lang="en-US" sz="1000" b="1" dirty="0">
+              <a:rPr lang="en-US" sz="950" b="1" dirty="0">
                 <a:solidFill>
                   <a:srgbClr val="26262E"/>
                 </a:solidFill>
@@ -5353,7 +5353,7 @@
               </a:rPr>
               <a:t>2019-03</a:t>
             </a:r>
-            <a:endParaRPr lang="en-US" sz="1000" dirty="0"/>
+            <a:endParaRPr lang="en-US" sz="950" dirty="0"/>
           </a:p>
         </p:txBody>
       </p:sp>
@@ -5365,8 +5365,8 @@
         </p:nvSpPr>
         <p:spPr>
           <a:xfrm>
-            <a:off x="457200" y="2194560"/>
-            <a:ext cx="1554480" cy="384048"/>
+            <a:off x="457200" y="2103120"/>
+            <a:ext cx="1554480" cy="329184"/>
           </a:xfrm>
           <a:prstGeom prst="rect">
             <a:avLst/>
@@ -5385,7 +5385,7 @@
               <a:buNone/>
             </a:pPr>
             <a:r>
-              <a:rPr lang="en-US" sz="880" dirty="0">
+              <a:rPr lang="en-US" sz="830" dirty="0">
                 <a:solidFill>
                   <a:srgbClr val="6E6A75"/>
                 </a:solidFill>
@@ -5395,7 +5395,7 @@
               </a:rPr>
               <a:t>근저당권 설정</a:t>
             </a:r>
-            <a:endParaRPr lang="en-US" sz="880" dirty="0"/>
+            <a:endParaRPr lang="en-US" sz="830" dirty="0"/>
           </a:p>
           <a:p>
             <a:pPr algn="ctr" indent="0" marL="0">
@@ -5405,7 +5405,7 @@
               <a:buNone/>
             </a:pPr>
             <a:r>
-              <a:rPr lang="en-US" sz="880" dirty="0">
+              <a:rPr lang="en-US" sz="830" dirty="0">
                 <a:solidFill>
                   <a:srgbClr val="6E6A75"/>
                 </a:solidFill>
@@ -5415,7 +5415,7 @@
               </a:rPr>
               <a:t>(A은행)</a:t>
             </a:r>
-            <a:endParaRPr lang="en-US" sz="880" dirty="0"/>
+            <a:endParaRPr lang="en-US" sz="830" dirty="0"/>
           </a:p>
         </p:txBody>
       </p:sp>
@@ -5427,109 +5427,8 @@
         </p:nvSpPr>
         <p:spPr>
           <a:xfrm>
-            <a:off x="457200" y="2990088"/>
-            <a:ext cx="1554480" cy="329184"/>
-          </a:xfrm>
-          <a:prstGeom prst="rect">
-            <a:avLst/>
-          </a:prstGeom>
-          <a:noFill/>
-          <a:ln/>
-        </p:spPr>
-        <p:txBody>
-          <a:bodyPr wrap="square" lIns="0" tIns="0" rIns="0" bIns="0" rtlCol="0" anchor="ctr"/>
-          <a:lstStyle/>
-          <a:p>
-            <a:pPr algn="ctr" indent="0" marL="0">
-              <a:lnSpc>
-                <a:spcPct val="105000"/>
-              </a:lnSpc>
-              <a:buNone/>
-            </a:pPr>
-            <a:r>
-              <a:rPr lang="en-US" sz="900" b="1" dirty="0">
-                <a:solidFill>
-                  <a:srgbClr val="E2611F"/>
-                </a:solidFill>
-                <a:latin typeface="Apple SD Gothic Neo" pitchFamily="34" charset="0"/>
-                <a:ea typeface="Apple SD Gothic Neo" pitchFamily="34" charset="-122"/>
-                <a:cs typeface="Apple SD Gothic Neo" pitchFamily="34" charset="-120"/>
-              </a:rPr>
-              <a:t>말소기준권리</a:t>
-            </a:r>
-            <a:endParaRPr lang="en-US" sz="900" dirty="0"/>
-          </a:p>
-        </p:txBody>
-      </p:sp>
-      <p:sp>
-        <p:nvSpPr>
-          <p:cNvPr id="10" name="Shape 8"/>
-          <p:cNvSpPr/>
-          <p:nvPr/>
-        </p:nvSpPr>
-        <p:spPr>
-          <a:xfrm>
-            <a:off x="3328416" y="2688336"/>
-            <a:ext cx="201168" cy="201168"/>
-          </a:xfrm>
-          <a:prstGeom prst="ellipse">
-            <a:avLst/>
-          </a:prstGeom>
-          <a:solidFill>
-            <a:srgbClr val="1C2B4A"/>
-          </a:solidFill>
-          <a:ln/>
-        </p:spPr>
-      </p:sp>
-      <p:sp>
-        <p:nvSpPr>
-          <p:cNvPr id="11" name="Text 9"/>
-          <p:cNvSpPr/>
-          <p:nvPr/>
-        </p:nvSpPr>
-        <p:spPr>
-          <a:xfrm>
-            <a:off x="2651760" y="1965960"/>
-            <a:ext cx="1554480" cy="201168"/>
-          </a:xfrm>
-          <a:prstGeom prst="rect">
-            <a:avLst/>
-          </a:prstGeom>
-          <a:noFill/>
-          <a:ln/>
-        </p:spPr>
-        <p:txBody>
-          <a:bodyPr wrap="square" lIns="0" tIns="0" rIns="0" bIns="0" rtlCol="0" anchor="ctr"/>
-          <a:lstStyle/>
-          <a:p>
-            <a:pPr algn="ctr" indent="0" marL="0">
-              <a:buNone/>
-            </a:pPr>
-            <a:r>
-              <a:rPr lang="en-US" sz="1000" b="1" dirty="0">
-                <a:solidFill>
-                  <a:srgbClr val="26262E"/>
-                </a:solidFill>
-                <a:latin typeface="Apple SD Gothic Neo" pitchFamily="34" charset="0"/>
-                <a:ea typeface="Apple SD Gothic Neo" pitchFamily="34" charset="-122"/>
-                <a:cs typeface="Apple SD Gothic Neo" pitchFamily="34" charset="-120"/>
-              </a:rPr>
-              <a:t>2021-06</a:t>
-            </a:r>
-            <a:endParaRPr lang="en-US" sz="1000" dirty="0"/>
-          </a:p>
-        </p:txBody>
-      </p:sp>
-      <p:sp>
-        <p:nvSpPr>
-          <p:cNvPr id="12" name="Text 10"/>
-          <p:cNvSpPr/>
-          <p:nvPr/>
-        </p:nvSpPr>
-        <p:spPr>
-          <a:xfrm>
-            <a:off x="2651760" y="2194560"/>
-            <a:ext cx="1554480" cy="384048"/>
+            <a:off x="457200" y="2752344"/>
+            <a:ext cx="1554480" cy="274320"/>
           </a:xfrm>
           <a:prstGeom prst="rect">
             <a:avLst/>
@@ -5548,18 +5447,99 @@
               <a:buNone/>
             </a:pPr>
             <a:r>
-              <a:rPr lang="en-US" sz="880" dirty="0">
-                <a:solidFill>
-                  <a:srgbClr val="6E6A75"/>
-                </a:solidFill>
-                <a:latin typeface="Apple SD Gothic Neo" pitchFamily="34" charset="0"/>
-                <a:ea typeface="Apple SD Gothic Neo" pitchFamily="34" charset="-122"/>
-                <a:cs typeface="Apple SD Gothic Neo" pitchFamily="34" charset="-120"/>
-              </a:rPr>
-              <a:t>임차인</a:t>
-            </a:r>
-            <a:endParaRPr lang="en-US" sz="880" dirty="0"/>
-          </a:p>
+              <a:rPr lang="en-US" sz="850" b="1" dirty="0">
+                <a:solidFill>
+                  <a:srgbClr val="E2611F"/>
+                </a:solidFill>
+                <a:latin typeface="Apple SD Gothic Neo" pitchFamily="34" charset="0"/>
+                <a:ea typeface="Apple SD Gothic Neo" pitchFamily="34" charset="-122"/>
+                <a:cs typeface="Apple SD Gothic Neo" pitchFamily="34" charset="-120"/>
+              </a:rPr>
+              <a:t>말소기준권리</a:t>
+            </a:r>
+            <a:endParaRPr lang="en-US" sz="850" dirty="0"/>
+          </a:p>
+        </p:txBody>
+      </p:sp>
+      <p:sp>
+        <p:nvSpPr>
+          <p:cNvPr id="10" name="Shape 8"/>
+          <p:cNvSpPr/>
+          <p:nvPr/>
+        </p:nvSpPr>
+        <p:spPr>
+          <a:xfrm>
+            <a:off x="3328416" y="2505456"/>
+            <a:ext cx="201168" cy="201168"/>
+          </a:xfrm>
+          <a:prstGeom prst="ellipse">
+            <a:avLst/>
+          </a:prstGeom>
+          <a:solidFill>
+            <a:srgbClr val="1C2B4A"/>
+          </a:solidFill>
+          <a:ln/>
+        </p:spPr>
+      </p:sp>
+      <p:sp>
+        <p:nvSpPr>
+          <p:cNvPr id="11" name="Text 9"/>
+          <p:cNvSpPr/>
+          <p:nvPr/>
+        </p:nvSpPr>
+        <p:spPr>
+          <a:xfrm>
+            <a:off x="2651760" y="1892808"/>
+            <a:ext cx="1554480" cy="182880"/>
+          </a:xfrm>
+          <a:prstGeom prst="rect">
+            <a:avLst/>
+          </a:prstGeom>
+          <a:noFill/>
+          <a:ln/>
+        </p:spPr>
+        <p:txBody>
+          <a:bodyPr wrap="square" lIns="0" tIns="0" rIns="0" bIns="0" rtlCol="0" anchor="ctr"/>
+          <a:lstStyle/>
+          <a:p>
+            <a:pPr algn="ctr" indent="0" marL="0">
+              <a:buNone/>
+            </a:pPr>
+            <a:r>
+              <a:rPr lang="en-US" sz="950" b="1" dirty="0">
+                <a:solidFill>
+                  <a:srgbClr val="26262E"/>
+                </a:solidFill>
+                <a:latin typeface="Apple SD Gothic Neo" pitchFamily="34" charset="0"/>
+                <a:ea typeface="Apple SD Gothic Neo" pitchFamily="34" charset="-122"/>
+                <a:cs typeface="Apple SD Gothic Neo" pitchFamily="34" charset="-120"/>
+              </a:rPr>
+              <a:t>2021-06</a:t>
+            </a:r>
+            <a:endParaRPr lang="en-US" sz="950" dirty="0"/>
+          </a:p>
+        </p:txBody>
+      </p:sp>
+      <p:sp>
+        <p:nvSpPr>
+          <p:cNvPr id="12" name="Text 10"/>
+          <p:cNvSpPr/>
+          <p:nvPr/>
+        </p:nvSpPr>
+        <p:spPr>
+          <a:xfrm>
+            <a:off x="2651760" y="2103120"/>
+            <a:ext cx="1554480" cy="329184"/>
+          </a:xfrm>
+          <a:prstGeom prst="rect">
+            <a:avLst/>
+          </a:prstGeom>
+          <a:noFill/>
+          <a:ln/>
+        </p:spPr>
+        <p:txBody>
+          <a:bodyPr wrap="square" lIns="0" tIns="0" rIns="0" bIns="0" rtlCol="0" anchor="ctr"/>
+          <a:lstStyle/>
           <a:p>
             <a:pPr algn="ctr" indent="0" marL="0">
               <a:lnSpc>
@@ -5568,7 +5548,7 @@
               <a:buNone/>
             </a:pPr>
             <a:r>
-              <a:rPr lang="en-US" sz="880" dirty="0">
+              <a:rPr lang="en-US" sz="830" dirty="0">
                 <a:solidFill>
                   <a:srgbClr val="6E6A75"/>
                 </a:solidFill>
@@ -5576,133 +5556,10 @@
                 <a:ea typeface="Apple SD Gothic Neo" pitchFamily="34" charset="-122"/>
                 <a:cs typeface="Apple SD Gothic Neo" pitchFamily="34" charset="-120"/>
               </a:rPr>
-              <a:t>전입신고</a:t>
-            </a:r>
-            <a:endParaRPr lang="en-US" sz="880" dirty="0"/>
-          </a:p>
-        </p:txBody>
-      </p:sp>
-      <p:sp>
-        <p:nvSpPr>
-          <p:cNvPr id="13" name="Text 11"/>
-          <p:cNvSpPr/>
-          <p:nvPr/>
-        </p:nvSpPr>
-        <p:spPr>
-          <a:xfrm>
-            <a:off x="2651760" y="2990088"/>
-            <a:ext cx="1554480" cy="329184"/>
-          </a:xfrm>
-          <a:prstGeom prst="rect">
-            <a:avLst/>
-          </a:prstGeom>
-          <a:noFill/>
-          <a:ln/>
-        </p:spPr>
-        <p:txBody>
-          <a:bodyPr wrap="square" lIns="0" tIns="0" rIns="0" bIns="0" rtlCol="0" anchor="ctr"/>
-          <a:lstStyle/>
-          <a:p>
-            <a:pPr algn="ctr" indent="0" marL="0">
-              <a:lnSpc>
-                <a:spcPct val="105000"/>
-              </a:lnSpc>
-              <a:buNone/>
-            </a:pPr>
-            <a:r>
-              <a:rPr lang="en-US" sz="900" b="1" dirty="0">
-                <a:solidFill>
-                  <a:srgbClr val="8A8492"/>
-                </a:solidFill>
-                <a:latin typeface="Apple SD Gothic Neo" pitchFamily="34" charset="0"/>
-                <a:ea typeface="Apple SD Gothic Neo" pitchFamily="34" charset="-122"/>
-                <a:cs typeface="Apple SD Gothic Neo" pitchFamily="34" charset="-120"/>
-              </a:rPr>
-              <a:t>대항력 없음 → 소멸</a:t>
-            </a:r>
-            <a:endParaRPr lang="en-US" sz="900" dirty="0"/>
-          </a:p>
-        </p:txBody>
-      </p:sp>
-      <p:sp>
-        <p:nvSpPr>
-          <p:cNvPr id="14" name="Shape 12"/>
-          <p:cNvSpPr/>
-          <p:nvPr/>
-        </p:nvSpPr>
-        <p:spPr>
-          <a:xfrm>
-            <a:off x="5522976" y="2688336"/>
-            <a:ext cx="201168" cy="201168"/>
-          </a:xfrm>
-          <a:prstGeom prst="ellipse">
-            <a:avLst/>
-          </a:prstGeom>
-          <a:solidFill>
-            <a:srgbClr val="1C2B4A"/>
-          </a:solidFill>
-          <a:ln/>
-        </p:spPr>
-      </p:sp>
-      <p:sp>
-        <p:nvSpPr>
-          <p:cNvPr id="15" name="Text 13"/>
-          <p:cNvSpPr/>
-          <p:nvPr/>
-        </p:nvSpPr>
-        <p:spPr>
-          <a:xfrm>
-            <a:off x="4846320" y="1965960"/>
-            <a:ext cx="1554480" cy="201168"/>
-          </a:xfrm>
-          <a:prstGeom prst="rect">
-            <a:avLst/>
-          </a:prstGeom>
-          <a:noFill/>
-          <a:ln/>
-        </p:spPr>
-        <p:txBody>
-          <a:bodyPr wrap="square" lIns="0" tIns="0" rIns="0" bIns="0" rtlCol="0" anchor="ctr"/>
-          <a:lstStyle/>
-          <a:p>
-            <a:pPr algn="ctr" indent="0" marL="0">
-              <a:buNone/>
-            </a:pPr>
-            <a:r>
-              <a:rPr lang="en-US" sz="1000" b="1" dirty="0">
-                <a:solidFill>
-                  <a:srgbClr val="26262E"/>
-                </a:solidFill>
-                <a:latin typeface="Apple SD Gothic Neo" pitchFamily="34" charset="0"/>
-                <a:ea typeface="Apple SD Gothic Neo" pitchFamily="34" charset="-122"/>
-                <a:cs typeface="Apple SD Gothic Neo" pitchFamily="34" charset="-120"/>
-              </a:rPr>
-              <a:t>2023-01</a:t>
-            </a:r>
-            <a:endParaRPr lang="en-US" sz="1000" dirty="0"/>
-          </a:p>
-        </p:txBody>
-      </p:sp>
-      <p:sp>
-        <p:nvSpPr>
-          <p:cNvPr id="16" name="Text 14"/>
-          <p:cNvSpPr/>
-          <p:nvPr/>
-        </p:nvSpPr>
-        <p:spPr>
-          <a:xfrm>
-            <a:off x="4846320" y="2194560"/>
-            <a:ext cx="1554480" cy="384048"/>
-          </a:xfrm>
-          <a:prstGeom prst="rect">
-            <a:avLst/>
-          </a:prstGeom>
-          <a:noFill/>
-          <a:ln/>
-        </p:spPr>
-        <p:txBody>
-          <a:bodyPr wrap="square" lIns="0" tIns="0" rIns="0" bIns="0" rtlCol="0" anchor="ctr"/>
-          <a:lstStyle/>
+              <a:t>임차인</a:t>
+            </a:r>
+            <a:endParaRPr lang="en-US" sz="830" dirty="0"/>
+          </a:p>
           <a:p>
             <a:pPr algn="ctr" indent="0" marL="0">
               <a:lnSpc>
@@ -5711,7 +5568,7 @@
               <a:buNone/>
             </a:pPr>
             <a:r>
-              <a:rPr lang="en-US" sz="880" dirty="0">
+              <a:rPr lang="en-US" sz="830" dirty="0">
                 <a:solidFill>
                   <a:srgbClr val="6E6A75"/>
                 </a:solidFill>
@@ -5719,10 +5576,32 @@
                 <a:ea typeface="Apple SD Gothic Neo" pitchFamily="34" charset="-122"/>
                 <a:cs typeface="Apple SD Gothic Neo" pitchFamily="34" charset="-120"/>
               </a:rPr>
-              <a:t>가압류</a:t>
-            </a:r>
-            <a:endParaRPr lang="en-US" sz="880" dirty="0"/>
-          </a:p>
+              <a:t>전입신고</a:t>
+            </a:r>
+            <a:endParaRPr lang="en-US" sz="830" dirty="0"/>
+          </a:p>
+        </p:txBody>
+      </p:sp>
+      <p:sp>
+        <p:nvSpPr>
+          <p:cNvPr id="13" name="Text 11"/>
+          <p:cNvSpPr/>
+          <p:nvPr/>
+        </p:nvSpPr>
+        <p:spPr>
+          <a:xfrm>
+            <a:off x="2651760" y="2752344"/>
+            <a:ext cx="1554480" cy="274320"/>
+          </a:xfrm>
+          <a:prstGeom prst="rect">
+            <a:avLst/>
+          </a:prstGeom>
+          <a:noFill/>
+          <a:ln/>
+        </p:spPr>
+        <p:txBody>
+          <a:bodyPr wrap="square" lIns="0" tIns="0" rIns="0" bIns="0" rtlCol="0" anchor="ctr"/>
+          <a:lstStyle/>
           <a:p>
             <a:pPr algn="ctr" indent="0" marL="0">
               <a:lnSpc>
@@ -5731,131 +5610,89 @@
               <a:buNone/>
             </a:pPr>
             <a:r>
-              <a:rPr lang="en-US" sz="880" dirty="0">
-                <a:solidFill>
-                  <a:srgbClr val="6E6A75"/>
-                </a:solidFill>
-                <a:latin typeface="Apple SD Gothic Neo" pitchFamily="34" charset="0"/>
-                <a:ea typeface="Apple SD Gothic Neo" pitchFamily="34" charset="-122"/>
-                <a:cs typeface="Apple SD Gothic Neo" pitchFamily="34" charset="-120"/>
-              </a:rPr>
-              <a:t>(B)</a:t>
-            </a:r>
-            <a:endParaRPr lang="en-US" sz="880" dirty="0"/>
-          </a:p>
-        </p:txBody>
-      </p:sp>
-      <p:sp>
-        <p:nvSpPr>
-          <p:cNvPr id="17" name="Text 15"/>
-          <p:cNvSpPr/>
-          <p:nvPr/>
-        </p:nvSpPr>
-        <p:spPr>
-          <a:xfrm>
-            <a:off x="4846320" y="2990088"/>
+              <a:rPr lang="en-US" sz="850" b="1" dirty="0">
+                <a:solidFill>
+                  <a:srgbClr val="8A8492"/>
+                </a:solidFill>
+                <a:latin typeface="Apple SD Gothic Neo" pitchFamily="34" charset="0"/>
+                <a:ea typeface="Apple SD Gothic Neo" pitchFamily="34" charset="-122"/>
+                <a:cs typeface="Apple SD Gothic Neo" pitchFamily="34" charset="-120"/>
+              </a:rPr>
+              <a:t>대항력 없음 → 소멸</a:t>
+            </a:r>
+            <a:endParaRPr lang="en-US" sz="850" dirty="0"/>
+          </a:p>
+        </p:txBody>
+      </p:sp>
+      <p:sp>
+        <p:nvSpPr>
+          <p:cNvPr id="14" name="Shape 12"/>
+          <p:cNvSpPr/>
+          <p:nvPr/>
+        </p:nvSpPr>
+        <p:spPr>
+          <a:xfrm>
+            <a:off x="5522976" y="2505456"/>
+            <a:ext cx="201168" cy="201168"/>
+          </a:xfrm>
+          <a:prstGeom prst="ellipse">
+            <a:avLst/>
+          </a:prstGeom>
+          <a:solidFill>
+            <a:srgbClr val="1C2B4A"/>
+          </a:solidFill>
+          <a:ln/>
+        </p:spPr>
+      </p:sp>
+      <p:sp>
+        <p:nvSpPr>
+          <p:cNvPr id="15" name="Text 13"/>
+          <p:cNvSpPr/>
+          <p:nvPr/>
+        </p:nvSpPr>
+        <p:spPr>
+          <a:xfrm>
+            <a:off x="4846320" y="1892808"/>
+            <a:ext cx="1554480" cy="182880"/>
+          </a:xfrm>
+          <a:prstGeom prst="rect">
+            <a:avLst/>
+          </a:prstGeom>
+          <a:noFill/>
+          <a:ln/>
+        </p:spPr>
+        <p:txBody>
+          <a:bodyPr wrap="square" lIns="0" tIns="0" rIns="0" bIns="0" rtlCol="0" anchor="ctr"/>
+          <a:lstStyle/>
+          <a:p>
+            <a:pPr algn="ctr" indent="0" marL="0">
+              <a:buNone/>
+            </a:pPr>
+            <a:r>
+              <a:rPr lang="en-US" sz="950" b="1" dirty="0">
+                <a:solidFill>
+                  <a:srgbClr val="26262E"/>
+                </a:solidFill>
+                <a:latin typeface="Apple SD Gothic Neo" pitchFamily="34" charset="0"/>
+                <a:ea typeface="Apple SD Gothic Neo" pitchFamily="34" charset="-122"/>
+                <a:cs typeface="Apple SD Gothic Neo" pitchFamily="34" charset="-120"/>
+              </a:rPr>
+              <a:t>2023-01</a:t>
+            </a:r>
+            <a:endParaRPr lang="en-US" sz="950" dirty="0"/>
+          </a:p>
+        </p:txBody>
+      </p:sp>
+      <p:sp>
+        <p:nvSpPr>
+          <p:cNvPr id="16" name="Text 14"/>
+          <p:cNvSpPr/>
+          <p:nvPr/>
+        </p:nvSpPr>
+        <p:spPr>
+          <a:xfrm>
+            <a:off x="4846320" y="2103120"/>
             <a:ext cx="1554480" cy="329184"/>
-          </a:xfrm>
-          <a:prstGeom prst="rect">
-            <a:avLst/>
-          </a:prstGeom>
-          <a:noFill/>
-          <a:ln/>
-        </p:spPr>
-        <p:txBody>
-          <a:bodyPr wrap="square" lIns="0" tIns="0" rIns="0" bIns="0" rtlCol="0" anchor="ctr"/>
-          <a:lstStyle/>
-          <a:p>
-            <a:pPr algn="ctr" indent="0" marL="0">
-              <a:lnSpc>
-                <a:spcPct val="105000"/>
-              </a:lnSpc>
-              <a:buNone/>
-            </a:pPr>
-            <a:r>
-              <a:rPr lang="en-US" sz="900" b="1" dirty="0">
-                <a:solidFill>
-                  <a:srgbClr val="8A8492"/>
-                </a:solidFill>
-                <a:latin typeface="Apple SD Gothic Neo" pitchFamily="34" charset="0"/>
-                <a:ea typeface="Apple SD Gothic Neo" pitchFamily="34" charset="-122"/>
-                <a:cs typeface="Apple SD Gothic Neo" pitchFamily="34" charset="-120"/>
-              </a:rPr>
-              <a:t>소멸</a:t>
-            </a:r>
-            <a:endParaRPr lang="en-US" sz="900" dirty="0"/>
-          </a:p>
-        </p:txBody>
-      </p:sp>
-      <p:sp>
-        <p:nvSpPr>
-          <p:cNvPr id="18" name="Shape 16"/>
-          <p:cNvSpPr/>
-          <p:nvPr/>
-        </p:nvSpPr>
-        <p:spPr>
-          <a:xfrm>
-            <a:off x="7580376" y="2688336"/>
-            <a:ext cx="201168" cy="201168"/>
-          </a:xfrm>
-          <a:prstGeom prst="ellipse">
-            <a:avLst/>
-          </a:prstGeom>
-          <a:solidFill>
-            <a:srgbClr val="1C2B4A"/>
-          </a:solidFill>
-          <a:ln/>
-        </p:spPr>
-      </p:sp>
-      <p:sp>
-        <p:nvSpPr>
-          <p:cNvPr id="19" name="Text 17"/>
-          <p:cNvSpPr/>
-          <p:nvPr/>
-        </p:nvSpPr>
-        <p:spPr>
-          <a:xfrm>
-            <a:off x="6903720" y="1965960"/>
-            <a:ext cx="1554480" cy="201168"/>
-          </a:xfrm>
-          <a:prstGeom prst="rect">
-            <a:avLst/>
-          </a:prstGeom>
-          <a:noFill/>
-          <a:ln/>
-        </p:spPr>
-        <p:txBody>
-          <a:bodyPr wrap="square" lIns="0" tIns="0" rIns="0" bIns="0" rtlCol="0" anchor="ctr"/>
-          <a:lstStyle/>
-          <a:p>
-            <a:pPr algn="ctr" indent="0" marL="0">
-              <a:buNone/>
-            </a:pPr>
-            <a:r>
-              <a:rPr lang="en-US" sz="1000" b="1" dirty="0">
-                <a:solidFill>
-                  <a:srgbClr val="26262E"/>
-                </a:solidFill>
-                <a:latin typeface="Apple SD Gothic Neo" pitchFamily="34" charset="0"/>
-                <a:ea typeface="Apple SD Gothic Neo" pitchFamily="34" charset="-122"/>
-                <a:cs typeface="Apple SD Gothic Neo" pitchFamily="34" charset="-120"/>
-              </a:rPr>
-              <a:t>2024-05</a:t>
-            </a:r>
-            <a:endParaRPr lang="en-US" sz="1000" dirty="0"/>
-          </a:p>
-        </p:txBody>
-      </p:sp>
-      <p:sp>
-        <p:nvSpPr>
-          <p:cNvPr id="20" name="Text 18"/>
-          <p:cNvSpPr/>
-          <p:nvPr/>
-        </p:nvSpPr>
-        <p:spPr>
-          <a:xfrm>
-            <a:off x="6903720" y="2194560"/>
-            <a:ext cx="1554480" cy="384048"/>
           </a:xfrm>
           <a:prstGeom prst="rect">
             <a:avLst/>
@@ -5874,7 +5711,7 @@
               <a:buNone/>
             </a:pPr>
             <a:r>
-              <a:rPr lang="en-US" sz="880" dirty="0">
+              <a:rPr lang="en-US" sz="830" dirty="0">
                 <a:solidFill>
                   <a:srgbClr val="6E6A75"/>
                 </a:solidFill>
@@ -5882,9 +5719,9 @@
                 <a:ea typeface="Apple SD Gothic Neo" pitchFamily="34" charset="-122"/>
                 <a:cs typeface="Apple SD Gothic Neo" pitchFamily="34" charset="-120"/>
               </a:rPr>
-              <a:t>경매개시</a:t>
-            </a:r>
-            <a:endParaRPr lang="en-US" sz="880" dirty="0"/>
+              <a:t>가압류</a:t>
+            </a:r>
+            <a:endParaRPr lang="en-US" sz="830" dirty="0"/>
           </a:p>
           <a:p>
             <a:pPr algn="ctr" indent="0" marL="0">
@@ -5894,7 +5731,7 @@
               <a:buNone/>
             </a:pPr>
             <a:r>
-              <a:rPr lang="en-US" sz="880" dirty="0">
+              <a:rPr lang="en-US" sz="830" dirty="0">
                 <a:solidFill>
                   <a:srgbClr val="6E6A75"/>
                 </a:solidFill>
@@ -5902,22 +5739,22 @@
                 <a:ea typeface="Apple SD Gothic Neo" pitchFamily="34" charset="-122"/>
                 <a:cs typeface="Apple SD Gothic Neo" pitchFamily="34" charset="-120"/>
               </a:rPr>
-              <a:t>결정등기</a:t>
-            </a:r>
-            <a:endParaRPr lang="en-US" sz="880" dirty="0"/>
-          </a:p>
-        </p:txBody>
-      </p:sp>
-      <p:sp>
-        <p:nvSpPr>
-          <p:cNvPr id="21" name="Text 19"/>
-          <p:cNvSpPr/>
-          <p:nvPr/>
-        </p:nvSpPr>
-        <p:spPr>
-          <a:xfrm>
-            <a:off x="6903720" y="2990088"/>
-            <a:ext cx="1554480" cy="329184"/>
+              <a:t>(B)</a:t>
+            </a:r>
+            <a:endParaRPr lang="en-US" sz="830" dirty="0"/>
+          </a:p>
+        </p:txBody>
+      </p:sp>
+      <p:sp>
+        <p:nvSpPr>
+          <p:cNvPr id="17" name="Text 15"/>
+          <p:cNvSpPr/>
+          <p:nvPr/>
+        </p:nvSpPr>
+        <p:spPr>
+          <a:xfrm>
+            <a:off x="4846320" y="2752344"/>
+            <a:ext cx="1554480" cy="274320"/>
           </a:xfrm>
           <a:prstGeom prst="rect">
             <a:avLst/>
@@ -5931,12 +5768,12 @@
           <a:p>
             <a:pPr algn="ctr" indent="0" marL="0">
               <a:lnSpc>
-                <a:spcPct val="105000"/>
+                <a:spcPct val="100000"/>
               </a:lnSpc>
               <a:buNone/>
             </a:pPr>
             <a:r>
-              <a:rPr lang="en-US" sz="900" b="1" dirty="0">
+              <a:rPr lang="en-US" sz="850" b="1" dirty="0">
                 <a:solidFill>
                   <a:srgbClr val="8A8492"/>
                 </a:solidFill>
@@ -5946,7 +5783,170 @@
               </a:rPr>
               <a:t>소멸</a:t>
             </a:r>
-            <a:endParaRPr lang="en-US" sz="900" dirty="0"/>
+            <a:endParaRPr lang="en-US" sz="850" dirty="0"/>
+          </a:p>
+        </p:txBody>
+      </p:sp>
+      <p:sp>
+        <p:nvSpPr>
+          <p:cNvPr id="18" name="Shape 16"/>
+          <p:cNvSpPr/>
+          <p:nvPr/>
+        </p:nvSpPr>
+        <p:spPr>
+          <a:xfrm>
+            <a:off x="7580376" y="2505456"/>
+            <a:ext cx="201168" cy="201168"/>
+          </a:xfrm>
+          <a:prstGeom prst="ellipse">
+            <a:avLst/>
+          </a:prstGeom>
+          <a:solidFill>
+            <a:srgbClr val="1C2B4A"/>
+          </a:solidFill>
+          <a:ln/>
+        </p:spPr>
+      </p:sp>
+      <p:sp>
+        <p:nvSpPr>
+          <p:cNvPr id="19" name="Text 17"/>
+          <p:cNvSpPr/>
+          <p:nvPr/>
+        </p:nvSpPr>
+        <p:spPr>
+          <a:xfrm>
+            <a:off x="6903720" y="1892808"/>
+            <a:ext cx="1554480" cy="182880"/>
+          </a:xfrm>
+          <a:prstGeom prst="rect">
+            <a:avLst/>
+          </a:prstGeom>
+          <a:noFill/>
+          <a:ln/>
+        </p:spPr>
+        <p:txBody>
+          <a:bodyPr wrap="square" lIns="0" tIns="0" rIns="0" bIns="0" rtlCol="0" anchor="ctr"/>
+          <a:lstStyle/>
+          <a:p>
+            <a:pPr algn="ctr" indent="0" marL="0">
+              <a:buNone/>
+            </a:pPr>
+            <a:r>
+              <a:rPr lang="en-US" sz="950" b="1" dirty="0">
+                <a:solidFill>
+                  <a:srgbClr val="26262E"/>
+                </a:solidFill>
+                <a:latin typeface="Apple SD Gothic Neo" pitchFamily="34" charset="0"/>
+                <a:ea typeface="Apple SD Gothic Neo" pitchFamily="34" charset="-122"/>
+                <a:cs typeface="Apple SD Gothic Neo" pitchFamily="34" charset="-120"/>
+              </a:rPr>
+              <a:t>2024-05</a:t>
+            </a:r>
+            <a:endParaRPr lang="en-US" sz="950" dirty="0"/>
+          </a:p>
+        </p:txBody>
+      </p:sp>
+      <p:sp>
+        <p:nvSpPr>
+          <p:cNvPr id="20" name="Text 18"/>
+          <p:cNvSpPr/>
+          <p:nvPr/>
+        </p:nvSpPr>
+        <p:spPr>
+          <a:xfrm>
+            <a:off x="6903720" y="2103120"/>
+            <a:ext cx="1554480" cy="329184"/>
+          </a:xfrm>
+          <a:prstGeom prst="rect">
+            <a:avLst/>
+          </a:prstGeom>
+          <a:noFill/>
+          <a:ln/>
+        </p:spPr>
+        <p:txBody>
+          <a:bodyPr wrap="square" lIns="0" tIns="0" rIns="0" bIns="0" rtlCol="0" anchor="ctr"/>
+          <a:lstStyle/>
+          <a:p>
+            <a:pPr algn="ctr" indent="0" marL="0">
+              <a:lnSpc>
+                <a:spcPct val="100000"/>
+              </a:lnSpc>
+              <a:buNone/>
+            </a:pPr>
+            <a:r>
+              <a:rPr lang="en-US" sz="830" dirty="0">
+                <a:solidFill>
+                  <a:srgbClr val="6E6A75"/>
+                </a:solidFill>
+                <a:latin typeface="Apple SD Gothic Neo" pitchFamily="34" charset="0"/>
+                <a:ea typeface="Apple SD Gothic Neo" pitchFamily="34" charset="-122"/>
+                <a:cs typeface="Apple SD Gothic Neo" pitchFamily="34" charset="-120"/>
+              </a:rPr>
+              <a:t>경매개시</a:t>
+            </a:r>
+            <a:endParaRPr lang="en-US" sz="830" dirty="0"/>
+          </a:p>
+          <a:p>
+            <a:pPr algn="ctr" indent="0" marL="0">
+              <a:lnSpc>
+                <a:spcPct val="100000"/>
+              </a:lnSpc>
+              <a:buNone/>
+            </a:pPr>
+            <a:r>
+              <a:rPr lang="en-US" sz="830" dirty="0">
+                <a:solidFill>
+                  <a:srgbClr val="6E6A75"/>
+                </a:solidFill>
+                <a:latin typeface="Apple SD Gothic Neo" pitchFamily="34" charset="0"/>
+                <a:ea typeface="Apple SD Gothic Neo" pitchFamily="34" charset="-122"/>
+                <a:cs typeface="Apple SD Gothic Neo" pitchFamily="34" charset="-120"/>
+              </a:rPr>
+              <a:t>결정등기</a:t>
+            </a:r>
+            <a:endParaRPr lang="en-US" sz="830" dirty="0"/>
+          </a:p>
+        </p:txBody>
+      </p:sp>
+      <p:sp>
+        <p:nvSpPr>
+          <p:cNvPr id="21" name="Text 19"/>
+          <p:cNvSpPr/>
+          <p:nvPr/>
+        </p:nvSpPr>
+        <p:spPr>
+          <a:xfrm>
+            <a:off x="6903720" y="2752344"/>
+            <a:ext cx="1554480" cy="274320"/>
+          </a:xfrm>
+          <a:prstGeom prst="rect">
+            <a:avLst/>
+          </a:prstGeom>
+          <a:noFill/>
+          <a:ln/>
+        </p:spPr>
+        <p:txBody>
+          <a:bodyPr wrap="square" lIns="0" tIns="0" rIns="0" bIns="0" rtlCol="0" anchor="ctr"/>
+          <a:lstStyle/>
+          <a:p>
+            <a:pPr algn="ctr" indent="0" marL="0">
+              <a:lnSpc>
+                <a:spcPct val="100000"/>
+              </a:lnSpc>
+              <a:buNone/>
+            </a:pPr>
+            <a:r>
+              <a:rPr lang="en-US" sz="850" b="1" dirty="0">
+                <a:solidFill>
+                  <a:srgbClr val="8A8492"/>
+                </a:solidFill>
+                <a:latin typeface="Apple SD Gothic Neo" pitchFamily="34" charset="0"/>
+                <a:ea typeface="Apple SD Gothic Neo" pitchFamily="34" charset="-122"/>
+                <a:cs typeface="Apple SD Gothic Neo" pitchFamily="34" charset="-120"/>
+              </a:rPr>
+              <a:t>소멸</a:t>
+            </a:r>
+            <a:endParaRPr lang="en-US" sz="850" dirty="0"/>
           </a:p>
         </p:txBody>
       </p:sp>
@@ -5958,52 +5958,99 @@
         </p:nvSpPr>
         <p:spPr>
           <a:xfrm>
-            <a:off x="502920" y="3611880"/>
-            <a:ext cx="8138160" cy="960120"/>
-          </a:xfrm>
-          <a:prstGeom prst="rect">
-            <a:avLst/>
-          </a:prstGeom>
-          <a:solidFill>
-            <a:srgbClr val="FDEFE5"/>
-          </a:solidFill>
-          <a:ln/>
-        </p:spPr>
-      </p:sp>
-      <p:pic>
-        <p:nvPicPr>
-          <p:cNvPr id="23" name="Image 0" descr="preencoded.png">    </p:cNvPr>
-          <p:cNvPicPr>
-            <a:picLocks noChangeAspect="1"/>
-          </p:cNvPicPr>
-          <p:nvPr/>
-        </p:nvPicPr>
-        <p:blipFill>
-          <a:blip r:embed="rId1"/>
-          <a:stretch>
-            <a:fillRect/>
-          </a:stretch>
-        </p:blipFill>
-        <p:spPr>
-          <a:xfrm>
-            <a:off x="685800" y="3758184"/>
-            <a:ext cx="274320" cy="274320"/>
-          </a:xfrm>
-          <a:prstGeom prst="rect">
-            <a:avLst/>
-          </a:prstGeom>
-        </p:spPr>
-      </p:pic>
-      <p:sp>
-        <p:nvSpPr>
-          <p:cNvPr id="24" name="Text 21"/>
-          <p:cNvSpPr/>
-          <p:nvPr/>
-        </p:nvSpPr>
-        <p:spPr>
-          <a:xfrm>
-            <a:off x="1097280" y="3685032"/>
-            <a:ext cx="7315200" cy="822960"/>
+            <a:off x="502920" y="3246120"/>
+            <a:ext cx="3931920" cy="1234440"/>
+          </a:xfrm>
+          <a:prstGeom prst="rect">
+            <a:avLst/>
+          </a:prstGeom>
+          <a:solidFill>
+            <a:srgbClr val="FFFFFF"/>
+          </a:solidFill>
+          <a:ln w="9525">
+            <a:solidFill>
+              <a:srgbClr val="E5DDD0"/>
+            </a:solidFill>
+            <a:prstDash val="solid"/>
+          </a:ln>
+          <a:effectLst>
+            <a:outerShdw sx="100000" sy="100000" kx="0" ky="0" algn="bl" rotWithShape="0" blurRad="88900" dist="25400" dir="8100000">
+              <a:srgbClr val="1C2B4A">
+                <a:alpha val="14000"/>
+              </a:srgbClr>
+            </a:outerShdw>
+          </a:effectLst>
+        </p:spPr>
+      </p:sp>
+      <p:sp>
+        <p:nvSpPr>
+          <p:cNvPr id="23" name="Shape 21"/>
+          <p:cNvSpPr/>
+          <p:nvPr/>
+        </p:nvSpPr>
+        <p:spPr>
+          <a:xfrm>
+            <a:off x="502920" y="3246120"/>
+            <a:ext cx="64008" cy="1234440"/>
+          </a:xfrm>
+          <a:prstGeom prst="rect">
+            <a:avLst/>
+          </a:prstGeom>
+          <a:solidFill>
+            <a:srgbClr val="1C2B4A"/>
+          </a:solidFill>
+          <a:ln/>
+        </p:spPr>
+      </p:sp>
+      <p:sp>
+        <p:nvSpPr>
+          <p:cNvPr id="24" name="Text 22"/>
+          <p:cNvSpPr/>
+          <p:nvPr/>
+        </p:nvSpPr>
+        <p:spPr>
+          <a:xfrm>
+            <a:off x="685800" y="3355848"/>
+            <a:ext cx="3566160" cy="274320"/>
+          </a:xfrm>
+          <a:prstGeom prst="rect">
+            <a:avLst/>
+          </a:prstGeom>
+          <a:noFill/>
+          <a:ln/>
+        </p:spPr>
+        <p:txBody>
+          <a:bodyPr wrap="square" lIns="0" tIns="0" rIns="0" bIns="0" rtlCol="0" anchor="ctr"/>
+          <a:lstStyle/>
+          <a:p>
+            <a:pPr indent="0" marL="0">
+              <a:buNone/>
+            </a:pPr>
+            <a:r>
+              <a:rPr lang="en-US" sz="1150" b="1" dirty="0">
+                <a:solidFill>
+                  <a:srgbClr val="1C2B4A"/>
+                </a:solidFill>
+                <a:latin typeface="Apple SD Gothic Neo" pitchFamily="34" charset="0"/>
+                <a:ea typeface="Apple SD Gothic Neo" pitchFamily="34" charset="-122"/>
+                <a:cs typeface="Apple SD Gothic Neo" pitchFamily="34" charset="-120"/>
+              </a:rPr>
+              <a:t>말소기준권리가 될 수 있는 물권</a:t>
+            </a:r>
+            <a:endParaRPr lang="en-US" sz="1150" dirty="0"/>
+          </a:p>
+        </p:txBody>
+      </p:sp>
+      <p:sp>
+        <p:nvSpPr>
+          <p:cNvPr id="25" name="Text 23"/>
+          <p:cNvSpPr/>
+          <p:nvPr/>
+        </p:nvSpPr>
+        <p:spPr>
+          <a:xfrm>
+            <a:off x="685800" y="3666744"/>
+            <a:ext cx="3566160" cy="566928"/>
           </a:xfrm>
           <a:prstGeom prst="rect">
             <a:avLst/>
@@ -6022,7 +6069,137 @@
               <a:buNone/>
             </a:pPr>
             <a:r>
-              <a:rPr lang="en-US" sz="1030" b="1" dirty="0">
+              <a:rPr lang="en-US" sz="950" dirty="0">
+                <a:solidFill>
+                  <a:srgbClr val="26262E"/>
+                </a:solidFill>
+                <a:latin typeface="Apple SD Gothic Neo" pitchFamily="34" charset="0"/>
+                <a:ea typeface="Apple SD Gothic Neo" pitchFamily="34" charset="-122"/>
+                <a:cs typeface="Apple SD Gothic Neo" pitchFamily="34" charset="-120"/>
+              </a:rPr>
+              <a:t>근저당권 · 저당권 · 압류 · 가압류 · 담보가등기 · 선순위전세권 · 경매개시결정등기</a:t>
+            </a:r>
+            <a:endParaRPr lang="en-US" sz="950" dirty="0"/>
+          </a:p>
+        </p:txBody>
+      </p:sp>
+      <p:sp>
+        <p:nvSpPr>
+          <p:cNvPr id="26" name="Text 24"/>
+          <p:cNvSpPr/>
+          <p:nvPr/>
+        </p:nvSpPr>
+        <p:spPr>
+          <a:xfrm>
+            <a:off x="685800" y="4215384"/>
+            <a:ext cx="3566160" cy="219456"/>
+          </a:xfrm>
+          <a:prstGeom prst="rect">
+            <a:avLst/>
+          </a:prstGeom>
+          <a:noFill/>
+          <a:ln/>
+        </p:spPr>
+        <p:txBody>
+          <a:bodyPr wrap="square" lIns="0" tIns="0" rIns="0" bIns="0" rtlCol="0" anchor="ctr"/>
+          <a:lstStyle/>
+          <a:p>
+            <a:pPr indent="0" marL="0">
+              <a:buNone/>
+            </a:pPr>
+            <a:r>
+              <a:rPr lang="en-US" sz="830" i="1" dirty="0">
+                <a:solidFill>
+                  <a:srgbClr val="6E6A75"/>
+                </a:solidFill>
+                <a:latin typeface="Apple SD Gothic Neo" pitchFamily="34" charset="0"/>
+                <a:ea typeface="Apple SD Gothic Neo" pitchFamily="34" charset="-122"/>
+                <a:cs typeface="Apple SD Gothic Neo" pitchFamily="34" charset="-120"/>
+              </a:rPr>
+              <a:t>→ 이 중 등기부상 가장 빠른 것이 말소기준권리입니다</a:t>
+            </a:r>
+            <a:endParaRPr lang="en-US" sz="830" dirty="0"/>
+          </a:p>
+        </p:txBody>
+      </p:sp>
+      <p:sp>
+        <p:nvSpPr>
+          <p:cNvPr id="27" name="Shape 25"/>
+          <p:cNvSpPr/>
+          <p:nvPr/>
+        </p:nvSpPr>
+        <p:spPr>
+          <a:xfrm>
+            <a:off x="4709160" y="3246120"/>
+            <a:ext cx="3931920" cy="1234440"/>
+          </a:xfrm>
+          <a:prstGeom prst="rect">
+            <a:avLst/>
+          </a:prstGeom>
+          <a:solidFill>
+            <a:srgbClr val="FFFFFF"/>
+          </a:solidFill>
+          <a:ln w="9525">
+            <a:solidFill>
+              <a:srgbClr val="E5DDD0"/>
+            </a:solidFill>
+            <a:prstDash val="solid"/>
+          </a:ln>
+          <a:effectLst>
+            <a:outerShdw sx="100000" sy="100000" kx="0" ky="0" algn="bl" rotWithShape="0" blurRad="88900" dist="25400" dir="8100000">
+              <a:srgbClr val="1C2B4A">
+                <a:alpha val="14000"/>
+              </a:srgbClr>
+            </a:outerShdw>
+          </a:effectLst>
+        </p:spPr>
+      </p:sp>
+      <p:sp>
+        <p:nvSpPr>
+          <p:cNvPr id="28" name="Shape 26"/>
+          <p:cNvSpPr/>
+          <p:nvPr/>
+        </p:nvSpPr>
+        <p:spPr>
+          <a:xfrm>
+            <a:off x="4709160" y="3246120"/>
+            <a:ext cx="64008" cy="1234440"/>
+          </a:xfrm>
+          <a:prstGeom prst="rect">
+            <a:avLst/>
+          </a:prstGeom>
+          <a:solidFill>
+            <a:srgbClr val="E2611F"/>
+          </a:solidFill>
+          <a:ln/>
+        </p:spPr>
+      </p:sp>
+      <p:sp>
+        <p:nvSpPr>
+          <p:cNvPr id="29" name="Text 27"/>
+          <p:cNvSpPr/>
+          <p:nvPr/>
+        </p:nvSpPr>
+        <p:spPr>
+          <a:xfrm>
+            <a:off x="4892040" y="3355848"/>
+            <a:ext cx="3566160" cy="274320"/>
+          </a:xfrm>
+          <a:prstGeom prst="rect">
+            <a:avLst/>
+          </a:prstGeom>
+          <a:noFill/>
+          <a:ln/>
+        </p:spPr>
+        <p:txBody>
+          <a:bodyPr wrap="square" lIns="0" tIns="0" rIns="0" bIns="0" rtlCol="0" anchor="ctr"/>
+          <a:lstStyle/>
+          <a:p>
+            <a:pPr indent="0" marL="0">
+              <a:buNone/>
+            </a:pPr>
+            <a:r>
+              <a:rPr lang="en-US" sz="1150" b="1" dirty="0">
                 <a:solidFill>
                   <a:srgbClr val="E2611F"/>
                 </a:solidFill>
@@ -6030,16 +6207,45 @@
                 <a:ea typeface="Apple SD Gothic Neo" pitchFamily="34" charset="-122"/>
                 <a:cs typeface="Apple SD Gothic Neo" pitchFamily="34" charset="-120"/>
               </a:rPr>
-              <a:t>만약 임차인 전입일이 2018년(근저당보다 빠름)이었다면?  </a:t>
-            </a:r>
-            <a:pPr indent="0" marL="0">
+              <a:t>기준과 무관하게 인수되는 권리</a:t>
+            </a:r>
+            <a:endParaRPr lang="en-US" sz="1150" dirty="0"/>
+          </a:p>
+        </p:txBody>
+      </p:sp>
+      <p:sp>
+        <p:nvSpPr>
+          <p:cNvPr id="30" name="Text 28"/>
+          <p:cNvSpPr/>
+          <p:nvPr/>
+        </p:nvSpPr>
+        <p:spPr>
+          <a:xfrm>
+            <a:off x="4946904" y="3666744"/>
+            <a:ext cx="3511296" cy="768096"/>
+          </a:xfrm>
+          <a:prstGeom prst="rect">
+            <a:avLst/>
+          </a:prstGeom>
+          <a:noFill/>
+          <a:ln/>
+        </p:spPr>
+        <p:txBody>
+          <a:bodyPr wrap="square" lIns="0" tIns="0" rIns="0" bIns="0" rtlCol="0" anchor="ctr"/>
+          <a:lstStyle/>
+          <a:p>
+            <a:pPr marL="101600" indent="-101600">
               <a:lnSpc>
-                <a:spcPct val="120000"/>
+                <a:spcPct val="115000"/>
               </a:lnSpc>
-              <a:buNone/>
-            </a:pPr>
-            <a:r>
-              <a:rPr lang="en-US" sz="1030" dirty="0">
+              <a:spcAft>
+                <a:spcPts val="600"/>
+              </a:spcAft>
+              <a:buSzPct val="100000"/>
+              <a:buChar char="•"/>
+            </a:pPr>
+            <a:r>
+              <a:rPr lang="en-US" sz="930" dirty="0">
                 <a:solidFill>
                   <a:srgbClr val="26262E"/>
                 </a:solidFill>
@@ -6047,34 +6253,23 @@
                 <a:ea typeface="Apple SD Gothic Neo" pitchFamily="34" charset="-122"/>
                 <a:cs typeface="Apple SD Gothic Neo" pitchFamily="34" charset="-120"/>
               </a:rPr>
-              <a:t>→ 말소기준권리보다 선순위 → 대항력 있음 → 낙찰자가 보증금을 인수해야 합니다.
-</a:t>
-            </a:r>
-            <a:pPr indent="0" marL="0">
+              <a:t>유치권 — 점유 + 피담보채권 요건만 갖추면 말소기준권리 선후와 무관하게 낙찰자가 인수</a:t>
+            </a:r>
+            <a:endParaRPr lang="en-US" sz="930" dirty="0"/>
+          </a:p>
+          <a:p>
+            <a:pPr marL="101600" indent="-101600">
               <a:lnSpc>
-                <a:spcPct val="120000"/>
+                <a:spcPct val="115000"/>
               </a:lnSpc>
-              <a:buNone/>
-            </a:pPr>
-            <a:r>
-              <a:rPr lang="en-US" sz="1030" b="1" dirty="0">
-                <a:solidFill>
-                  <a:srgbClr val="1C2B4A"/>
-                </a:solidFill>
-                <a:latin typeface="Apple SD Gothic Neo" pitchFamily="34" charset="0"/>
-                <a:ea typeface="Apple SD Gothic Neo" pitchFamily="34" charset="-122"/>
-                <a:cs typeface="Apple SD Gothic Neo" pitchFamily="34" charset="-120"/>
-              </a:rPr>
-              <a:t>판단법은 단 하나  </a:t>
-            </a:r>
-            <a:pPr indent="0" marL="0">
-              <a:lnSpc>
-                <a:spcPct val="120000"/>
-              </a:lnSpc>
-              <a:buNone/>
-            </a:pPr>
-            <a:r>
-              <a:rPr lang="en-US" sz="1030" dirty="0">
+              <a:spcAft>
+                <a:spcPts val="600"/>
+              </a:spcAft>
+              <a:buSzPct val="100000"/>
+              <a:buChar char="•"/>
+            </a:pPr>
+            <a:r>
+              <a:rPr lang="en-US" sz="930" dirty="0">
                 <a:solidFill>
                   <a:srgbClr val="26262E"/>
                 </a:solidFill>
@@ -6082,15 +6277,15 @@
                 <a:ea typeface="Apple SD Gothic Neo" pitchFamily="34" charset="-122"/>
                 <a:cs typeface="Apple SD Gothic Neo" pitchFamily="34" charset="-120"/>
               </a:rPr>
-              <a:t>날짜를 비교합니다 — 말소기준권리보다 빠르면 인수, 늦으면 소멸.</a:t>
-            </a:r>
-            <a:endParaRPr lang="en-US" sz="1030" dirty="0"/>
-          </a:p>
-        </p:txBody>
-      </p:sp>
-      <p:sp>
-        <p:nvSpPr>
-          <p:cNvPr id="25" name="Text 22"/>
+              <a:t>법정지상권 — 압류 당시 토지·건물이 동일 소유였다면 말소기준권리와 무관하게 성립</a:t>
+            </a:r>
+            <a:endParaRPr lang="en-US" sz="930" dirty="0"/>
+          </a:p>
+        </p:txBody>
+      </p:sp>
+      <p:sp>
+        <p:nvSpPr>
+          <p:cNvPr id="31" name="Text 29"/>
           <p:cNvSpPr/>
           <p:nvPr/>
         </p:nvSpPr>
@@ -6129,7 +6324,7 @@
       </p:sp>
       <p:sp>
         <p:nvSpPr>
-          <p:cNvPr id="26" name="Text 23"/>
+          <p:cNvPr id="32" name="Text 30"/>
           <p:cNvSpPr/>
           <p:nvPr/>
         </p:nvSpPr>
@@ -7088,7 +7283,7 @@
         <p:spPr>
           <a:xfrm>
             <a:off x="502920" y="1298448"/>
-            <a:ext cx="8138160" cy="365760"/>
+            <a:ext cx="8138160" cy="420624"/>
           </a:xfrm>
           <a:prstGeom prst="rect">
             <a:avLst/>
@@ -7112,7 +7307,7 @@
         </p:nvSpPr>
         <p:spPr>
           <a:xfrm>
-            <a:off x="576072" y="1335024"/>
+            <a:off x="576072" y="1362456"/>
             <a:ext cx="292608" cy="292608"/>
           </a:xfrm>
           <a:prstGeom prst="ellipse">
@@ -7132,7 +7327,7 @@
         </p:nvSpPr>
         <p:spPr>
           <a:xfrm>
-            <a:off x="576072" y="1324051"/>
+            <a:off x="576072" y="1351483"/>
             <a:ext cx="292608" cy="292608"/>
           </a:xfrm>
           <a:prstGeom prst="rect">
@@ -7172,23 +7367,23 @@
         <p:spPr>
           <a:xfrm>
             <a:off x="978408" y="1298448"/>
-            <a:ext cx="2743200" cy="365760"/>
-          </a:xfrm>
-          <a:prstGeom prst="rect">
-            <a:avLst/>
-          </a:prstGeom>
-          <a:noFill/>
-          <a:ln/>
-        </p:spPr>
-        <p:txBody>
-          <a:bodyPr wrap="square" lIns="0" tIns="0" rIns="0" bIns="0" rtlCol="0" anchor="ctr"/>
-          <a:lstStyle/>
-          <a:p>
-            <a:pPr indent="0" marL="0">
-              <a:buNone/>
-            </a:pPr>
-            <a:r>
-              <a:rPr lang="en-US" sz="1030" b="1" dirty="0">
+            <a:ext cx="3063240" cy="420624"/>
+          </a:xfrm>
+          <a:prstGeom prst="rect">
+            <a:avLst/>
+          </a:prstGeom>
+          <a:noFill/>
+          <a:ln/>
+        </p:spPr>
+        <p:txBody>
+          <a:bodyPr wrap="square" lIns="0" tIns="0" rIns="0" bIns="0" rtlCol="0" anchor="ctr"/>
+          <a:lstStyle/>
+          <a:p>
+            <a:pPr indent="0" marL="0">
+              <a:buNone/>
+            </a:pPr>
+            <a:r>
+              <a:rPr lang="en-US" sz="1000" b="1" dirty="0">
                 <a:solidFill>
                   <a:srgbClr val="26262E"/>
                 </a:solidFill>
@@ -7198,7 +7393,7 @@
               </a:rPr>
               <a:t>경매 집행비용</a:t>
             </a:r>
-            <a:endParaRPr lang="en-US" sz="1030" dirty="0"/>
+            <a:endParaRPr lang="en-US" sz="1000" dirty="0"/>
           </a:p>
         </p:txBody>
       </p:sp>
@@ -7210,24 +7405,24 @@
         </p:nvSpPr>
         <p:spPr>
           <a:xfrm>
-            <a:off x="3794760" y="1298448"/>
-            <a:ext cx="4736592" cy="365760"/>
-          </a:xfrm>
-          <a:prstGeom prst="rect">
-            <a:avLst/>
-          </a:prstGeom>
-          <a:noFill/>
-          <a:ln/>
-        </p:spPr>
-        <p:txBody>
-          <a:bodyPr wrap="square" lIns="0" tIns="0" rIns="0" bIns="0" rtlCol="0" anchor="ctr"/>
-          <a:lstStyle/>
-          <a:p>
-            <a:pPr indent="0" marL="0">
-              <a:buNone/>
-            </a:pPr>
-            <a:r>
-              <a:rPr lang="en-US" sz="930" dirty="0">
+            <a:off x="4114800" y="1298448"/>
+            <a:ext cx="4416552" cy="420624"/>
+          </a:xfrm>
+          <a:prstGeom prst="rect">
+            <a:avLst/>
+          </a:prstGeom>
+          <a:noFill/>
+          <a:ln/>
+        </p:spPr>
+        <p:txBody>
+          <a:bodyPr wrap="square" lIns="0" tIns="0" rIns="0" bIns="0" rtlCol="0" anchor="ctr"/>
+          <a:lstStyle/>
+          <a:p>
+            <a:pPr indent="0" marL="0">
+              <a:buNone/>
+            </a:pPr>
+            <a:r>
+              <a:rPr lang="en-US" sz="920" dirty="0">
                 <a:solidFill>
                   <a:srgbClr val="6E6A75"/>
                 </a:solidFill>
@@ -7237,7 +7432,7 @@
               </a:rPr>
               <a:t>감정료 · 송달료 등 절차 진행 비용 — 가장 먼저 공제</a:t>
             </a:r>
-            <a:endParaRPr lang="en-US" sz="930" dirty="0"/>
+            <a:endParaRPr lang="en-US" sz="920" dirty="0"/>
           </a:p>
         </p:txBody>
       </p:sp>
@@ -7249,8 +7444,8 @@
         </p:nvSpPr>
         <p:spPr>
           <a:xfrm>
-            <a:off x="502920" y="1709928"/>
-            <a:ext cx="8138160" cy="365760"/>
+            <a:off x="502920" y="1764792"/>
+            <a:ext cx="8138160" cy="420624"/>
           </a:xfrm>
           <a:prstGeom prst="rect">
             <a:avLst/>
@@ -7274,7 +7469,7 @@
         </p:nvSpPr>
         <p:spPr>
           <a:xfrm>
-            <a:off x="576072" y="1746504"/>
+            <a:off x="576072" y="1828800"/>
             <a:ext cx="292608" cy="292608"/>
           </a:xfrm>
           <a:prstGeom prst="ellipse">
@@ -7294,7 +7489,7 @@
         </p:nvSpPr>
         <p:spPr>
           <a:xfrm>
-            <a:off x="576072" y="1735531"/>
+            <a:off x="576072" y="1817827"/>
             <a:ext cx="292608" cy="292608"/>
           </a:xfrm>
           <a:prstGeom prst="rect">
@@ -7333,24 +7528,24 @@
         </p:nvSpPr>
         <p:spPr>
           <a:xfrm>
-            <a:off x="978408" y="1709928"/>
-            <a:ext cx="2743200" cy="365760"/>
-          </a:xfrm>
-          <a:prstGeom prst="rect">
-            <a:avLst/>
-          </a:prstGeom>
-          <a:noFill/>
-          <a:ln/>
-        </p:spPr>
-        <p:txBody>
-          <a:bodyPr wrap="square" lIns="0" tIns="0" rIns="0" bIns="0" rtlCol="0" anchor="ctr"/>
-          <a:lstStyle/>
-          <a:p>
-            <a:pPr indent="0" marL="0">
-              <a:buNone/>
-            </a:pPr>
-            <a:r>
-              <a:rPr lang="en-US" sz="1030" b="1" dirty="0">
+            <a:off x="978408" y="1764792"/>
+            <a:ext cx="3063240" cy="420624"/>
+          </a:xfrm>
+          <a:prstGeom prst="rect">
+            <a:avLst/>
+          </a:prstGeom>
+          <a:noFill/>
+          <a:ln/>
+        </p:spPr>
+        <p:txBody>
+          <a:bodyPr wrap="square" lIns="0" tIns="0" rIns="0" bIns="0" rtlCol="0" anchor="ctr"/>
+          <a:lstStyle/>
+          <a:p>
+            <a:pPr indent="0" marL="0">
+              <a:buNone/>
+            </a:pPr>
+            <a:r>
+              <a:rPr lang="en-US" sz="1000" b="1" dirty="0">
                 <a:solidFill>
                   <a:srgbClr val="26262E"/>
                 </a:solidFill>
@@ -7360,7 +7555,7 @@
               </a:rPr>
               <a:t>최우선변제</a:t>
             </a:r>
-            <a:endParaRPr lang="en-US" sz="1030" dirty="0"/>
+            <a:endParaRPr lang="en-US" sz="1000" dirty="0"/>
           </a:p>
         </p:txBody>
       </p:sp>
@@ -7372,24 +7567,24 @@
         </p:nvSpPr>
         <p:spPr>
           <a:xfrm>
-            <a:off x="3794760" y="1709928"/>
-            <a:ext cx="4736592" cy="365760"/>
-          </a:xfrm>
-          <a:prstGeom prst="rect">
-            <a:avLst/>
-          </a:prstGeom>
-          <a:noFill/>
-          <a:ln/>
-        </p:spPr>
-        <p:txBody>
-          <a:bodyPr wrap="square" lIns="0" tIns="0" rIns="0" bIns="0" rtlCol="0" anchor="ctr"/>
-          <a:lstStyle/>
-          <a:p>
-            <a:pPr indent="0" marL="0">
-              <a:buNone/>
-            </a:pPr>
-            <a:r>
-              <a:rPr lang="en-US" sz="930" dirty="0">
+            <a:off x="4114800" y="1764792"/>
+            <a:ext cx="4416552" cy="420624"/>
+          </a:xfrm>
+          <a:prstGeom prst="rect">
+            <a:avLst/>
+          </a:prstGeom>
+          <a:noFill/>
+          <a:ln/>
+        </p:spPr>
+        <p:txBody>
+          <a:bodyPr wrap="square" lIns="0" tIns="0" rIns="0" bIns="0" rtlCol="0" anchor="ctr"/>
+          <a:lstStyle/>
+          <a:p>
+            <a:pPr indent="0" marL="0">
+              <a:buNone/>
+            </a:pPr>
+            <a:r>
+              <a:rPr lang="en-US" sz="920" dirty="0">
                 <a:solidFill>
                   <a:srgbClr val="6E6A75"/>
                 </a:solidFill>
@@ -7399,7 +7594,7 @@
               </a:rPr>
               <a:t>소액임차인 보증금 일부 + 최종 3개월분 임금·퇴직금</a:t>
             </a:r>
-            <a:endParaRPr lang="en-US" sz="930" dirty="0"/>
+            <a:endParaRPr lang="en-US" sz="920" dirty="0"/>
           </a:p>
         </p:txBody>
       </p:sp>
@@ -7411,8 +7606,8 @@
         </p:nvSpPr>
         <p:spPr>
           <a:xfrm>
-            <a:off x="502920" y="2121408"/>
-            <a:ext cx="8138160" cy="365760"/>
+            <a:off x="502920" y="2231136"/>
+            <a:ext cx="8138160" cy="420624"/>
           </a:xfrm>
           <a:prstGeom prst="rect">
             <a:avLst/>
@@ -7436,7 +7631,7 @@
         </p:nvSpPr>
         <p:spPr>
           <a:xfrm>
-            <a:off x="576072" y="2157984"/>
+            <a:off x="576072" y="2295144"/>
             <a:ext cx="292608" cy="292608"/>
           </a:xfrm>
           <a:prstGeom prst="ellipse">
@@ -7456,7 +7651,7 @@
         </p:nvSpPr>
         <p:spPr>
           <a:xfrm>
-            <a:off x="576072" y="2147011"/>
+            <a:off x="576072" y="2284171"/>
             <a:ext cx="292608" cy="292608"/>
           </a:xfrm>
           <a:prstGeom prst="rect">
@@ -7495,24 +7690,24 @@
         </p:nvSpPr>
         <p:spPr>
           <a:xfrm>
-            <a:off x="978408" y="2121408"/>
-            <a:ext cx="2743200" cy="365760"/>
-          </a:xfrm>
-          <a:prstGeom prst="rect">
-            <a:avLst/>
-          </a:prstGeom>
-          <a:noFill/>
-          <a:ln/>
-        </p:spPr>
-        <p:txBody>
-          <a:bodyPr wrap="square" lIns="0" tIns="0" rIns="0" bIns="0" rtlCol="0" anchor="ctr"/>
-          <a:lstStyle/>
-          <a:p>
-            <a:pPr indent="0" marL="0">
-              <a:buNone/>
-            </a:pPr>
-            <a:r>
-              <a:rPr lang="en-US" sz="1030" b="1" dirty="0">
+            <a:off x="978408" y="2231136"/>
+            <a:ext cx="3063240" cy="420624"/>
+          </a:xfrm>
+          <a:prstGeom prst="rect">
+            <a:avLst/>
+          </a:prstGeom>
+          <a:noFill/>
+          <a:ln/>
+        </p:spPr>
+        <p:txBody>
+          <a:bodyPr wrap="square" lIns="0" tIns="0" rIns="0" bIns="0" rtlCol="0" anchor="ctr"/>
+          <a:lstStyle/>
+          <a:p>
+            <a:pPr indent="0" marL="0">
+              <a:buNone/>
+            </a:pPr>
+            <a:r>
+              <a:rPr lang="en-US" sz="1000" b="1" dirty="0">
                 <a:solidFill>
                   <a:srgbClr val="E2611F"/>
                 </a:solidFill>
@@ -7520,9 +7715,9 @@
                 <a:ea typeface="Apple SD Gothic Neo" pitchFamily="34" charset="-122"/>
                 <a:cs typeface="Apple SD Gothic Neo" pitchFamily="34" charset="-120"/>
               </a:rPr>
-              <a:t>당해세</a:t>
-            </a:r>
-            <a:endParaRPr lang="en-US" sz="1030" dirty="0"/>
+              <a:t>당해세 ↔ 확정일자·설정일 (경합)</a:t>
+            </a:r>
+            <a:endParaRPr lang="en-US" sz="1000" dirty="0"/>
           </a:p>
         </p:txBody>
       </p:sp>
@@ -7534,24 +7729,24 @@
         </p:nvSpPr>
         <p:spPr>
           <a:xfrm>
-            <a:off x="3794760" y="2121408"/>
-            <a:ext cx="4736592" cy="365760"/>
-          </a:xfrm>
-          <a:prstGeom prst="rect">
-            <a:avLst/>
-          </a:prstGeom>
-          <a:noFill/>
-          <a:ln/>
-        </p:spPr>
-        <p:txBody>
-          <a:bodyPr wrap="square" lIns="0" tIns="0" rIns="0" bIns="0" rtlCol="0" anchor="ctr"/>
-          <a:lstStyle/>
-          <a:p>
-            <a:pPr indent="0" marL="0">
-              <a:buNone/>
-            </a:pPr>
-            <a:r>
-              <a:rPr lang="en-US" sz="930" dirty="0">
+            <a:off x="4114800" y="2231136"/>
+            <a:ext cx="4416552" cy="420624"/>
+          </a:xfrm>
+          <a:prstGeom prst="rect">
+            <a:avLst/>
+          </a:prstGeom>
+          <a:noFill/>
+          <a:ln/>
+        </p:spPr>
+        <p:txBody>
+          <a:bodyPr wrap="square" lIns="0" tIns="0" rIns="0" bIns="0" rtlCol="0" anchor="ctr"/>
+          <a:lstStyle/>
+          <a:p>
+            <a:pPr indent="0" marL="0">
+              <a:buNone/>
+            </a:pPr>
+            <a:r>
+              <a:rPr lang="en-US" sz="920" dirty="0">
                 <a:solidFill>
                   <a:srgbClr val="6E6A75"/>
                 </a:solidFill>
@@ -7559,9 +7754,9 @@
                 <a:ea typeface="Apple SD Gothic Neo" pitchFamily="34" charset="-122"/>
                 <a:cs typeface="Apple SD Gothic Neo" pitchFamily="34" charset="-120"/>
               </a:rPr>
-              <a:t>그 부동산에 부과된 국세·지방세 (상속세 · 증여세 · 종부세 등)</a:t>
-            </a:r>
-            <a:endParaRPr lang="en-US" sz="930" dirty="0"/>
+              <a:t>법정기일 vs 확정일자·설정일, 빠른 쪽이 우선 — 근저당권·전세권·확정일자부임차인 포함</a:t>
+            </a:r>
+            <a:endParaRPr lang="en-US" sz="920" dirty="0"/>
           </a:p>
         </p:txBody>
       </p:sp>
@@ -7573,8 +7768,8 @@
         </p:nvSpPr>
         <p:spPr>
           <a:xfrm>
-            <a:off x="502920" y="2532888"/>
-            <a:ext cx="8138160" cy="365760"/>
+            <a:off x="502920" y="2697480"/>
+            <a:ext cx="8138160" cy="420624"/>
           </a:xfrm>
           <a:prstGeom prst="rect">
             <a:avLst/>
@@ -7598,7 +7793,7 @@
         </p:nvSpPr>
         <p:spPr>
           <a:xfrm>
-            <a:off x="576072" y="2569464"/>
+            <a:off x="576072" y="2761488"/>
             <a:ext cx="292608" cy="292608"/>
           </a:xfrm>
           <a:prstGeom prst="ellipse">
@@ -7618,7 +7813,7 @@
         </p:nvSpPr>
         <p:spPr>
           <a:xfrm>
-            <a:off x="576072" y="2558491"/>
+            <a:off x="576072" y="2750515"/>
             <a:ext cx="292608" cy="292608"/>
           </a:xfrm>
           <a:prstGeom prst="rect">
@@ -7657,24 +7852,24 @@
         </p:nvSpPr>
         <p:spPr>
           <a:xfrm>
-            <a:off x="978408" y="2532888"/>
-            <a:ext cx="2743200" cy="365760"/>
-          </a:xfrm>
-          <a:prstGeom prst="rect">
-            <a:avLst/>
-          </a:prstGeom>
-          <a:noFill/>
-          <a:ln/>
-        </p:spPr>
-        <p:txBody>
-          <a:bodyPr wrap="square" lIns="0" tIns="0" rIns="0" bIns="0" rtlCol="0" anchor="ctr"/>
-          <a:lstStyle/>
-          <a:p>
-            <a:pPr indent="0" marL="0">
-              <a:buNone/>
-            </a:pPr>
-            <a:r>
-              <a:rPr lang="en-US" sz="1030" b="1" dirty="0">
+            <a:off x="978408" y="2697480"/>
+            <a:ext cx="3063240" cy="420624"/>
+          </a:xfrm>
+          <a:prstGeom prst="rect">
+            <a:avLst/>
+          </a:prstGeom>
+          <a:noFill/>
+          <a:ln/>
+        </p:spPr>
+        <p:txBody>
+          <a:bodyPr wrap="square" lIns="0" tIns="0" rIns="0" bIns="0" rtlCol="0" anchor="ctr"/>
+          <a:lstStyle/>
+          <a:p>
+            <a:pPr indent="0" marL="0">
+              <a:buNone/>
+            </a:pPr>
+            <a:r>
+              <a:rPr lang="en-US" sz="1000" b="1" dirty="0">
                 <a:solidFill>
                   <a:srgbClr val="26262E"/>
                 </a:solidFill>
@@ -7682,9 +7877,9 @@
                 <a:ea typeface="Apple SD Gothic Neo" pitchFamily="34" charset="-122"/>
                 <a:cs typeface="Apple SD Gothic Neo" pitchFamily="34" charset="-120"/>
               </a:rPr>
-              <a:t>확정일자 · 설정일 순위배당</a:t>
-            </a:r>
-            <a:endParaRPr lang="en-US" sz="1030" dirty="0"/>
+              <a:t>일반 임금채권 · 일반 조세채권</a:t>
+            </a:r>
+            <a:endParaRPr lang="en-US" sz="1000" dirty="0"/>
           </a:p>
         </p:txBody>
       </p:sp>
@@ -7696,24 +7891,24 @@
         </p:nvSpPr>
         <p:spPr>
           <a:xfrm>
-            <a:off x="3794760" y="2532888"/>
-            <a:ext cx="4736592" cy="365760"/>
-          </a:xfrm>
-          <a:prstGeom prst="rect">
-            <a:avLst/>
-          </a:prstGeom>
-          <a:noFill/>
-          <a:ln/>
-        </p:spPr>
-        <p:txBody>
-          <a:bodyPr wrap="square" lIns="0" tIns="0" rIns="0" bIns="0" rtlCol="0" anchor="ctr"/>
-          <a:lstStyle/>
-          <a:p>
-            <a:pPr indent="0" marL="0">
-              <a:buNone/>
-            </a:pPr>
-            <a:r>
-              <a:rPr lang="en-US" sz="930" dirty="0">
+            <a:off x="4114800" y="2697480"/>
+            <a:ext cx="4416552" cy="420624"/>
+          </a:xfrm>
+          <a:prstGeom prst="rect">
+            <a:avLst/>
+          </a:prstGeom>
+          <a:noFill/>
+          <a:ln/>
+        </p:spPr>
+        <p:txBody>
+          <a:bodyPr wrap="square" lIns="0" tIns="0" rIns="0" bIns="0" rtlCol="0" anchor="ctr"/>
+          <a:lstStyle/>
+          <a:p>
+            <a:pPr indent="0" marL="0">
+              <a:buNone/>
+            </a:pPr>
+            <a:r>
+              <a:rPr lang="en-US" sz="920" dirty="0">
                 <a:solidFill>
                   <a:srgbClr val="6E6A75"/>
                 </a:solidFill>
@@ -7721,9 +7916,9 @@
                 <a:ea typeface="Apple SD Gothic Neo" pitchFamily="34" charset="-122"/>
                 <a:cs typeface="Apple SD Gothic Neo" pitchFamily="34" charset="-120"/>
               </a:rPr>
-              <a:t>근저당권 · 전세권 · 확정일자부 임차인 — 등기/확정일자 빠른 순</a:t>
-            </a:r>
-            <a:endParaRPr lang="en-US" sz="930" dirty="0"/>
+              <a:t>최우선변제·당해세에서 제외된 나머지</a:t>
+            </a:r>
+            <a:endParaRPr lang="en-US" sz="920" dirty="0"/>
           </a:p>
         </p:txBody>
       </p:sp>
@@ -7735,8 +7930,8 @@
         </p:nvSpPr>
         <p:spPr>
           <a:xfrm>
-            <a:off x="502920" y="2944368"/>
-            <a:ext cx="8138160" cy="365760"/>
+            <a:off x="502920" y="3163824"/>
+            <a:ext cx="8138160" cy="420624"/>
           </a:xfrm>
           <a:prstGeom prst="rect">
             <a:avLst/>
@@ -7760,7 +7955,7 @@
         </p:nvSpPr>
         <p:spPr>
           <a:xfrm>
-            <a:off x="576072" y="2980944"/>
+            <a:off x="576072" y="3227832"/>
             <a:ext cx="292608" cy="292608"/>
           </a:xfrm>
           <a:prstGeom prst="ellipse">
@@ -7780,7 +7975,7 @@
         </p:nvSpPr>
         <p:spPr>
           <a:xfrm>
-            <a:off x="576072" y="2969971"/>
+            <a:off x="576072" y="3216859"/>
             <a:ext cx="292608" cy="292608"/>
           </a:xfrm>
           <a:prstGeom prst="rect">
@@ -7819,24 +8014,24 @@
         </p:nvSpPr>
         <p:spPr>
           <a:xfrm>
-            <a:off x="978408" y="2944368"/>
-            <a:ext cx="2743200" cy="365760"/>
-          </a:xfrm>
-          <a:prstGeom prst="rect">
-            <a:avLst/>
-          </a:prstGeom>
-          <a:noFill/>
-          <a:ln/>
-        </p:spPr>
-        <p:txBody>
-          <a:bodyPr wrap="square" lIns="0" tIns="0" rIns="0" bIns="0" rtlCol="0" anchor="ctr"/>
-          <a:lstStyle/>
-          <a:p>
-            <a:pPr indent="0" marL="0">
-              <a:buNone/>
-            </a:pPr>
-            <a:r>
-              <a:rPr lang="en-US" sz="1030" b="1" dirty="0">
+            <a:off x="978408" y="3163824"/>
+            <a:ext cx="3063240" cy="420624"/>
+          </a:xfrm>
+          <a:prstGeom prst="rect">
+            <a:avLst/>
+          </a:prstGeom>
+          <a:noFill/>
+          <a:ln/>
+        </p:spPr>
+        <p:txBody>
+          <a:bodyPr wrap="square" lIns="0" tIns="0" rIns="0" bIns="0" rtlCol="0" anchor="ctr"/>
+          <a:lstStyle/>
+          <a:p>
+            <a:pPr indent="0" marL="0">
+              <a:buNone/>
+            </a:pPr>
+            <a:r>
+              <a:rPr lang="en-US" sz="1000" b="1" dirty="0">
                 <a:solidFill>
                   <a:srgbClr val="26262E"/>
                 </a:solidFill>
@@ -7844,9 +8039,9 @@
                 <a:ea typeface="Apple SD Gothic Neo" pitchFamily="34" charset="-122"/>
                 <a:cs typeface="Apple SD Gothic Neo" pitchFamily="34" charset="-120"/>
               </a:rPr>
-              <a:t>일반 임금채권 · 일반 조세채권</a:t>
-            </a:r>
-            <a:endParaRPr lang="en-US" sz="1030" dirty="0"/>
+              <a:t>국민건강보험 등 공과금</a:t>
+            </a:r>
+            <a:endParaRPr lang="en-US" sz="1000" dirty="0"/>
           </a:p>
         </p:txBody>
       </p:sp>
@@ -7858,24 +8053,24 @@
         </p:nvSpPr>
         <p:spPr>
           <a:xfrm>
-            <a:off x="3794760" y="2944368"/>
-            <a:ext cx="4736592" cy="365760"/>
-          </a:xfrm>
-          <a:prstGeom prst="rect">
-            <a:avLst/>
-          </a:prstGeom>
-          <a:noFill/>
-          <a:ln/>
-        </p:spPr>
-        <p:txBody>
-          <a:bodyPr wrap="square" lIns="0" tIns="0" rIns="0" bIns="0" rtlCol="0" anchor="ctr"/>
-          <a:lstStyle/>
-          <a:p>
-            <a:pPr indent="0" marL="0">
-              <a:buNone/>
-            </a:pPr>
-            <a:r>
-              <a:rPr lang="en-US" sz="930" dirty="0">
+            <a:off x="4114800" y="3163824"/>
+            <a:ext cx="4416552" cy="420624"/>
+          </a:xfrm>
+          <a:prstGeom prst="rect">
+            <a:avLst/>
+          </a:prstGeom>
+          <a:noFill/>
+          <a:ln/>
+        </p:spPr>
+        <p:txBody>
+          <a:bodyPr wrap="square" lIns="0" tIns="0" rIns="0" bIns="0" rtlCol="0" anchor="ctr"/>
+          <a:lstStyle/>
+          <a:p>
+            <a:pPr indent="0" marL="0">
+              <a:buNone/>
+            </a:pPr>
+            <a:r>
+              <a:rPr lang="en-US" sz="920" dirty="0">
                 <a:solidFill>
                   <a:srgbClr val="6E6A75"/>
                 </a:solidFill>
@@ -7883,9 +8078,9 @@
                 <a:ea typeface="Apple SD Gothic Neo" pitchFamily="34" charset="-122"/>
                 <a:cs typeface="Apple SD Gothic Neo" pitchFamily="34" charset="-120"/>
               </a:rPr>
-              <a:t>최우선변제·당해세에서 제외된 나머지</a:t>
-            </a:r>
-            <a:endParaRPr lang="en-US" sz="930" dirty="0"/>
+              <a:t>4대보험료 등 일반 공과금 채권</a:t>
+            </a:r>
+            <a:endParaRPr lang="en-US" sz="920" dirty="0"/>
           </a:p>
         </p:txBody>
       </p:sp>
@@ -7897,8 +8092,8 @@
         </p:nvSpPr>
         <p:spPr>
           <a:xfrm>
-            <a:off x="502920" y="3355848"/>
-            <a:ext cx="8138160" cy="365760"/>
+            <a:off x="502920" y="3630168"/>
+            <a:ext cx="8138160" cy="420624"/>
           </a:xfrm>
           <a:prstGeom prst="rect">
             <a:avLst/>
@@ -7922,7 +8117,7 @@
         </p:nvSpPr>
         <p:spPr>
           <a:xfrm>
-            <a:off x="576072" y="3392424"/>
+            <a:off x="576072" y="3694176"/>
             <a:ext cx="292608" cy="292608"/>
           </a:xfrm>
           <a:prstGeom prst="ellipse">
@@ -7942,7 +8137,7 @@
         </p:nvSpPr>
         <p:spPr>
           <a:xfrm>
-            <a:off x="576072" y="3381451"/>
+            <a:off x="576072" y="3683203"/>
             <a:ext cx="292608" cy="292608"/>
           </a:xfrm>
           <a:prstGeom prst="rect">
@@ -7981,24 +8176,24 @@
         </p:nvSpPr>
         <p:spPr>
           <a:xfrm>
-            <a:off x="978408" y="3355848"/>
-            <a:ext cx="2743200" cy="365760"/>
-          </a:xfrm>
-          <a:prstGeom prst="rect">
-            <a:avLst/>
-          </a:prstGeom>
-          <a:noFill/>
-          <a:ln/>
-        </p:spPr>
-        <p:txBody>
-          <a:bodyPr wrap="square" lIns="0" tIns="0" rIns="0" bIns="0" rtlCol="0" anchor="ctr"/>
-          <a:lstStyle/>
-          <a:p>
-            <a:pPr indent="0" marL="0">
-              <a:buNone/>
-            </a:pPr>
-            <a:r>
-              <a:rPr lang="en-US" sz="1030" b="1" dirty="0">
+            <a:off x="978408" y="3630168"/>
+            <a:ext cx="3063240" cy="420624"/>
+          </a:xfrm>
+          <a:prstGeom prst="rect">
+            <a:avLst/>
+          </a:prstGeom>
+          <a:noFill/>
+          <a:ln/>
+        </p:spPr>
+        <p:txBody>
+          <a:bodyPr wrap="square" lIns="0" tIns="0" rIns="0" bIns="0" rtlCol="0" anchor="ctr"/>
+          <a:lstStyle/>
+          <a:p>
+            <a:pPr indent="0" marL="0">
+              <a:buNone/>
+            </a:pPr>
+            <a:r>
+              <a:rPr lang="en-US" sz="1000" b="1" dirty="0">
                 <a:solidFill>
                   <a:srgbClr val="26262E"/>
                 </a:solidFill>
@@ -8006,9 +8201,9 @@
                 <a:ea typeface="Apple SD Gothic Neo" pitchFamily="34" charset="-122"/>
                 <a:cs typeface="Apple SD Gothic Neo" pitchFamily="34" charset="-120"/>
               </a:rPr>
-              <a:t>국민건강보험 등 공과금</a:t>
-            </a:r>
-            <a:endParaRPr lang="en-US" sz="1030" dirty="0"/>
+              <a:t>일반채권</a:t>
+            </a:r>
+            <a:endParaRPr lang="en-US" sz="1000" dirty="0"/>
           </a:p>
         </p:txBody>
       </p:sp>
@@ -8020,24 +8215,24 @@
         </p:nvSpPr>
         <p:spPr>
           <a:xfrm>
-            <a:off x="3794760" y="3355848"/>
-            <a:ext cx="4736592" cy="365760"/>
-          </a:xfrm>
-          <a:prstGeom prst="rect">
-            <a:avLst/>
-          </a:prstGeom>
-          <a:noFill/>
-          <a:ln/>
-        </p:spPr>
-        <p:txBody>
-          <a:bodyPr wrap="square" lIns="0" tIns="0" rIns="0" bIns="0" rtlCol="0" anchor="ctr"/>
-          <a:lstStyle/>
-          <a:p>
-            <a:pPr indent="0" marL="0">
-              <a:buNone/>
-            </a:pPr>
-            <a:r>
-              <a:rPr lang="en-US" sz="930" dirty="0">
+            <a:off x="4114800" y="3630168"/>
+            <a:ext cx="4416552" cy="420624"/>
+          </a:xfrm>
+          <a:prstGeom prst="rect">
+            <a:avLst/>
+          </a:prstGeom>
+          <a:noFill/>
+          <a:ln/>
+        </p:spPr>
+        <p:txBody>
+          <a:bodyPr wrap="square" lIns="0" tIns="0" rIns="0" bIns="0" rtlCol="0" anchor="ctr"/>
+          <a:lstStyle/>
+          <a:p>
+            <a:pPr indent="0" marL="0">
+              <a:buNone/>
+            </a:pPr>
+            <a:r>
+              <a:rPr lang="en-US" sz="920" dirty="0">
                 <a:solidFill>
                   <a:srgbClr val="6E6A75"/>
                 </a:solidFill>
@@ -8045,9 +8240,9 @@
                 <a:ea typeface="Apple SD Gothic Neo" pitchFamily="34" charset="-122"/>
                 <a:cs typeface="Apple SD Gothic Neo" pitchFamily="34" charset="-120"/>
               </a:rPr>
-              <a:t>4대보험료 등 일반 공과금 채권</a:t>
-            </a:r>
-            <a:endParaRPr lang="en-US" sz="930" dirty="0"/>
+              <a:t>순위 없이 채권액 비례로 안분배당</a:t>
+            </a:r>
+            <a:endParaRPr lang="en-US" sz="920" dirty="0"/>
           </a:p>
         </p:txBody>
       </p:sp>
@@ -8059,35 +8254,10 @@
         </p:nvSpPr>
         <p:spPr>
           <a:xfrm>
-            <a:off x="502920" y="3767328"/>
-            <a:ext cx="8138160" cy="365760"/>
-          </a:xfrm>
-          <a:prstGeom prst="rect">
-            <a:avLst/>
-          </a:prstGeom>
-          <a:solidFill>
-            <a:srgbClr val="FFFFFF"/>
-          </a:solidFill>
-          <a:ln w="6350">
-            <a:solidFill>
-              <a:srgbClr val="E5DDD0"/>
-            </a:solidFill>
-            <a:prstDash val="solid"/>
-          </a:ln>
-        </p:spPr>
-      </p:sp>
-      <p:sp>
-        <p:nvSpPr>
-          <p:cNvPr id="35" name="Shape 33"/>
-          <p:cNvSpPr/>
-          <p:nvPr/>
-        </p:nvSpPr>
-        <p:spPr>
-          <a:xfrm>
-            <a:off x="576072" y="3803904"/>
-            <a:ext cx="292608" cy="292608"/>
-          </a:xfrm>
-          <a:prstGeom prst="ellipse">
+            <a:off x="502920" y="4169664"/>
+            <a:ext cx="8138160" cy="411480"/>
+          </a:xfrm>
+          <a:prstGeom prst="rect">
             <a:avLst/>
           </a:prstGeom>
           <a:solidFill>
@@ -8098,197 +8268,60 @@
       </p:sp>
       <p:sp>
         <p:nvSpPr>
+          <p:cNvPr id="35" name="Text 33"/>
+          <p:cNvSpPr/>
+          <p:nvPr/>
+        </p:nvSpPr>
+        <p:spPr>
+          <a:xfrm>
+            <a:off x="685800" y="4169664"/>
+            <a:ext cx="7772400" cy="411480"/>
+          </a:xfrm>
+          <a:prstGeom prst="rect">
+            <a:avLst/>
+          </a:prstGeom>
+          <a:noFill/>
+          <a:ln/>
+        </p:spPr>
+        <p:txBody>
+          <a:bodyPr wrap="square" lIns="0" tIns="0" rIns="0" bIns="0" rtlCol="0" anchor="ctr"/>
+          <a:lstStyle/>
+          <a:p>
+            <a:pPr indent="0" marL="0">
+              <a:buNone/>
+            </a:pPr>
+            <a:r>
+              <a:rPr lang="en-US" sz="1000" b="1" dirty="0">
+                <a:solidFill>
+                  <a:srgbClr val="FFB78A"/>
+                </a:solidFill>
+                <a:latin typeface="Apple SD Gothic Neo" pitchFamily="34" charset="0"/>
+                <a:ea typeface="Apple SD Gothic Neo" pitchFamily="34" charset="-122"/>
+                <a:cs typeface="Apple SD Gothic Neo" pitchFamily="34" charset="-120"/>
+              </a:rPr>
+              <a:t>함정  </a:t>
+            </a:r>
+            <a:pPr indent="0" marL="0">
+              <a:buNone/>
+            </a:pPr>
+            <a:r>
+              <a:rPr lang="en-US" sz="1000" dirty="0">
+                <a:solidFill>
+                  <a:srgbClr val="FFFFFF"/>
+                </a:solidFill>
+                <a:latin typeface="Apple SD Gothic Neo" pitchFamily="34" charset="0"/>
+                <a:ea typeface="Apple SD Gothic Neo" pitchFamily="34" charset="-122"/>
+                <a:cs typeface="Apple SD Gothic Neo" pitchFamily="34" charset="-120"/>
+              </a:rPr>
+              <a:t>당해세가 항상 먼저 배당되는 게 아닙니다 — 법정기일과 확정일자·설정일 중 빠른 쪽이 우선하는 경합 관계입니다.</a:t>
+            </a:r>
+            <a:endParaRPr lang="en-US" sz="1000" dirty="0"/>
+          </a:p>
+        </p:txBody>
+      </p:sp>
+      <p:sp>
+        <p:nvSpPr>
           <p:cNvPr id="36" name="Text 34"/>
-          <p:cNvSpPr/>
-          <p:nvPr/>
-        </p:nvSpPr>
-        <p:spPr>
-          <a:xfrm>
-            <a:off x="576072" y="3792931"/>
-            <a:ext cx="292608" cy="292608"/>
-          </a:xfrm>
-          <a:prstGeom prst="rect">
-            <a:avLst/>
-          </a:prstGeom>
-          <a:noFill/>
-          <a:ln/>
-        </p:spPr>
-        <p:txBody>
-          <a:bodyPr wrap="square" lIns="0" tIns="0" rIns="0" bIns="0" rtlCol="0" anchor="ctr"/>
-          <a:lstStyle/>
-          <a:p>
-            <a:pPr algn="ctr" indent="0" marL="0">
-              <a:buNone/>
-            </a:pPr>
-            <a:r>
-              <a:rPr lang="en-US" sz="1100" b="1" dirty="0">
-                <a:solidFill>
-                  <a:srgbClr val="FFFFFF"/>
-                </a:solidFill>
-                <a:latin typeface="Apple SD Gothic Neo" pitchFamily="34" charset="0"/>
-                <a:ea typeface="Apple SD Gothic Neo" pitchFamily="34" charset="-122"/>
-                <a:cs typeface="Apple SD Gothic Neo" pitchFamily="34" charset="-120"/>
-              </a:rPr>
-              <a:t>6</a:t>
-            </a:r>
-            <a:endParaRPr lang="en-US" sz="1100" dirty="0"/>
-          </a:p>
-        </p:txBody>
-      </p:sp>
-      <p:sp>
-        <p:nvSpPr>
-          <p:cNvPr id="37" name="Text 35"/>
-          <p:cNvSpPr/>
-          <p:nvPr/>
-        </p:nvSpPr>
-        <p:spPr>
-          <a:xfrm>
-            <a:off x="978408" y="3767328"/>
-            <a:ext cx="2743200" cy="365760"/>
-          </a:xfrm>
-          <a:prstGeom prst="rect">
-            <a:avLst/>
-          </a:prstGeom>
-          <a:noFill/>
-          <a:ln/>
-        </p:spPr>
-        <p:txBody>
-          <a:bodyPr wrap="square" lIns="0" tIns="0" rIns="0" bIns="0" rtlCol="0" anchor="ctr"/>
-          <a:lstStyle/>
-          <a:p>
-            <a:pPr indent="0" marL="0">
-              <a:buNone/>
-            </a:pPr>
-            <a:r>
-              <a:rPr lang="en-US" sz="1030" b="1" dirty="0">
-                <a:solidFill>
-                  <a:srgbClr val="26262E"/>
-                </a:solidFill>
-                <a:latin typeface="Apple SD Gothic Neo" pitchFamily="34" charset="0"/>
-                <a:ea typeface="Apple SD Gothic Neo" pitchFamily="34" charset="-122"/>
-                <a:cs typeface="Apple SD Gothic Neo" pitchFamily="34" charset="-120"/>
-              </a:rPr>
-              <a:t>일반채권</a:t>
-            </a:r>
-            <a:endParaRPr lang="en-US" sz="1030" dirty="0"/>
-          </a:p>
-        </p:txBody>
-      </p:sp>
-      <p:sp>
-        <p:nvSpPr>
-          <p:cNvPr id="38" name="Text 36"/>
-          <p:cNvSpPr/>
-          <p:nvPr/>
-        </p:nvSpPr>
-        <p:spPr>
-          <a:xfrm>
-            <a:off x="3794760" y="3767328"/>
-            <a:ext cx="4736592" cy="365760"/>
-          </a:xfrm>
-          <a:prstGeom prst="rect">
-            <a:avLst/>
-          </a:prstGeom>
-          <a:noFill/>
-          <a:ln/>
-        </p:spPr>
-        <p:txBody>
-          <a:bodyPr wrap="square" lIns="0" tIns="0" rIns="0" bIns="0" rtlCol="0" anchor="ctr"/>
-          <a:lstStyle/>
-          <a:p>
-            <a:pPr indent="0" marL="0">
-              <a:buNone/>
-            </a:pPr>
-            <a:r>
-              <a:rPr lang="en-US" sz="930" dirty="0">
-                <a:solidFill>
-                  <a:srgbClr val="6E6A75"/>
-                </a:solidFill>
-                <a:latin typeface="Apple SD Gothic Neo" pitchFamily="34" charset="0"/>
-                <a:ea typeface="Apple SD Gothic Neo" pitchFamily="34" charset="-122"/>
-                <a:cs typeface="Apple SD Gothic Neo" pitchFamily="34" charset="-120"/>
-              </a:rPr>
-              <a:t>순위 없이 채권액 비례로 안분배당</a:t>
-            </a:r>
-            <a:endParaRPr lang="en-US" sz="930" dirty="0"/>
-          </a:p>
-        </p:txBody>
-      </p:sp>
-      <p:sp>
-        <p:nvSpPr>
-          <p:cNvPr id="39" name="Shape 37"/>
-          <p:cNvSpPr/>
-          <p:nvPr/>
-        </p:nvSpPr>
-        <p:spPr>
-          <a:xfrm>
-            <a:off x="502920" y="4251960"/>
-            <a:ext cx="8138160" cy="411480"/>
-          </a:xfrm>
-          <a:prstGeom prst="rect">
-            <a:avLst/>
-          </a:prstGeom>
-          <a:solidFill>
-            <a:srgbClr val="1C2B4A"/>
-          </a:solidFill>
-          <a:ln/>
-        </p:spPr>
-      </p:sp>
-      <p:sp>
-        <p:nvSpPr>
-          <p:cNvPr id="40" name="Text 38"/>
-          <p:cNvSpPr/>
-          <p:nvPr/>
-        </p:nvSpPr>
-        <p:spPr>
-          <a:xfrm>
-            <a:off x="685800" y="4251960"/>
-            <a:ext cx="7772400" cy="411480"/>
-          </a:xfrm>
-          <a:prstGeom prst="rect">
-            <a:avLst/>
-          </a:prstGeom>
-          <a:noFill/>
-          <a:ln/>
-        </p:spPr>
-        <p:txBody>
-          <a:bodyPr wrap="square" lIns="0" tIns="0" rIns="0" bIns="0" rtlCol="0" anchor="ctr"/>
-          <a:lstStyle/>
-          <a:p>
-            <a:pPr indent="0" marL="0">
-              <a:buNone/>
-            </a:pPr>
-            <a:r>
-              <a:rPr lang="en-US" sz="1000" b="1" dirty="0">
-                <a:solidFill>
-                  <a:srgbClr val="FFB78A"/>
-                </a:solidFill>
-                <a:latin typeface="Apple SD Gothic Neo" pitchFamily="34" charset="0"/>
-                <a:ea typeface="Apple SD Gothic Neo" pitchFamily="34" charset="-122"/>
-                <a:cs typeface="Apple SD Gothic Neo" pitchFamily="34" charset="-120"/>
-              </a:rPr>
-              <a:t>함정  </a:t>
-            </a:r>
-            <a:pPr indent="0" marL="0">
-              <a:buNone/>
-            </a:pPr>
-            <a:r>
-              <a:rPr lang="en-US" sz="1000" dirty="0">
-                <a:solidFill>
-                  <a:srgbClr val="FFFFFF"/>
-                </a:solidFill>
-                <a:latin typeface="Apple SD Gothic Neo" pitchFamily="34" charset="0"/>
-                <a:ea typeface="Apple SD Gothic Neo" pitchFamily="34" charset="-122"/>
-                <a:cs typeface="Apple SD Gothic Neo" pitchFamily="34" charset="-120"/>
-              </a:rPr>
-              <a:t>당해세는 근저당보다 늦게 부과돼도 3순위로 먼저 배당됩니다 — 인수금 계산 시 반드시 확인.</a:t>
-            </a:r>
-            <a:endParaRPr lang="en-US" sz="1000" dirty="0"/>
-          </a:p>
-        </p:txBody>
-      </p:sp>
-      <p:sp>
-        <p:nvSpPr>
-          <p:cNvPr id="41" name="Text 39"/>
           <p:cNvSpPr/>
           <p:nvPr/>
         </p:nvSpPr>
@@ -8327,7 +8360,7 @@
       </p:sp>
       <p:sp>
         <p:nvSpPr>
-          <p:cNvPr id="42" name="Text 40"/>
+          <p:cNvPr id="37" name="Text 35"/>
           <p:cNvSpPr/>
           <p:nvPr/>
         </p:nvSpPr>
@@ -8507,7 +8540,7 @@
                 <a:ea typeface="Apple SD Gothic Neo" pitchFamily="34" charset="-122"/>
                 <a:cs typeface="Apple SD Gothic Neo" pitchFamily="34" charset="-120"/>
               </a:rPr>
-              <a:t>법원이 공개하는 3종</a:t>
+              <a:t>법원이 공개하는 4종</a:t>
             </a:r>
             <a:endParaRPr lang="en-US" sz="1050" dirty="0"/>
           </a:p>
@@ -8546,7 +8579,7 @@
                 <a:ea typeface="Apple SD Gothic Neo" pitchFamily="34" charset="-122"/>
                 <a:cs typeface="Apple SD Gothic Neo" pitchFamily="34" charset="-120"/>
               </a:rPr>
-              <a:t>직접 발급받아야 하는 3종</a:t>
+              <a:t>직접 발급받아야 하는 2종</a:t>
             </a:r>
             <a:endParaRPr lang="en-US" sz="1050" dirty="0"/>
           </a:p>
@@ -8561,7 +8594,7 @@
         <p:spPr>
           <a:xfrm>
             <a:off x="502920" y="1481328"/>
-            <a:ext cx="2587752" cy="1005840"/>
+            <a:ext cx="1897380" cy="1005840"/>
           </a:xfrm>
           <a:prstGeom prst="rect">
             <a:avLst/>
@@ -8612,8 +8645,8 @@
         </p:nvSpPr>
         <p:spPr>
           <a:xfrm>
-            <a:off x="649224" y="1609344"/>
-            <a:ext cx="384048" cy="384048"/>
+            <a:off x="630936" y="1600200"/>
+            <a:ext cx="329184" cy="329184"/>
           </a:xfrm>
           <a:prstGeom prst="ellipse">
             <a:avLst/>
@@ -8640,8 +8673,8 @@
         </p:blipFill>
         <p:spPr>
           <a:xfrm>
-            <a:off x="749076" y="1709196"/>
-            <a:ext cx="184343" cy="184343"/>
+            <a:off x="716524" y="1685788"/>
+            <a:ext cx="158008" cy="158008"/>
           </a:xfrm>
           <a:prstGeom prst="rect">
             <a:avLst/>
@@ -8656,24 +8689,24 @@
         </p:nvSpPr>
         <p:spPr>
           <a:xfrm>
-            <a:off x="1106424" y="1600200"/>
-            <a:ext cx="1856232" cy="329184"/>
-          </a:xfrm>
-          <a:prstGeom prst="rect">
-            <a:avLst/>
-          </a:prstGeom>
-          <a:noFill/>
-          <a:ln/>
-        </p:spPr>
-        <p:txBody>
-          <a:bodyPr wrap="square" lIns="0" tIns="0" rIns="0" bIns="0" rtlCol="0" anchor="ctr"/>
-          <a:lstStyle/>
-          <a:p>
-            <a:pPr indent="0" marL="0">
-              <a:buNone/>
-            </a:pPr>
-            <a:r>
-              <a:rPr lang="en-US" sz="1150" b="1" dirty="0">
+            <a:off x="630936" y="1965960"/>
+            <a:ext cx="1641348" cy="274320"/>
+          </a:xfrm>
+          <a:prstGeom prst="rect">
+            <a:avLst/>
+          </a:prstGeom>
+          <a:noFill/>
+          <a:ln/>
+        </p:spPr>
+        <p:txBody>
+          <a:bodyPr wrap="square" lIns="0" tIns="0" rIns="0" bIns="0" rtlCol="0" anchor="ctr"/>
+          <a:lstStyle/>
+          <a:p>
+            <a:pPr indent="0" marL="0">
+              <a:buNone/>
+            </a:pPr>
+            <a:r>
+              <a:rPr lang="en-US" sz="980" b="1" dirty="0">
                 <a:solidFill>
                   <a:srgbClr val="26262E"/>
                 </a:solidFill>
@@ -8683,7 +8716,7 @@
               </a:rPr>
               <a:t>매각물건명세서</a:t>
             </a:r>
-            <a:endParaRPr lang="en-US" sz="1150" dirty="0"/>
+            <a:endParaRPr lang="en-US" sz="980" dirty="0"/>
           </a:p>
         </p:txBody>
       </p:sp>
@@ -8695,8 +8728,8 @@
         </p:nvSpPr>
         <p:spPr>
           <a:xfrm>
-            <a:off x="649224" y="1993392"/>
-            <a:ext cx="2295144" cy="457200"/>
+            <a:off x="630936" y="2231136"/>
+            <a:ext cx="1641348" cy="237744"/>
           </a:xfrm>
           <a:prstGeom prst="rect">
             <a:avLst/>
@@ -8710,12 +8743,12 @@
           <a:p>
             <a:pPr indent="0" marL="0">
               <a:lnSpc>
-                <a:spcPct val="108000"/>
+                <a:spcPct val="105000"/>
               </a:lnSpc>
               <a:buNone/>
             </a:pPr>
             <a:r>
-              <a:rPr lang="en-US" sz="830" dirty="0">
+              <a:rPr lang="en-US" sz="760" dirty="0">
                 <a:solidFill>
                   <a:srgbClr val="6E6A75"/>
                 </a:solidFill>
@@ -8723,9 +8756,9 @@
                 <a:ea typeface="Apple SD Gothic Neo" pitchFamily="34" charset="-122"/>
                 <a:cs typeface="Apple SD Gothic Neo" pitchFamily="34" charset="-120"/>
               </a:rPr>
-              <a:t>임차인 현황·인수권리를 법원이 공식 기재. 가장 신뢰도 높은 문서.</a:t>
-            </a:r>
-            <a:endParaRPr lang="en-US" sz="830" dirty="0"/>
+              <a:t>임차인 현황·인수권리 공식 기재</a:t>
+            </a:r>
+            <a:endParaRPr lang="en-US" sz="760" dirty="0"/>
           </a:p>
         </p:txBody>
       </p:sp>
@@ -8737,8 +8770,8 @@
         </p:nvSpPr>
         <p:spPr>
           <a:xfrm>
-            <a:off x="3319272" y="1481328"/>
-            <a:ext cx="2587752" cy="1005840"/>
+            <a:off x="2583180" y="1481328"/>
+            <a:ext cx="1897380" cy="1005840"/>
           </a:xfrm>
           <a:prstGeom prst="rect">
             <a:avLst/>
@@ -8769,7 +8802,7 @@
         </p:nvSpPr>
         <p:spPr>
           <a:xfrm>
-            <a:off x="3319272" y="1481328"/>
+            <a:off x="2583180" y="1481328"/>
             <a:ext cx="64008" cy="1005840"/>
           </a:xfrm>
           <a:prstGeom prst="rect">
@@ -8789,8 +8822,8 @@
         </p:nvSpPr>
         <p:spPr>
           <a:xfrm>
-            <a:off x="3465576" y="1609344"/>
-            <a:ext cx="384048" cy="384048"/>
+            <a:off x="2711196" y="1600200"/>
+            <a:ext cx="329184" cy="329184"/>
           </a:xfrm>
           <a:prstGeom prst="ellipse">
             <a:avLst/>
@@ -8817,8 +8850,8 @@
         </p:blipFill>
         <p:spPr>
           <a:xfrm>
-            <a:off x="3565428" y="1709196"/>
-            <a:ext cx="184343" cy="184343"/>
+            <a:off x="2796784" y="1685788"/>
+            <a:ext cx="158008" cy="158008"/>
           </a:xfrm>
           <a:prstGeom prst="rect">
             <a:avLst/>
@@ -8833,24 +8866,24 @@
         </p:nvSpPr>
         <p:spPr>
           <a:xfrm>
-            <a:off x="3922776" y="1600200"/>
-            <a:ext cx="1856232" cy="329184"/>
-          </a:xfrm>
-          <a:prstGeom prst="rect">
-            <a:avLst/>
-          </a:prstGeom>
-          <a:noFill/>
-          <a:ln/>
-        </p:spPr>
-        <p:txBody>
-          <a:bodyPr wrap="square" lIns="0" tIns="0" rIns="0" bIns="0" rtlCol="0" anchor="ctr"/>
-          <a:lstStyle/>
-          <a:p>
-            <a:pPr indent="0" marL="0">
-              <a:buNone/>
-            </a:pPr>
-            <a:r>
-              <a:rPr lang="en-US" sz="1150" b="1" dirty="0">
+            <a:off x="2711196" y="1965960"/>
+            <a:ext cx="1641348" cy="274320"/>
+          </a:xfrm>
+          <a:prstGeom prst="rect">
+            <a:avLst/>
+          </a:prstGeom>
+          <a:noFill/>
+          <a:ln/>
+        </p:spPr>
+        <p:txBody>
+          <a:bodyPr wrap="square" lIns="0" tIns="0" rIns="0" bIns="0" rtlCol="0" anchor="ctr"/>
+          <a:lstStyle/>
+          <a:p>
+            <a:pPr indent="0" marL="0">
+              <a:buNone/>
+            </a:pPr>
+            <a:r>
+              <a:rPr lang="en-US" sz="980" b="1" dirty="0">
                 <a:solidFill>
                   <a:srgbClr val="26262E"/>
                 </a:solidFill>
@@ -8860,7 +8893,7 @@
               </a:rPr>
               <a:t>현황조사서</a:t>
             </a:r>
-            <a:endParaRPr lang="en-US" sz="1150" dirty="0"/>
+            <a:endParaRPr lang="en-US" sz="980" dirty="0"/>
           </a:p>
         </p:txBody>
       </p:sp>
@@ -8872,8 +8905,8 @@
         </p:nvSpPr>
         <p:spPr>
           <a:xfrm>
-            <a:off x="3465576" y="1993392"/>
-            <a:ext cx="2295144" cy="457200"/>
+            <a:off x="2711196" y="2231136"/>
+            <a:ext cx="1641348" cy="237744"/>
           </a:xfrm>
           <a:prstGeom prst="rect">
             <a:avLst/>
@@ -8887,12 +8920,12 @@
           <a:p>
             <a:pPr indent="0" marL="0">
               <a:lnSpc>
-                <a:spcPct val="108000"/>
+                <a:spcPct val="105000"/>
               </a:lnSpc>
               <a:buNone/>
             </a:pPr>
             <a:r>
-              <a:rPr lang="en-US" sz="830" dirty="0">
+              <a:rPr lang="en-US" sz="760" dirty="0">
                 <a:solidFill>
                   <a:srgbClr val="6E6A75"/>
                 </a:solidFill>
@@ -8900,9 +8933,9 @@
                 <a:ea typeface="Apple SD Gothic Neo" pitchFamily="34" charset="-122"/>
                 <a:cs typeface="Apple SD Gothic Neo" pitchFamily="34" charset="-120"/>
               </a:rPr>
-              <a:t>집행관의 현장 조사 기록 — 점유자·임대차 관계 1차 정보.</a:t>
-            </a:r>
-            <a:endParaRPr lang="en-US" sz="830" dirty="0"/>
+              <a:t>집행관의 현장 조사 기록</a:t>
+            </a:r>
+            <a:endParaRPr lang="en-US" sz="760" dirty="0"/>
           </a:p>
         </p:txBody>
       </p:sp>
@@ -8914,8 +8947,8 @@
         </p:nvSpPr>
         <p:spPr>
           <a:xfrm>
-            <a:off x="6135624" y="1481328"/>
-            <a:ext cx="2587752" cy="1005840"/>
+            <a:off x="4663440" y="1481328"/>
+            <a:ext cx="1897380" cy="1005840"/>
           </a:xfrm>
           <a:prstGeom prst="rect">
             <a:avLst/>
@@ -8946,7 +8979,7 @@
         </p:nvSpPr>
         <p:spPr>
           <a:xfrm>
-            <a:off x="6135624" y="1481328"/>
+            <a:off x="4663440" y="1481328"/>
             <a:ext cx="64008" cy="1005840"/>
           </a:xfrm>
           <a:prstGeom prst="rect">
@@ -8966,8 +8999,8 @@
         </p:nvSpPr>
         <p:spPr>
           <a:xfrm>
-            <a:off x="6281928" y="1609344"/>
-            <a:ext cx="384048" cy="384048"/>
+            <a:off x="4791456" y="1600200"/>
+            <a:ext cx="329184" cy="329184"/>
           </a:xfrm>
           <a:prstGeom prst="ellipse">
             <a:avLst/>
@@ -8994,8 +9027,8 @@
         </p:blipFill>
         <p:spPr>
           <a:xfrm>
-            <a:off x="6381780" y="1709196"/>
-            <a:ext cx="184343" cy="184343"/>
+            <a:off x="4877044" y="1685788"/>
+            <a:ext cx="158008" cy="158008"/>
           </a:xfrm>
           <a:prstGeom prst="rect">
             <a:avLst/>
@@ -9010,24 +9043,24 @@
         </p:nvSpPr>
         <p:spPr>
           <a:xfrm>
-            <a:off x="6739128" y="1600200"/>
-            <a:ext cx="1856232" cy="329184"/>
-          </a:xfrm>
-          <a:prstGeom prst="rect">
-            <a:avLst/>
-          </a:prstGeom>
-          <a:noFill/>
-          <a:ln/>
-        </p:spPr>
-        <p:txBody>
-          <a:bodyPr wrap="square" lIns="0" tIns="0" rIns="0" bIns="0" rtlCol="0" anchor="ctr"/>
-          <a:lstStyle/>
-          <a:p>
-            <a:pPr indent="0" marL="0">
-              <a:buNone/>
-            </a:pPr>
-            <a:r>
-              <a:rPr lang="en-US" sz="1150" b="1" dirty="0">
+            <a:off x="4791456" y="1965960"/>
+            <a:ext cx="1641348" cy="274320"/>
+          </a:xfrm>
+          <a:prstGeom prst="rect">
+            <a:avLst/>
+          </a:prstGeom>
+          <a:noFill/>
+          <a:ln/>
+        </p:spPr>
+        <p:txBody>
+          <a:bodyPr wrap="square" lIns="0" tIns="0" rIns="0" bIns="0" rtlCol="0" anchor="ctr"/>
+          <a:lstStyle/>
+          <a:p>
+            <a:pPr indent="0" marL="0">
+              <a:buNone/>
+            </a:pPr>
+            <a:r>
+              <a:rPr lang="en-US" sz="980" b="1" dirty="0">
                 <a:solidFill>
                   <a:srgbClr val="26262E"/>
                 </a:solidFill>
@@ -9037,7 +9070,7 @@
               </a:rPr>
               <a:t>감정평가서</a:t>
             </a:r>
-            <a:endParaRPr lang="en-US" sz="1150" dirty="0"/>
+            <a:endParaRPr lang="en-US" sz="980" dirty="0"/>
           </a:p>
         </p:txBody>
       </p:sp>
@@ -9049,8 +9082,8 @@
         </p:nvSpPr>
         <p:spPr>
           <a:xfrm>
-            <a:off x="6281928" y="1993392"/>
-            <a:ext cx="2295144" cy="457200"/>
+            <a:off x="4791456" y="2231136"/>
+            <a:ext cx="1641348" cy="237744"/>
           </a:xfrm>
           <a:prstGeom prst="rect">
             <a:avLst/>
@@ -9064,12 +9097,12 @@
           <a:p>
             <a:pPr indent="0" marL="0">
               <a:lnSpc>
-                <a:spcPct val="108000"/>
+                <a:spcPct val="105000"/>
               </a:lnSpc>
               <a:buNone/>
             </a:pPr>
             <a:r>
-              <a:rPr lang="en-US" sz="830" dirty="0">
+              <a:rPr lang="en-US" sz="760" dirty="0">
                 <a:solidFill>
                   <a:srgbClr val="6E6A75"/>
                 </a:solidFill>
@@ -9077,9 +9110,9 @@
                 <a:ea typeface="Apple SD Gothic Neo" pitchFamily="34" charset="-122"/>
                 <a:cs typeface="Apple SD Gothic Neo" pitchFamily="34" charset="-120"/>
               </a:rPr>
-              <a:t>감정가 산출 근거 — 위치·구조·주변 시세 자료.</a:t>
-            </a:r>
-            <a:endParaRPr lang="en-US" sz="830" dirty="0"/>
+              <a:t>감정가 산출 근거 자료</a:t>
+            </a:r>
+            <a:endParaRPr lang="en-US" sz="760" dirty="0"/>
           </a:p>
         </p:txBody>
       </p:sp>
@@ -9091,8 +9124,8 @@
         </p:nvSpPr>
         <p:spPr>
           <a:xfrm>
-            <a:off x="502920" y="2852928"/>
-            <a:ext cx="2587752" cy="1143000"/>
+            <a:off x="6743700" y="1481328"/>
+            <a:ext cx="1897380" cy="1005840"/>
           </a:xfrm>
           <a:prstGeom prst="rect">
             <a:avLst/>
@@ -9123,14 +9156,14 @@
         </p:nvSpPr>
         <p:spPr>
           <a:xfrm>
-            <a:off x="502920" y="2852928"/>
-            <a:ext cx="64008" cy="1143000"/>
-          </a:xfrm>
-          <a:prstGeom prst="rect">
-            <a:avLst/>
-          </a:prstGeom>
-          <a:solidFill>
-            <a:srgbClr val="E2611F"/>
+            <a:off x="6743700" y="1481328"/>
+            <a:ext cx="64008" cy="1005840"/>
+          </a:xfrm>
+          <a:prstGeom prst="rect">
+            <a:avLst/>
+          </a:prstGeom>
+          <a:solidFill>
+            <a:srgbClr val="1C2B4A"/>
           </a:solidFill>
           <a:ln/>
         </p:spPr>
@@ -9143,14 +9176,14 @@
         </p:nvSpPr>
         <p:spPr>
           <a:xfrm>
-            <a:off x="649224" y="2980944"/>
-            <a:ext cx="384048" cy="384048"/>
+            <a:off x="6871716" y="1600200"/>
+            <a:ext cx="329184" cy="329184"/>
           </a:xfrm>
           <a:prstGeom prst="ellipse">
             <a:avLst/>
           </a:prstGeom>
           <a:solidFill>
-            <a:srgbClr val="E2611F"/>
+            <a:srgbClr val="1C2B4A"/>
           </a:solidFill>
           <a:ln/>
         </p:spPr>
@@ -9171,8 +9204,8 @@
         </p:blipFill>
         <p:spPr>
           <a:xfrm>
-            <a:off x="749076" y="3080796"/>
-            <a:ext cx="184343" cy="184343"/>
+            <a:off x="6957304" y="1685788"/>
+            <a:ext cx="158008" cy="158008"/>
           </a:xfrm>
           <a:prstGeom prst="rect">
             <a:avLst/>
@@ -9187,24 +9220,24 @@
         </p:nvSpPr>
         <p:spPr>
           <a:xfrm>
-            <a:off x="1106424" y="2971800"/>
-            <a:ext cx="1856232" cy="329184"/>
-          </a:xfrm>
-          <a:prstGeom prst="rect">
-            <a:avLst/>
-          </a:prstGeom>
-          <a:noFill/>
-          <a:ln/>
-        </p:spPr>
-        <p:txBody>
-          <a:bodyPr wrap="square" lIns="0" tIns="0" rIns="0" bIns="0" rtlCol="0" anchor="ctr"/>
-          <a:lstStyle/>
-          <a:p>
-            <a:pPr indent="0" marL="0">
-              <a:buNone/>
-            </a:pPr>
-            <a:r>
-              <a:rPr lang="en-US" sz="1150" b="1" dirty="0">
+            <a:off x="6871716" y="1965960"/>
+            <a:ext cx="1641348" cy="274320"/>
+          </a:xfrm>
+          <a:prstGeom prst="rect">
+            <a:avLst/>
+          </a:prstGeom>
+          <a:noFill/>
+          <a:ln/>
+        </p:spPr>
+        <p:txBody>
+          <a:bodyPr wrap="square" lIns="0" tIns="0" rIns="0" bIns="0" rtlCol="0" anchor="ctr"/>
+          <a:lstStyle/>
+          <a:p>
+            <a:pPr indent="0" marL="0">
+              <a:buNone/>
+            </a:pPr>
+            <a:r>
+              <a:rPr lang="en-US" sz="980" b="1" dirty="0">
                 <a:solidFill>
                   <a:srgbClr val="26262E"/>
                 </a:solidFill>
@@ -9212,83 +9245,22 @@
                 <a:ea typeface="Apple SD Gothic Neo" pitchFamily="34" charset="-122"/>
                 <a:cs typeface="Apple SD Gothic Neo" pitchFamily="34" charset="-120"/>
               </a:rPr>
-              <a:t>등기사항증명서</a:t>
-            </a:r>
-            <a:endParaRPr lang="en-US" sz="1150" dirty="0"/>
-          </a:p>
-        </p:txBody>
-      </p:sp>
-      <p:sp>
-        <p:nvSpPr>
-          <p:cNvPr id="29" name="Shape 23"/>
-          <p:cNvSpPr/>
-          <p:nvPr/>
-        </p:nvSpPr>
-        <p:spPr>
-          <a:xfrm>
-            <a:off x="2523744" y="2944368"/>
-            <a:ext cx="457200" cy="219456"/>
-          </a:xfrm>
-          <a:prstGeom prst="roundRect">
-            <a:avLst>
-              <a:gd name="adj" fmla="val 50000"/>
-            </a:avLst>
-          </a:prstGeom>
-          <a:solidFill>
-            <a:srgbClr val="E2611F"/>
-          </a:solidFill>
-          <a:ln/>
-        </p:spPr>
-      </p:sp>
-      <p:sp>
-        <p:nvSpPr>
-          <p:cNvPr id="30" name="Text 24"/>
-          <p:cNvSpPr/>
-          <p:nvPr/>
-        </p:nvSpPr>
-        <p:spPr>
-          <a:xfrm>
-            <a:off x="2523744" y="2944368"/>
-            <a:ext cx="457200" cy="219456"/>
-          </a:xfrm>
-          <a:prstGeom prst="rect">
-            <a:avLst/>
-          </a:prstGeom>
-          <a:noFill/>
-          <a:ln/>
-        </p:spPr>
-        <p:txBody>
-          <a:bodyPr wrap="square" lIns="0" tIns="0" rIns="0" bIns="0" rtlCol="0" anchor="ctr"/>
-          <a:lstStyle/>
-          <a:p>
-            <a:pPr algn="ctr" indent="0" marL="0">
-              <a:buNone/>
-            </a:pPr>
-            <a:r>
-              <a:rPr lang="en-US" sz="800" b="1" dirty="0">
-                <a:solidFill>
-                  <a:srgbClr val="FFFFFF"/>
-                </a:solidFill>
-                <a:latin typeface="Apple SD Gothic Neo" pitchFamily="34" charset="0"/>
-                <a:ea typeface="Apple SD Gothic Neo" pitchFamily="34" charset="-122"/>
-                <a:cs typeface="Apple SD Gothic Neo" pitchFamily="34" charset="-120"/>
-              </a:rPr>
-              <a:t>핵심</a:t>
-            </a:r>
-            <a:endParaRPr lang="en-US" sz="800" dirty="0"/>
-          </a:p>
-        </p:txBody>
-      </p:sp>
-      <p:sp>
-        <p:nvSpPr>
-          <p:cNvPr id="31" name="Text 25"/>
-          <p:cNvSpPr/>
-          <p:nvPr/>
-        </p:nvSpPr>
-        <p:spPr>
-          <a:xfrm>
-            <a:off x="649224" y="3364992"/>
-            <a:ext cx="2295144" cy="594360"/>
+              <a:t>문건송달내역</a:t>
+            </a:r>
+            <a:endParaRPr lang="en-US" sz="980" dirty="0"/>
+          </a:p>
+        </p:txBody>
+      </p:sp>
+      <p:sp>
+        <p:nvSpPr>
+          <p:cNvPr id="29" name="Text 23"/>
+          <p:cNvSpPr/>
+          <p:nvPr/>
+        </p:nvSpPr>
+        <p:spPr>
+          <a:xfrm>
+            <a:off x="6871716" y="2231136"/>
+            <a:ext cx="1641348" cy="237744"/>
           </a:xfrm>
           <a:prstGeom prst="rect">
             <a:avLst/>
@@ -9302,35 +9274,35 @@
           <a:p>
             <a:pPr indent="0" marL="0">
               <a:lnSpc>
-                <a:spcPct val="110000"/>
+                <a:spcPct val="105000"/>
               </a:lnSpc>
               <a:buNone/>
             </a:pPr>
             <a:r>
-              <a:rPr lang="en-US" sz="830" dirty="0">
-                <a:solidFill>
-                  <a:srgbClr val="26262E"/>
-                </a:solidFill>
-                <a:latin typeface="Apple SD Gothic Neo" pitchFamily="34" charset="0"/>
-                <a:ea typeface="Apple SD Gothic Neo" pitchFamily="34" charset="-122"/>
-                <a:cs typeface="Apple SD Gothic Neo" pitchFamily="34" charset="-120"/>
-              </a:rPr>
-              <a:t>인터넷등기소 발급. 모든 물권과 순위가 시간순 기록 — 말소기준권리를 직접 확인하는, 사실상 권리분석의 핵심 문서.</a:t>
-            </a:r>
-            <a:endParaRPr lang="en-US" sz="830" dirty="0"/>
-          </a:p>
-        </p:txBody>
-      </p:sp>
-      <p:sp>
-        <p:nvSpPr>
-          <p:cNvPr id="32" name="Shape 26"/>
-          <p:cNvSpPr/>
-          <p:nvPr/>
-        </p:nvSpPr>
-        <p:spPr>
-          <a:xfrm>
-            <a:off x="3319272" y="2852928"/>
-            <a:ext cx="2587752" cy="1143000"/>
+              <a:rPr lang="en-US" sz="760" dirty="0">
+                <a:solidFill>
+                  <a:srgbClr val="6E6A75"/>
+                </a:solidFill>
+                <a:latin typeface="Apple SD Gothic Neo" pitchFamily="34" charset="0"/>
+                <a:ea typeface="Apple SD Gothic Neo" pitchFamily="34" charset="-122"/>
+                <a:cs typeface="Apple SD Gothic Neo" pitchFamily="34" charset="-120"/>
+              </a:rPr>
+              <a:t>이해관계인에 서류가 언제 송달됐는지 기록</a:t>
+            </a:r>
+            <a:endParaRPr lang="en-US" sz="760" dirty="0"/>
+          </a:p>
+        </p:txBody>
+      </p:sp>
+      <p:sp>
+        <p:nvSpPr>
+          <p:cNvPr id="30" name="Shape 24"/>
+          <p:cNvSpPr/>
+          <p:nvPr/>
+        </p:nvSpPr>
+        <p:spPr>
+          <a:xfrm>
+            <a:off x="502920" y="2852928"/>
+            <a:ext cx="3931920" cy="1188720"/>
           </a:xfrm>
           <a:prstGeom prst="rect">
             <a:avLst/>
@@ -9355,14 +9327,14 @@
       </p:sp>
       <p:sp>
         <p:nvSpPr>
-          <p:cNvPr id="33" name="Shape 27"/>
-          <p:cNvSpPr/>
-          <p:nvPr/>
-        </p:nvSpPr>
-        <p:spPr>
-          <a:xfrm>
-            <a:off x="3319272" y="2852928"/>
-            <a:ext cx="64008" cy="1143000"/>
+          <p:cNvPr id="31" name="Shape 25"/>
+          <p:cNvSpPr/>
+          <p:nvPr/>
+        </p:nvSpPr>
+        <p:spPr>
+          <a:xfrm>
+            <a:off x="502920" y="2852928"/>
+            <a:ext cx="64008" cy="1188720"/>
           </a:xfrm>
           <a:prstGeom prst="rect">
             <a:avLst/>
@@ -9375,14 +9347,14 @@
       </p:sp>
       <p:sp>
         <p:nvSpPr>
-          <p:cNvPr id="34" name="Shape 28"/>
-          <p:cNvSpPr/>
-          <p:nvPr/>
-        </p:nvSpPr>
-        <p:spPr>
-          <a:xfrm>
-            <a:off x="3465576" y="2980944"/>
-            <a:ext cx="384048" cy="384048"/>
+          <p:cNvPr id="32" name="Shape 26"/>
+          <p:cNvSpPr/>
+          <p:nvPr/>
+        </p:nvSpPr>
+        <p:spPr>
+          <a:xfrm>
+            <a:off x="667512" y="2999232"/>
+            <a:ext cx="457200" cy="457200"/>
           </a:xfrm>
           <a:prstGeom prst="ellipse">
             <a:avLst/>
@@ -9395,7 +9367,7 @@
       </p:sp>
       <p:pic>
         <p:nvPicPr>
-          <p:cNvPr id="35" name="Image 4" descr="preencoded.png">    </p:cNvPr>
+          <p:cNvPr id="33" name="Image 4" descr="preencoded.png">    </p:cNvPr>
           <p:cNvPicPr>
             <a:picLocks noChangeAspect="1"/>
           </p:cNvPicPr>
@@ -9409,8 +9381,8 @@
         </p:blipFill>
         <p:spPr>
           <a:xfrm>
-            <a:off x="3565428" y="3080796"/>
-            <a:ext cx="184343" cy="184343"/>
+            <a:off x="786384" y="3118104"/>
+            <a:ext cx="219456" cy="219456"/>
           </a:xfrm>
           <a:prstGeom prst="rect">
             <a:avLst/>
@@ -9419,30 +9391,133 @@
       </p:pic>
       <p:sp>
         <p:nvSpPr>
+          <p:cNvPr id="34" name="Text 27"/>
+          <p:cNvSpPr/>
+          <p:nvPr/>
+        </p:nvSpPr>
+        <p:spPr>
+          <a:xfrm>
+            <a:off x="1252728" y="3008376"/>
+            <a:ext cx="2651760" cy="365760"/>
+          </a:xfrm>
+          <a:prstGeom prst="rect">
+            <a:avLst/>
+          </a:prstGeom>
+          <a:noFill/>
+          <a:ln/>
+        </p:spPr>
+        <p:txBody>
+          <a:bodyPr wrap="square" lIns="0" tIns="0" rIns="0" bIns="0" rtlCol="0" anchor="ctr"/>
+          <a:lstStyle/>
+          <a:p>
+            <a:pPr indent="0" marL="0">
+              <a:buNone/>
+            </a:pPr>
+            <a:r>
+              <a:rPr lang="en-US" sz="1250" b="1" dirty="0">
+                <a:solidFill>
+                  <a:srgbClr val="26262E"/>
+                </a:solidFill>
+                <a:latin typeface="Apple SD Gothic Neo" pitchFamily="34" charset="0"/>
+                <a:ea typeface="Apple SD Gothic Neo" pitchFamily="34" charset="-122"/>
+                <a:cs typeface="Apple SD Gothic Neo" pitchFamily="34" charset="-120"/>
+              </a:rPr>
+              <a:t>등기사항증명서</a:t>
+            </a:r>
+            <a:endParaRPr lang="en-US" sz="1250" dirty="0"/>
+          </a:p>
+        </p:txBody>
+      </p:sp>
+      <p:sp>
+        <p:nvSpPr>
+          <p:cNvPr id="35" name="Shape 28"/>
+          <p:cNvSpPr/>
+          <p:nvPr/>
+        </p:nvSpPr>
+        <p:spPr>
+          <a:xfrm>
+            <a:off x="3794760" y="2999232"/>
+            <a:ext cx="457200" cy="237744"/>
+          </a:xfrm>
+          <a:prstGeom prst="roundRect">
+            <a:avLst>
+              <a:gd name="adj" fmla="val 50000"/>
+            </a:avLst>
+          </a:prstGeom>
+          <a:solidFill>
+            <a:srgbClr val="E2611F"/>
+          </a:solidFill>
+          <a:ln/>
+        </p:spPr>
+      </p:sp>
+      <p:sp>
+        <p:nvSpPr>
           <p:cNvPr id="36" name="Text 29"/>
           <p:cNvSpPr/>
           <p:nvPr/>
         </p:nvSpPr>
         <p:spPr>
           <a:xfrm>
-            <a:off x="3922776" y="2971800"/>
-            <a:ext cx="1856232" cy="329184"/>
-          </a:xfrm>
-          <a:prstGeom prst="rect">
-            <a:avLst/>
-          </a:prstGeom>
-          <a:noFill/>
-          <a:ln/>
-        </p:spPr>
-        <p:txBody>
-          <a:bodyPr wrap="square" lIns="0" tIns="0" rIns="0" bIns="0" rtlCol="0" anchor="ctr"/>
-          <a:lstStyle/>
-          <a:p>
-            <a:pPr indent="0" marL="0">
-              <a:buNone/>
-            </a:pPr>
-            <a:r>
-              <a:rPr lang="en-US" sz="1150" b="1" dirty="0">
+            <a:off x="3794760" y="2999232"/>
+            <a:ext cx="457200" cy="237744"/>
+          </a:xfrm>
+          <a:prstGeom prst="rect">
+            <a:avLst/>
+          </a:prstGeom>
+          <a:noFill/>
+          <a:ln/>
+        </p:spPr>
+        <p:txBody>
+          <a:bodyPr wrap="square" lIns="0" tIns="0" rIns="0" bIns="0" rtlCol="0" anchor="ctr"/>
+          <a:lstStyle/>
+          <a:p>
+            <a:pPr algn="ctr" indent="0" marL="0">
+              <a:buNone/>
+            </a:pPr>
+            <a:r>
+              <a:rPr lang="en-US" sz="800" b="1" dirty="0">
+                <a:solidFill>
+                  <a:srgbClr val="FFFFFF"/>
+                </a:solidFill>
+                <a:latin typeface="Apple SD Gothic Neo" pitchFamily="34" charset="0"/>
+                <a:ea typeface="Apple SD Gothic Neo" pitchFamily="34" charset="-122"/>
+                <a:cs typeface="Apple SD Gothic Neo" pitchFamily="34" charset="-120"/>
+              </a:rPr>
+              <a:t>핵심</a:t>
+            </a:r>
+            <a:endParaRPr lang="en-US" sz="800" dirty="0"/>
+          </a:p>
+        </p:txBody>
+      </p:sp>
+      <p:sp>
+        <p:nvSpPr>
+          <p:cNvPr id="37" name="Text 30"/>
+          <p:cNvSpPr/>
+          <p:nvPr/>
+        </p:nvSpPr>
+        <p:spPr>
+          <a:xfrm>
+            <a:off x="667512" y="3456432"/>
+            <a:ext cx="3602736" cy="530352"/>
+          </a:xfrm>
+          <a:prstGeom prst="rect">
+            <a:avLst/>
+          </a:prstGeom>
+          <a:noFill/>
+          <a:ln/>
+        </p:spPr>
+        <p:txBody>
+          <a:bodyPr wrap="square" lIns="0" tIns="0" rIns="0" bIns="0" rtlCol="0" anchor="ctr"/>
+          <a:lstStyle/>
+          <a:p>
+            <a:pPr indent="0" marL="0">
+              <a:lnSpc>
+                <a:spcPct val="115000"/>
+              </a:lnSpc>
+              <a:buNone/>
+            </a:pPr>
+            <a:r>
+              <a:rPr lang="en-US" sz="930" dirty="0">
                 <a:solidFill>
                   <a:srgbClr val="26262E"/>
                 </a:solidFill>
@@ -9450,51 +9525,9 @@
                 <a:ea typeface="Apple SD Gothic Neo" pitchFamily="34" charset="-122"/>
                 <a:cs typeface="Apple SD Gothic Neo" pitchFamily="34" charset="-120"/>
               </a:rPr>
-              <a:t>문건송달내역</a:t>
-            </a:r>
-            <a:endParaRPr lang="en-US" sz="1150" dirty="0"/>
-          </a:p>
-        </p:txBody>
-      </p:sp>
-      <p:sp>
-        <p:nvSpPr>
-          <p:cNvPr id="37" name="Text 30"/>
-          <p:cNvSpPr/>
-          <p:nvPr/>
-        </p:nvSpPr>
-        <p:spPr>
-          <a:xfrm>
-            <a:off x="3465576" y="3364992"/>
-            <a:ext cx="2295144" cy="594360"/>
-          </a:xfrm>
-          <a:prstGeom prst="rect">
-            <a:avLst/>
-          </a:prstGeom>
-          <a:noFill/>
-          <a:ln/>
-        </p:spPr>
-        <p:txBody>
-          <a:bodyPr wrap="square" lIns="0" tIns="0" rIns="0" bIns="0" rtlCol="0" anchor="ctr"/>
-          <a:lstStyle/>
-          <a:p>
-            <a:pPr indent="0" marL="0">
-              <a:lnSpc>
-                <a:spcPct val="110000"/>
-              </a:lnSpc>
-              <a:buNone/>
-            </a:pPr>
-            <a:r>
-              <a:rPr lang="en-US" sz="830" dirty="0">
-                <a:solidFill>
-                  <a:srgbClr val="26262E"/>
-                </a:solidFill>
-                <a:latin typeface="Apple SD Gothic Neo" pitchFamily="34" charset="0"/>
-                <a:ea typeface="Apple SD Gothic Neo" pitchFamily="34" charset="-122"/>
-                <a:cs typeface="Apple SD Gothic Neo" pitchFamily="34" charset="-120"/>
-              </a:rPr>
-              <a:t>법원 경매계 확인. 이해관계인에게 서류가 언제 송달됐는지 — 배당요구 시점 등 절차 확인.</a:t>
-            </a:r>
-            <a:endParaRPr lang="en-US" sz="830" dirty="0"/>
+              <a:t>인터넷등기소 발급. 모든 물권과 순위가 시간순으로 기록됩니다 — 말소기준권리를 직접 확인하는, 사실상 권리분석의 핵심 문서.</a:t>
+            </a:r>
+            <a:endParaRPr lang="en-US" sz="930" dirty="0"/>
           </a:p>
         </p:txBody>
       </p:sp>
@@ -9506,8 +9539,8 @@
         </p:nvSpPr>
         <p:spPr>
           <a:xfrm>
-            <a:off x="6135624" y="2852928"/>
-            <a:ext cx="2587752" cy="1143000"/>
+            <a:off x="4709160" y="2852928"/>
+            <a:ext cx="3931920" cy="1188720"/>
           </a:xfrm>
           <a:prstGeom prst="rect">
             <a:avLst/>
@@ -9538,8 +9571,8 @@
         </p:nvSpPr>
         <p:spPr>
           <a:xfrm>
-            <a:off x="6135624" y="2852928"/>
-            <a:ext cx="64008" cy="1143000"/>
+            <a:off x="4709160" y="2852928"/>
+            <a:ext cx="64008" cy="1188720"/>
           </a:xfrm>
           <a:prstGeom prst="rect">
             <a:avLst/>
@@ -9558,8 +9591,8 @@
         </p:nvSpPr>
         <p:spPr>
           <a:xfrm>
-            <a:off x="6281928" y="2980944"/>
-            <a:ext cx="384048" cy="384048"/>
+            <a:off x="4873752" y="2999232"/>
+            <a:ext cx="457200" cy="457200"/>
           </a:xfrm>
           <a:prstGeom prst="ellipse">
             <a:avLst/>
@@ -9586,8 +9619,8 @@
         </p:blipFill>
         <p:spPr>
           <a:xfrm>
-            <a:off x="6381780" y="3080796"/>
-            <a:ext cx="184343" cy="184343"/>
+            <a:off x="4992624" y="3118104"/>
+            <a:ext cx="219456" cy="219456"/>
           </a:xfrm>
           <a:prstGeom prst="rect">
             <a:avLst/>
@@ -9602,24 +9635,24 @@
         </p:nvSpPr>
         <p:spPr>
           <a:xfrm>
-            <a:off x="6739128" y="2971800"/>
-            <a:ext cx="1856232" cy="329184"/>
-          </a:xfrm>
-          <a:prstGeom prst="rect">
-            <a:avLst/>
-          </a:prstGeom>
-          <a:noFill/>
-          <a:ln/>
-        </p:spPr>
-        <p:txBody>
-          <a:bodyPr wrap="square" lIns="0" tIns="0" rIns="0" bIns="0" rtlCol="0" anchor="ctr"/>
-          <a:lstStyle/>
-          <a:p>
-            <a:pPr indent="0" marL="0">
-              <a:buNone/>
-            </a:pPr>
-            <a:r>
-              <a:rPr lang="en-US" sz="1150" b="1" dirty="0">
+            <a:off x="5458968" y="3008376"/>
+            <a:ext cx="2651760" cy="365760"/>
+          </a:xfrm>
+          <a:prstGeom prst="rect">
+            <a:avLst/>
+          </a:prstGeom>
+          <a:noFill/>
+          <a:ln/>
+        </p:spPr>
+        <p:txBody>
+          <a:bodyPr wrap="square" lIns="0" tIns="0" rIns="0" bIns="0" rtlCol="0" anchor="ctr"/>
+          <a:lstStyle/>
+          <a:p>
+            <a:pPr indent="0" marL="0">
+              <a:buNone/>
+            </a:pPr>
+            <a:r>
+              <a:rPr lang="en-US" sz="1250" b="1" dirty="0">
                 <a:solidFill>
                   <a:srgbClr val="26262E"/>
                 </a:solidFill>
@@ -9629,7 +9662,7 @@
               </a:rPr>
               <a:t>전입세대열람원</a:t>
             </a:r>
-            <a:endParaRPr lang="en-US" sz="1150" dirty="0"/>
+            <a:endParaRPr lang="en-US" sz="1250" dirty="0"/>
           </a:p>
         </p:txBody>
       </p:sp>
@@ -9641,8 +9674,8 @@
         </p:nvSpPr>
         <p:spPr>
           <a:xfrm>
-            <a:off x="6281928" y="3364992"/>
-            <a:ext cx="2295144" cy="594360"/>
+            <a:off x="4873752" y="3456432"/>
+            <a:ext cx="3602736" cy="530352"/>
           </a:xfrm>
           <a:prstGeom prst="rect">
             <a:avLst/>
@@ -9656,12 +9689,12 @@
           <a:p>
             <a:pPr indent="0" marL="0">
               <a:lnSpc>
-                <a:spcPct val="110000"/>
+                <a:spcPct val="115000"/>
               </a:lnSpc>
               <a:buNone/>
             </a:pPr>
             <a:r>
-              <a:rPr lang="en-US" sz="830" dirty="0">
+              <a:rPr lang="en-US" sz="930" dirty="0">
                 <a:solidFill>
                   <a:srgbClr val="26262E"/>
                 </a:solidFill>
@@ -9669,9 +9702,9 @@
                 <a:ea typeface="Apple SD Gothic Neo" pitchFamily="34" charset="-122"/>
                 <a:cs typeface="Apple SD Gothic Neo" pitchFamily="34" charset="-120"/>
               </a:rPr>
-              <a:t>주민센터 발급(외국인은 외국인체류확인서). 실제 전입 세대·전입일 확인 — 위장·무단전입도 걸러냄.</a:t>
-            </a:r>
-            <a:endParaRPr lang="en-US" sz="830" dirty="0"/>
+              <a:t>주민센터 발급(외국인은 외국인체류확인서로 대체). 실제 전입 세대·전입일을 확인해 위장·무단전입도 걸러냅니다.</a:t>
+            </a:r>
+            <a:endParaRPr lang="en-US" sz="930" dirty="0"/>
           </a:p>
         </p:txBody>
       </p:sp>

--- a/docs/slides/AI부동산경매투자_강의슬라이드.pptx
+++ b/docs/slides/AI부동산경매투자_강의슬라이드.pptx
@@ -35548,7 +35548,7 @@
                 <a:ea typeface="Apple SD Gothic Neo" pitchFamily="34" charset="-122"/>
                 <a:cs typeface="Apple SD Gothic Neo" pitchFamily="34" charset="-120"/>
               </a:rPr>
-              <a:t>투자성향 MBTI — 나에게 맞는 전략부터 정한다</a:t>
+              <a:t>투자성향 MBTI — 매매·경매 2트랙 32유형</a:t>
             </a:r>
             <a:endParaRPr lang="en-US" sz="2700" dirty="0"/>
           </a:p>
@@ -35660,923 +35660,8 @@
         </p:nvSpPr>
         <p:spPr>
           <a:xfrm>
-            <a:off x="502920" y="1481328"/>
-            <a:ext cx="402336" cy="402336"/>
-          </a:xfrm>
-          <a:prstGeom prst="ellipse">
-            <a:avLst/>
-          </a:prstGeom>
-          <a:solidFill>
-            <a:srgbClr val="1C2B4A"/>
-          </a:solidFill>
-          <a:ln/>
-        </p:spPr>
-      </p:sp>
-      <p:sp>
-        <p:nvSpPr>
-          <p:cNvPr id="8" name="Text 6"/>
-          <p:cNvSpPr/>
-          <p:nvPr/>
-        </p:nvSpPr>
-        <p:spPr>
-          <a:xfrm>
-            <a:off x="502920" y="1470355"/>
-            <a:ext cx="402336" cy="402336"/>
-          </a:xfrm>
-          <a:prstGeom prst="rect">
-            <a:avLst/>
-          </a:prstGeom>
-          <a:noFill/>
-          <a:ln/>
-        </p:spPr>
-        <p:txBody>
-          <a:bodyPr wrap="square" lIns="0" tIns="0" rIns="0" bIns="0" rtlCol="0" anchor="ctr"/>
-          <a:lstStyle/>
-          <a:p>
-            <a:pPr algn="ctr" indent="0" marL="0">
-              <a:buNone/>
-            </a:pPr>
-            <a:r>
-              <a:rPr lang="en-US" sz="1300" b="1" dirty="0">
-                <a:solidFill>
-                  <a:srgbClr val="FFFFFF"/>
-                </a:solidFill>
-                <a:latin typeface="Apple SD Gothic Neo" pitchFamily="34" charset="0"/>
-                <a:ea typeface="Apple SD Gothic Neo" pitchFamily="34" charset="-122"/>
-                <a:cs typeface="Apple SD Gothic Neo" pitchFamily="34" charset="-120"/>
-              </a:rPr>
-              <a:t>S</a:t>
-            </a:r>
-            <a:endParaRPr lang="en-US" sz="1300" dirty="0"/>
-          </a:p>
-        </p:txBody>
-      </p:sp>
-      <p:sp>
-        <p:nvSpPr>
-          <p:cNvPr id="9" name="Text 7"/>
-          <p:cNvSpPr/>
-          <p:nvPr/>
-        </p:nvSpPr>
-        <p:spPr>
-          <a:xfrm>
-            <a:off x="996696" y="1481328"/>
-            <a:ext cx="1143000" cy="402336"/>
-          </a:xfrm>
-          <a:prstGeom prst="rect">
-            <a:avLst/>
-          </a:prstGeom>
-          <a:noFill/>
-          <a:ln/>
-        </p:spPr>
-        <p:txBody>
-          <a:bodyPr wrap="square" lIns="0" tIns="0" rIns="0" bIns="0" rtlCol="0" anchor="ctr"/>
-          <a:lstStyle/>
-          <a:p>
-            <a:pPr indent="0" marL="0">
-              <a:buNone/>
-            </a:pPr>
-            <a:r>
-              <a:rPr lang="en-US" sz="1150" b="1" dirty="0">
-                <a:solidFill>
-                  <a:srgbClr val="26262E"/>
-                </a:solidFill>
-                <a:latin typeface="Apple SD Gothic Neo" pitchFamily="34" charset="0"/>
-                <a:ea typeface="Apple SD Gothic Neo" pitchFamily="34" charset="-122"/>
-                <a:cs typeface="Apple SD Gothic Neo" pitchFamily="34" charset="-120"/>
-              </a:rPr>
-              <a:t>안정형</a:t>
-            </a:r>
-            <a:endParaRPr lang="en-US" sz="1150" dirty="0"/>
-          </a:p>
-        </p:txBody>
-      </p:sp>
-      <p:sp>
-        <p:nvSpPr>
-          <p:cNvPr id="10" name="Shape 8"/>
-          <p:cNvSpPr/>
-          <p:nvPr/>
-        </p:nvSpPr>
-        <p:spPr>
-          <a:xfrm>
-            <a:off x="2194560" y="1682496"/>
-            <a:ext cx="777240" cy="0"/>
-          </a:xfrm>
-          <a:prstGeom prst="line">
-            <a:avLst/>
-          </a:prstGeom>
-          <a:noFill/>
-          <a:ln w="19050">
-            <a:solidFill>
-              <a:srgbClr val="C9BBA4"/>
-            </a:solidFill>
-            <a:prstDash val="dash"/>
-          </a:ln>
-        </p:spPr>
-      </p:sp>
-      <p:sp>
-        <p:nvSpPr>
-          <p:cNvPr id="11" name="Shape 9"/>
-          <p:cNvSpPr/>
-          <p:nvPr/>
-        </p:nvSpPr>
-        <p:spPr>
-          <a:xfrm>
-            <a:off x="3081528" y="1481328"/>
-            <a:ext cx="402336" cy="402336"/>
-          </a:xfrm>
-          <a:prstGeom prst="ellipse">
-            <a:avLst/>
-          </a:prstGeom>
-          <a:solidFill>
-            <a:srgbClr val="E2611F"/>
-          </a:solidFill>
-          <a:ln/>
-        </p:spPr>
-      </p:sp>
-      <p:sp>
-        <p:nvSpPr>
-          <p:cNvPr id="12" name="Text 10"/>
-          <p:cNvSpPr/>
-          <p:nvPr/>
-        </p:nvSpPr>
-        <p:spPr>
-          <a:xfrm>
-            <a:off x="3081528" y="1470355"/>
-            <a:ext cx="402336" cy="402336"/>
-          </a:xfrm>
-          <a:prstGeom prst="rect">
-            <a:avLst/>
-          </a:prstGeom>
-          <a:noFill/>
-          <a:ln/>
-        </p:spPr>
-        <p:txBody>
-          <a:bodyPr wrap="square" lIns="0" tIns="0" rIns="0" bIns="0" rtlCol="0" anchor="ctr"/>
-          <a:lstStyle/>
-          <a:p>
-            <a:pPr algn="ctr" indent="0" marL="0">
-              <a:buNone/>
-            </a:pPr>
-            <a:r>
-              <a:rPr lang="en-US" sz="1300" b="1" dirty="0">
-                <a:solidFill>
-                  <a:srgbClr val="FFFFFF"/>
-                </a:solidFill>
-                <a:latin typeface="Apple SD Gothic Neo" pitchFamily="34" charset="0"/>
-                <a:ea typeface="Apple SD Gothic Neo" pitchFamily="34" charset="-122"/>
-                <a:cs typeface="Apple SD Gothic Neo" pitchFamily="34" charset="-120"/>
-              </a:rPr>
-              <a:t>A</a:t>
-            </a:r>
-            <a:endParaRPr lang="en-US" sz="1300" dirty="0"/>
-          </a:p>
-        </p:txBody>
-      </p:sp>
-      <p:sp>
-        <p:nvSpPr>
-          <p:cNvPr id="13" name="Text 11"/>
-          <p:cNvSpPr/>
-          <p:nvPr/>
-        </p:nvSpPr>
-        <p:spPr>
-          <a:xfrm>
-            <a:off x="3575304" y="1481328"/>
-            <a:ext cx="1188720" cy="402336"/>
-          </a:xfrm>
-          <a:prstGeom prst="rect">
-            <a:avLst/>
-          </a:prstGeom>
-          <a:noFill/>
-          <a:ln/>
-        </p:spPr>
-        <p:txBody>
-          <a:bodyPr wrap="square" lIns="0" tIns="0" rIns="0" bIns="0" rtlCol="0" anchor="ctr"/>
-          <a:lstStyle/>
-          <a:p>
-            <a:pPr indent="0" marL="0">
-              <a:buNone/>
-            </a:pPr>
-            <a:r>
-              <a:rPr lang="en-US" sz="1150" b="1" dirty="0">
-                <a:solidFill>
-                  <a:srgbClr val="26262E"/>
-                </a:solidFill>
-                <a:latin typeface="Apple SD Gothic Neo" pitchFamily="34" charset="0"/>
-                <a:ea typeface="Apple SD Gothic Neo" pitchFamily="34" charset="-122"/>
-                <a:cs typeface="Apple SD Gothic Neo" pitchFamily="34" charset="-120"/>
-              </a:rPr>
-              <a:t>공격형</a:t>
-            </a:r>
-            <a:endParaRPr lang="en-US" sz="1150" dirty="0"/>
-          </a:p>
-        </p:txBody>
-      </p:sp>
-      <p:sp>
-        <p:nvSpPr>
-          <p:cNvPr id="14" name="Shape 12"/>
-          <p:cNvSpPr/>
-          <p:nvPr/>
-        </p:nvSpPr>
-        <p:spPr>
-          <a:xfrm>
-            <a:off x="502920" y="2139696"/>
-            <a:ext cx="402336" cy="402336"/>
-          </a:xfrm>
-          <a:prstGeom prst="ellipse">
-            <a:avLst/>
-          </a:prstGeom>
-          <a:solidFill>
-            <a:srgbClr val="1C2B4A"/>
-          </a:solidFill>
-          <a:ln/>
-        </p:spPr>
-      </p:sp>
-      <p:sp>
-        <p:nvSpPr>
-          <p:cNvPr id="15" name="Text 13"/>
-          <p:cNvSpPr/>
-          <p:nvPr/>
-        </p:nvSpPr>
-        <p:spPr>
-          <a:xfrm>
-            <a:off x="502920" y="2128723"/>
-            <a:ext cx="402336" cy="402336"/>
-          </a:xfrm>
-          <a:prstGeom prst="rect">
-            <a:avLst/>
-          </a:prstGeom>
-          <a:noFill/>
-          <a:ln/>
-        </p:spPr>
-        <p:txBody>
-          <a:bodyPr wrap="square" lIns="0" tIns="0" rIns="0" bIns="0" rtlCol="0" anchor="ctr"/>
-          <a:lstStyle/>
-          <a:p>
-            <a:pPr algn="ctr" indent="0" marL="0">
-              <a:buNone/>
-            </a:pPr>
-            <a:r>
-              <a:rPr lang="en-US" sz="1300" b="1" dirty="0">
-                <a:solidFill>
-                  <a:srgbClr val="FFFFFF"/>
-                </a:solidFill>
-                <a:latin typeface="Apple SD Gothic Neo" pitchFamily="34" charset="0"/>
-                <a:ea typeface="Apple SD Gothic Neo" pitchFamily="34" charset="-122"/>
-                <a:cs typeface="Apple SD Gothic Neo" pitchFamily="34" charset="-120"/>
-              </a:rPr>
-              <a:t>C</a:t>
-            </a:r>
-            <a:endParaRPr lang="en-US" sz="1300" dirty="0"/>
-          </a:p>
-        </p:txBody>
-      </p:sp>
-      <p:sp>
-        <p:nvSpPr>
-          <p:cNvPr id="16" name="Text 14"/>
-          <p:cNvSpPr/>
-          <p:nvPr/>
-        </p:nvSpPr>
-        <p:spPr>
-          <a:xfrm>
-            <a:off x="996696" y="2139696"/>
-            <a:ext cx="1143000" cy="402336"/>
-          </a:xfrm>
-          <a:prstGeom prst="rect">
-            <a:avLst/>
-          </a:prstGeom>
-          <a:noFill/>
-          <a:ln/>
-        </p:spPr>
-        <p:txBody>
-          <a:bodyPr wrap="square" lIns="0" tIns="0" rIns="0" bIns="0" rtlCol="0" anchor="ctr"/>
-          <a:lstStyle/>
-          <a:p>
-            <a:pPr indent="0" marL="0">
-              <a:buNone/>
-            </a:pPr>
-            <a:r>
-              <a:rPr lang="en-US" sz="1150" b="1" dirty="0">
-                <a:solidFill>
-                  <a:srgbClr val="26262E"/>
-                </a:solidFill>
-                <a:latin typeface="Apple SD Gothic Neo" pitchFamily="34" charset="0"/>
-                <a:ea typeface="Apple SD Gothic Neo" pitchFamily="34" charset="-122"/>
-                <a:cs typeface="Apple SD Gothic Neo" pitchFamily="34" charset="-120"/>
-              </a:rPr>
-              <a:t>시세차익</a:t>
-            </a:r>
-            <a:endParaRPr lang="en-US" sz="1150" dirty="0"/>
-          </a:p>
-        </p:txBody>
-      </p:sp>
-      <p:sp>
-        <p:nvSpPr>
-          <p:cNvPr id="17" name="Shape 15"/>
-          <p:cNvSpPr/>
-          <p:nvPr/>
-        </p:nvSpPr>
-        <p:spPr>
-          <a:xfrm>
-            <a:off x="2194560" y="2340864"/>
-            <a:ext cx="777240" cy="0"/>
-          </a:xfrm>
-          <a:prstGeom prst="line">
-            <a:avLst/>
-          </a:prstGeom>
-          <a:noFill/>
-          <a:ln w="19050">
-            <a:solidFill>
-              <a:srgbClr val="C9BBA4"/>
-            </a:solidFill>
-            <a:prstDash val="dash"/>
-          </a:ln>
-        </p:spPr>
-      </p:sp>
-      <p:sp>
-        <p:nvSpPr>
-          <p:cNvPr id="18" name="Shape 16"/>
-          <p:cNvSpPr/>
-          <p:nvPr/>
-        </p:nvSpPr>
-        <p:spPr>
-          <a:xfrm>
-            <a:off x="3081528" y="2139696"/>
-            <a:ext cx="402336" cy="402336"/>
-          </a:xfrm>
-          <a:prstGeom prst="ellipse">
-            <a:avLst/>
-          </a:prstGeom>
-          <a:solidFill>
-            <a:srgbClr val="E2611F"/>
-          </a:solidFill>
-          <a:ln/>
-        </p:spPr>
-      </p:sp>
-      <p:sp>
-        <p:nvSpPr>
-          <p:cNvPr id="19" name="Text 17"/>
-          <p:cNvSpPr/>
-          <p:nvPr/>
-        </p:nvSpPr>
-        <p:spPr>
-          <a:xfrm>
-            <a:off x="3081528" y="2128723"/>
-            <a:ext cx="402336" cy="402336"/>
-          </a:xfrm>
-          <a:prstGeom prst="rect">
-            <a:avLst/>
-          </a:prstGeom>
-          <a:noFill/>
-          <a:ln/>
-        </p:spPr>
-        <p:txBody>
-          <a:bodyPr wrap="square" lIns="0" tIns="0" rIns="0" bIns="0" rtlCol="0" anchor="ctr"/>
-          <a:lstStyle/>
-          <a:p>
-            <a:pPr algn="ctr" indent="0" marL="0">
-              <a:buNone/>
-            </a:pPr>
-            <a:r>
-              <a:rPr lang="en-US" sz="1300" b="1" dirty="0">
-                <a:solidFill>
-                  <a:srgbClr val="FFFFFF"/>
-                </a:solidFill>
-                <a:latin typeface="Apple SD Gothic Neo" pitchFamily="34" charset="0"/>
-                <a:ea typeface="Apple SD Gothic Neo" pitchFamily="34" charset="-122"/>
-                <a:cs typeface="Apple SD Gothic Neo" pitchFamily="34" charset="-120"/>
-              </a:rPr>
-              <a:t>F</a:t>
-            </a:r>
-            <a:endParaRPr lang="en-US" sz="1300" dirty="0"/>
-          </a:p>
-        </p:txBody>
-      </p:sp>
-      <p:sp>
-        <p:nvSpPr>
-          <p:cNvPr id="20" name="Text 18"/>
-          <p:cNvSpPr/>
-          <p:nvPr/>
-        </p:nvSpPr>
-        <p:spPr>
-          <a:xfrm>
-            <a:off x="3575304" y="2139696"/>
-            <a:ext cx="1188720" cy="402336"/>
-          </a:xfrm>
-          <a:prstGeom prst="rect">
-            <a:avLst/>
-          </a:prstGeom>
-          <a:noFill/>
-          <a:ln/>
-        </p:spPr>
-        <p:txBody>
-          <a:bodyPr wrap="square" lIns="0" tIns="0" rIns="0" bIns="0" rtlCol="0" anchor="ctr"/>
-          <a:lstStyle/>
-          <a:p>
-            <a:pPr indent="0" marL="0">
-              <a:buNone/>
-            </a:pPr>
-            <a:r>
-              <a:rPr lang="en-US" sz="1150" b="1" dirty="0">
-                <a:solidFill>
-                  <a:srgbClr val="26262E"/>
-                </a:solidFill>
-                <a:latin typeface="Apple SD Gothic Neo" pitchFamily="34" charset="0"/>
-                <a:ea typeface="Apple SD Gothic Neo" pitchFamily="34" charset="-122"/>
-                <a:cs typeface="Apple SD Gothic Neo" pitchFamily="34" charset="-120"/>
-              </a:rPr>
-              <a:t>현금흐름</a:t>
-            </a:r>
-            <a:endParaRPr lang="en-US" sz="1150" dirty="0"/>
-          </a:p>
-        </p:txBody>
-      </p:sp>
-      <p:sp>
-        <p:nvSpPr>
-          <p:cNvPr id="21" name="Shape 19"/>
-          <p:cNvSpPr/>
-          <p:nvPr/>
-        </p:nvSpPr>
-        <p:spPr>
-          <a:xfrm>
-            <a:off x="502920" y="2798064"/>
-            <a:ext cx="402336" cy="402336"/>
-          </a:xfrm>
-          <a:prstGeom prst="ellipse">
-            <a:avLst/>
-          </a:prstGeom>
-          <a:solidFill>
-            <a:srgbClr val="1C2B4A"/>
-          </a:solidFill>
-          <a:ln/>
-        </p:spPr>
-      </p:sp>
-      <p:sp>
-        <p:nvSpPr>
-          <p:cNvPr id="22" name="Text 20"/>
-          <p:cNvSpPr/>
-          <p:nvPr/>
-        </p:nvSpPr>
-        <p:spPr>
-          <a:xfrm>
-            <a:off x="502920" y="2787091"/>
-            <a:ext cx="402336" cy="402336"/>
-          </a:xfrm>
-          <a:prstGeom prst="rect">
-            <a:avLst/>
-          </a:prstGeom>
-          <a:noFill/>
-          <a:ln/>
-        </p:spPr>
-        <p:txBody>
-          <a:bodyPr wrap="square" lIns="0" tIns="0" rIns="0" bIns="0" rtlCol="0" anchor="ctr"/>
-          <a:lstStyle/>
-          <a:p>
-            <a:pPr algn="ctr" indent="0" marL="0">
-              <a:buNone/>
-            </a:pPr>
-            <a:r>
-              <a:rPr lang="en-US" sz="1300" b="1" dirty="0">
-                <a:solidFill>
-                  <a:srgbClr val="FFFFFF"/>
-                </a:solidFill>
-                <a:latin typeface="Apple SD Gothic Neo" pitchFamily="34" charset="0"/>
-                <a:ea typeface="Apple SD Gothic Neo" pitchFamily="34" charset="-122"/>
-                <a:cs typeface="Apple SD Gothic Neo" pitchFamily="34" charset="-120"/>
-              </a:rPr>
-              <a:t>H</a:t>
-            </a:r>
-            <a:endParaRPr lang="en-US" sz="1300" dirty="0"/>
-          </a:p>
-        </p:txBody>
-      </p:sp>
-      <p:sp>
-        <p:nvSpPr>
-          <p:cNvPr id="23" name="Text 21"/>
-          <p:cNvSpPr/>
-          <p:nvPr/>
-        </p:nvSpPr>
-        <p:spPr>
-          <a:xfrm>
-            <a:off x="996696" y="2798064"/>
-            <a:ext cx="1143000" cy="402336"/>
-          </a:xfrm>
-          <a:prstGeom prst="rect">
-            <a:avLst/>
-          </a:prstGeom>
-          <a:noFill/>
-          <a:ln/>
-        </p:spPr>
-        <p:txBody>
-          <a:bodyPr wrap="square" lIns="0" tIns="0" rIns="0" bIns="0" rtlCol="0" anchor="ctr"/>
-          <a:lstStyle/>
-          <a:p>
-            <a:pPr indent="0" marL="0">
-              <a:buNone/>
-            </a:pPr>
-            <a:r>
-              <a:rPr lang="en-US" sz="1150" b="1" dirty="0">
-                <a:solidFill>
-                  <a:srgbClr val="26262E"/>
-                </a:solidFill>
-                <a:latin typeface="Apple SD Gothic Neo" pitchFamily="34" charset="0"/>
-                <a:ea typeface="Apple SD Gothic Neo" pitchFamily="34" charset="-122"/>
-                <a:cs typeface="Apple SD Gothic Neo" pitchFamily="34" charset="-120"/>
-              </a:rPr>
-              <a:t>직접 손품</a:t>
-            </a:r>
-            <a:endParaRPr lang="en-US" sz="1150" dirty="0"/>
-          </a:p>
-        </p:txBody>
-      </p:sp>
-      <p:sp>
-        <p:nvSpPr>
-          <p:cNvPr id="24" name="Shape 22"/>
-          <p:cNvSpPr/>
-          <p:nvPr/>
-        </p:nvSpPr>
-        <p:spPr>
-          <a:xfrm>
-            <a:off x="2194560" y="2999232"/>
-            <a:ext cx="777240" cy="0"/>
-          </a:xfrm>
-          <a:prstGeom prst="line">
-            <a:avLst/>
-          </a:prstGeom>
-          <a:noFill/>
-          <a:ln w="19050">
-            <a:solidFill>
-              <a:srgbClr val="C9BBA4"/>
-            </a:solidFill>
-            <a:prstDash val="dash"/>
-          </a:ln>
-        </p:spPr>
-      </p:sp>
-      <p:sp>
-        <p:nvSpPr>
-          <p:cNvPr id="25" name="Shape 23"/>
-          <p:cNvSpPr/>
-          <p:nvPr/>
-        </p:nvSpPr>
-        <p:spPr>
-          <a:xfrm>
-            <a:off x="3081528" y="2798064"/>
-            <a:ext cx="402336" cy="402336"/>
-          </a:xfrm>
-          <a:prstGeom prst="ellipse">
-            <a:avLst/>
-          </a:prstGeom>
-          <a:solidFill>
-            <a:srgbClr val="E2611F"/>
-          </a:solidFill>
-          <a:ln/>
-        </p:spPr>
-      </p:sp>
-      <p:sp>
-        <p:nvSpPr>
-          <p:cNvPr id="26" name="Text 24"/>
-          <p:cNvSpPr/>
-          <p:nvPr/>
-        </p:nvSpPr>
-        <p:spPr>
-          <a:xfrm>
-            <a:off x="3081528" y="2787091"/>
-            <a:ext cx="402336" cy="402336"/>
-          </a:xfrm>
-          <a:prstGeom prst="rect">
-            <a:avLst/>
-          </a:prstGeom>
-          <a:noFill/>
-          <a:ln/>
-        </p:spPr>
-        <p:txBody>
-          <a:bodyPr wrap="square" lIns="0" tIns="0" rIns="0" bIns="0" rtlCol="0" anchor="ctr"/>
-          <a:lstStyle/>
-          <a:p>
-            <a:pPr algn="ctr" indent="0" marL="0">
-              <a:buNone/>
-            </a:pPr>
-            <a:r>
-              <a:rPr lang="en-US" sz="1300" b="1" dirty="0">
-                <a:solidFill>
-                  <a:srgbClr val="FFFFFF"/>
-                </a:solidFill>
-                <a:latin typeface="Apple SD Gothic Neo" pitchFamily="34" charset="0"/>
-                <a:ea typeface="Apple SD Gothic Neo" pitchFamily="34" charset="-122"/>
-                <a:cs typeface="Apple SD Gothic Neo" pitchFamily="34" charset="-120"/>
-              </a:rPr>
-              <a:t>D</a:t>
-            </a:r>
-            <a:endParaRPr lang="en-US" sz="1300" dirty="0"/>
-          </a:p>
-        </p:txBody>
-      </p:sp>
-      <p:sp>
-        <p:nvSpPr>
-          <p:cNvPr id="27" name="Text 25"/>
-          <p:cNvSpPr/>
-          <p:nvPr/>
-        </p:nvSpPr>
-        <p:spPr>
-          <a:xfrm>
-            <a:off x="3575304" y="2798064"/>
-            <a:ext cx="1188720" cy="402336"/>
-          </a:xfrm>
-          <a:prstGeom prst="rect">
-            <a:avLst/>
-          </a:prstGeom>
-          <a:noFill/>
-          <a:ln/>
-        </p:spPr>
-        <p:txBody>
-          <a:bodyPr wrap="square" lIns="0" tIns="0" rIns="0" bIns="0" rtlCol="0" anchor="ctr"/>
-          <a:lstStyle/>
-          <a:p>
-            <a:pPr indent="0" marL="0">
-              <a:buNone/>
-            </a:pPr>
-            <a:r>
-              <a:rPr lang="en-US" sz="1150" b="1" dirty="0">
-                <a:solidFill>
-                  <a:srgbClr val="26262E"/>
-                </a:solidFill>
-                <a:latin typeface="Apple SD Gothic Neo" pitchFamily="34" charset="0"/>
-                <a:ea typeface="Apple SD Gothic Neo" pitchFamily="34" charset="-122"/>
-                <a:cs typeface="Apple SD Gothic Neo" pitchFamily="34" charset="-120"/>
-              </a:rPr>
-              <a:t>자동화 위임</a:t>
-            </a:r>
-            <a:endParaRPr lang="en-US" sz="1150" dirty="0"/>
-          </a:p>
-        </p:txBody>
-      </p:sp>
-      <p:sp>
-        <p:nvSpPr>
-          <p:cNvPr id="28" name="Shape 26"/>
-          <p:cNvSpPr/>
-          <p:nvPr/>
-        </p:nvSpPr>
-        <p:spPr>
-          <a:xfrm>
-            <a:off x="502920" y="3456432"/>
-            <a:ext cx="402336" cy="402336"/>
-          </a:xfrm>
-          <a:prstGeom prst="ellipse">
-            <a:avLst/>
-          </a:prstGeom>
-          <a:solidFill>
-            <a:srgbClr val="1C2B4A"/>
-          </a:solidFill>
-          <a:ln/>
-        </p:spPr>
-      </p:sp>
-      <p:sp>
-        <p:nvSpPr>
-          <p:cNvPr id="29" name="Text 27"/>
-          <p:cNvSpPr/>
-          <p:nvPr/>
-        </p:nvSpPr>
-        <p:spPr>
-          <a:xfrm>
-            <a:off x="502920" y="3445459"/>
-            <a:ext cx="402336" cy="402336"/>
-          </a:xfrm>
-          <a:prstGeom prst="rect">
-            <a:avLst/>
-          </a:prstGeom>
-          <a:noFill/>
-          <a:ln/>
-        </p:spPr>
-        <p:txBody>
-          <a:bodyPr wrap="square" lIns="0" tIns="0" rIns="0" bIns="0" rtlCol="0" anchor="ctr"/>
-          <a:lstStyle/>
-          <a:p>
-            <a:pPr algn="ctr" indent="0" marL="0">
-              <a:buNone/>
-            </a:pPr>
-            <a:r>
-              <a:rPr lang="en-US" sz="1300" b="1" dirty="0">
-                <a:solidFill>
-                  <a:srgbClr val="FFFFFF"/>
-                </a:solidFill>
-                <a:latin typeface="Apple SD Gothic Neo" pitchFamily="34" charset="0"/>
-                <a:ea typeface="Apple SD Gothic Neo" pitchFamily="34" charset="-122"/>
-                <a:cs typeface="Apple SD Gothic Neo" pitchFamily="34" charset="-120"/>
-              </a:rPr>
-              <a:t>T</a:t>
-            </a:r>
-            <a:endParaRPr lang="en-US" sz="1300" dirty="0"/>
-          </a:p>
-        </p:txBody>
-      </p:sp>
-      <p:sp>
-        <p:nvSpPr>
-          <p:cNvPr id="30" name="Text 28"/>
-          <p:cNvSpPr/>
-          <p:nvPr/>
-        </p:nvSpPr>
-        <p:spPr>
-          <a:xfrm>
-            <a:off x="996696" y="3456432"/>
-            <a:ext cx="1143000" cy="402336"/>
-          </a:xfrm>
-          <a:prstGeom prst="rect">
-            <a:avLst/>
-          </a:prstGeom>
-          <a:noFill/>
-          <a:ln/>
-        </p:spPr>
-        <p:txBody>
-          <a:bodyPr wrap="square" lIns="0" tIns="0" rIns="0" bIns="0" rtlCol="0" anchor="ctr"/>
-          <a:lstStyle/>
-          <a:p>
-            <a:pPr indent="0" marL="0">
-              <a:buNone/>
-            </a:pPr>
-            <a:r>
-              <a:rPr lang="en-US" sz="1150" b="1" dirty="0">
-                <a:solidFill>
-                  <a:srgbClr val="26262E"/>
-                </a:solidFill>
-                <a:latin typeface="Apple SD Gothic Neo" pitchFamily="34" charset="0"/>
-                <a:ea typeface="Apple SD Gothic Neo" pitchFamily="34" charset="-122"/>
-                <a:cs typeface="Apple SD Gothic Neo" pitchFamily="34" charset="-120"/>
-              </a:rPr>
-              <a:t>단기 회전</a:t>
-            </a:r>
-            <a:endParaRPr lang="en-US" sz="1150" dirty="0"/>
-          </a:p>
-        </p:txBody>
-      </p:sp>
-      <p:sp>
-        <p:nvSpPr>
-          <p:cNvPr id="31" name="Shape 29"/>
-          <p:cNvSpPr/>
-          <p:nvPr/>
-        </p:nvSpPr>
-        <p:spPr>
-          <a:xfrm>
-            <a:off x="2194560" y="3657600"/>
-            <a:ext cx="777240" cy="0"/>
-          </a:xfrm>
-          <a:prstGeom prst="line">
-            <a:avLst/>
-          </a:prstGeom>
-          <a:noFill/>
-          <a:ln w="19050">
-            <a:solidFill>
-              <a:srgbClr val="C9BBA4"/>
-            </a:solidFill>
-            <a:prstDash val="dash"/>
-          </a:ln>
-        </p:spPr>
-      </p:sp>
-      <p:sp>
-        <p:nvSpPr>
-          <p:cNvPr id="32" name="Shape 30"/>
-          <p:cNvSpPr/>
-          <p:nvPr/>
-        </p:nvSpPr>
-        <p:spPr>
-          <a:xfrm>
-            <a:off x="3081528" y="3456432"/>
-            <a:ext cx="402336" cy="402336"/>
-          </a:xfrm>
-          <a:prstGeom prst="ellipse">
-            <a:avLst/>
-          </a:prstGeom>
-          <a:solidFill>
-            <a:srgbClr val="E2611F"/>
-          </a:solidFill>
-          <a:ln/>
-        </p:spPr>
-      </p:sp>
-      <p:sp>
-        <p:nvSpPr>
-          <p:cNvPr id="33" name="Text 31"/>
-          <p:cNvSpPr/>
-          <p:nvPr/>
-        </p:nvSpPr>
-        <p:spPr>
-          <a:xfrm>
-            <a:off x="3081528" y="3445459"/>
-            <a:ext cx="402336" cy="402336"/>
-          </a:xfrm>
-          <a:prstGeom prst="rect">
-            <a:avLst/>
-          </a:prstGeom>
-          <a:noFill/>
-          <a:ln/>
-        </p:spPr>
-        <p:txBody>
-          <a:bodyPr wrap="square" lIns="0" tIns="0" rIns="0" bIns="0" rtlCol="0" anchor="ctr"/>
-          <a:lstStyle/>
-          <a:p>
-            <a:pPr algn="ctr" indent="0" marL="0">
-              <a:buNone/>
-            </a:pPr>
-            <a:r>
-              <a:rPr lang="en-US" sz="1300" b="1" dirty="0">
-                <a:solidFill>
-                  <a:srgbClr val="FFFFFF"/>
-                </a:solidFill>
-                <a:latin typeface="Apple SD Gothic Neo" pitchFamily="34" charset="0"/>
-                <a:ea typeface="Apple SD Gothic Neo" pitchFamily="34" charset="-122"/>
-                <a:cs typeface="Apple SD Gothic Neo" pitchFamily="34" charset="-120"/>
-              </a:rPr>
-              <a:t>L</a:t>
-            </a:r>
-            <a:endParaRPr lang="en-US" sz="1300" dirty="0"/>
-          </a:p>
-        </p:txBody>
-      </p:sp>
-      <p:sp>
-        <p:nvSpPr>
-          <p:cNvPr id="34" name="Text 32"/>
-          <p:cNvSpPr/>
-          <p:nvPr/>
-        </p:nvSpPr>
-        <p:spPr>
-          <a:xfrm>
-            <a:off x="3575304" y="3456432"/>
-            <a:ext cx="1188720" cy="402336"/>
-          </a:xfrm>
-          <a:prstGeom prst="rect">
-            <a:avLst/>
-          </a:prstGeom>
-          <a:noFill/>
-          <a:ln/>
-        </p:spPr>
-        <p:txBody>
-          <a:bodyPr wrap="square" lIns="0" tIns="0" rIns="0" bIns="0" rtlCol="0" anchor="ctr"/>
-          <a:lstStyle/>
-          <a:p>
-            <a:pPr indent="0" marL="0">
-              <a:buNone/>
-            </a:pPr>
-            <a:r>
-              <a:rPr lang="en-US" sz="1150" b="1" dirty="0">
-                <a:solidFill>
-                  <a:srgbClr val="26262E"/>
-                </a:solidFill>
-                <a:latin typeface="Apple SD Gothic Neo" pitchFamily="34" charset="0"/>
-                <a:ea typeface="Apple SD Gothic Neo" pitchFamily="34" charset="-122"/>
-                <a:cs typeface="Apple SD Gothic Neo" pitchFamily="34" charset="-120"/>
-              </a:rPr>
-              <a:t>장기 보유</a:t>
-            </a:r>
-            <a:endParaRPr lang="en-US" sz="1150" dirty="0"/>
-          </a:p>
-        </p:txBody>
-      </p:sp>
-      <p:sp>
-        <p:nvSpPr>
-          <p:cNvPr id="35" name="Text 33"/>
-          <p:cNvSpPr/>
-          <p:nvPr/>
-        </p:nvSpPr>
-        <p:spPr>
-          <a:xfrm>
-            <a:off x="502920" y="4206240"/>
-            <a:ext cx="4206240" cy="274320"/>
-          </a:xfrm>
-          <a:prstGeom prst="rect">
-            <a:avLst/>
-          </a:prstGeom>
-          <a:noFill/>
-          <a:ln/>
-        </p:spPr>
-        <p:txBody>
-          <a:bodyPr wrap="square" lIns="0" tIns="0" rIns="0" bIns="0" rtlCol="0" anchor="ctr"/>
-          <a:lstStyle/>
-          <a:p>
-            <a:pPr indent="0" marL="0">
-              <a:buNone/>
-            </a:pPr>
-            <a:r>
-              <a:rPr lang="en-US" sz="1100" i="1" dirty="0">
-                <a:solidFill>
-                  <a:srgbClr val="6E6A75"/>
-                </a:solidFill>
-                <a:latin typeface="Apple SD Gothic Neo" pitchFamily="34" charset="0"/>
-                <a:ea typeface="Apple SD Gothic Neo" pitchFamily="34" charset="-122"/>
-                <a:cs typeface="Apple SD Gothic Neo" pitchFamily="34" charset="-120"/>
-              </a:rPr>
-              <a:t>4개 축 × 2 = 16가지 투자 유형</a:t>
-            </a:r>
-            <a:endParaRPr lang="en-US" sz="1100" dirty="0"/>
-          </a:p>
-        </p:txBody>
-      </p:sp>
-      <p:sp>
-        <p:nvSpPr>
-          <p:cNvPr id="36" name="Shape 34"/>
-          <p:cNvSpPr/>
-          <p:nvPr/>
-        </p:nvSpPr>
-        <p:spPr>
-          <a:xfrm>
-            <a:off x="5029200" y="1417320"/>
-            <a:ext cx="3611880" cy="3017520"/>
+            <a:off x="502920" y="1371600"/>
+            <a:ext cx="2404872" cy="2788920"/>
           </a:xfrm>
           <a:prstGeom prst="rect">
             <a:avLst/>
@@ -36601,14 +35686,568 @@
       </p:sp>
       <p:sp>
         <p:nvSpPr>
-          <p:cNvPr id="37" name="Shape 35"/>
-          <p:cNvSpPr/>
-          <p:nvPr/>
-        </p:nvSpPr>
-        <p:spPr>
-          <a:xfrm>
-            <a:off x="5029200" y="1417320"/>
-            <a:ext cx="64008" cy="3017520"/>
+          <p:cNvPr id="8" name="Shape 6"/>
+          <p:cNvSpPr/>
+          <p:nvPr/>
+        </p:nvSpPr>
+        <p:spPr>
+          <a:xfrm>
+            <a:off x="502920" y="1371600"/>
+            <a:ext cx="64008" cy="2788920"/>
+          </a:xfrm>
+          <a:prstGeom prst="rect">
+            <a:avLst/>
+          </a:prstGeom>
+          <a:solidFill>
+            <a:srgbClr val="1C2B4A"/>
+          </a:solidFill>
+          <a:ln/>
+        </p:spPr>
+      </p:sp>
+      <p:sp>
+        <p:nvSpPr>
+          <p:cNvPr id="9" name="Text 7"/>
+          <p:cNvSpPr/>
+          <p:nvPr/>
+        </p:nvSpPr>
+        <p:spPr>
+          <a:xfrm>
+            <a:off x="685800" y="1481328"/>
+            <a:ext cx="1581912" cy="274320"/>
+          </a:xfrm>
+          <a:prstGeom prst="rect">
+            <a:avLst/>
+          </a:prstGeom>
+          <a:noFill/>
+          <a:ln/>
+        </p:spPr>
+        <p:txBody>
+          <a:bodyPr wrap="square" lIns="0" tIns="0" rIns="0" bIns="0" rtlCol="0" anchor="ctr"/>
+          <a:lstStyle/>
+          <a:p>
+            <a:pPr indent="0" marL="0">
+              <a:buNone/>
+            </a:pPr>
+            <a:r>
+              <a:rPr lang="en-US" sz="1250" b="1" dirty="0">
+                <a:solidFill>
+                  <a:srgbClr val="1C2B4A"/>
+                </a:solidFill>
+                <a:latin typeface="Apple SD Gothic Neo" pitchFamily="34" charset="0"/>
+                <a:ea typeface="Apple SD Gothic Neo" pitchFamily="34" charset="-122"/>
+                <a:cs typeface="Apple SD Gothic Neo" pitchFamily="34" charset="-120"/>
+              </a:rPr>
+              <a:t>매매 트랙</a:t>
+            </a:r>
+            <a:endParaRPr lang="en-US" sz="1250" dirty="0"/>
+          </a:p>
+        </p:txBody>
+      </p:sp>
+      <p:sp>
+        <p:nvSpPr>
+          <p:cNvPr id="10" name="Text 8"/>
+          <p:cNvSpPr/>
+          <p:nvPr/>
+        </p:nvSpPr>
+        <p:spPr>
+          <a:xfrm>
+            <a:off x="1764792" y="1490472"/>
+            <a:ext cx="987552" cy="256032"/>
+          </a:xfrm>
+          <a:prstGeom prst="rect">
+            <a:avLst/>
+          </a:prstGeom>
+          <a:noFill/>
+          <a:ln/>
+        </p:spPr>
+        <p:txBody>
+          <a:bodyPr wrap="square" lIns="0" tIns="0" rIns="0" bIns="0" rtlCol="0" anchor="ctr"/>
+          <a:lstStyle/>
+          <a:p>
+            <a:pPr algn="r" indent="0" marL="0">
+              <a:buNone/>
+            </a:pPr>
+            <a:r>
+              <a:rPr lang="en-US" sz="850" dirty="0">
+                <a:solidFill>
+                  <a:srgbClr val="6E6A75"/>
+                </a:solidFill>
+                <a:latin typeface="Apple SD Gothic Neo" pitchFamily="34" charset="0"/>
+                <a:ea typeface="Apple SD Gothic Neo" pitchFamily="34" charset="-122"/>
+                <a:cs typeface="Apple SD Gothic Neo" pitchFamily="34" charset="-120"/>
+              </a:rPr>
+              <a:t>M-SHRG</a:t>
+            </a:r>
+            <a:endParaRPr lang="en-US" sz="850" dirty="0"/>
+          </a:p>
+        </p:txBody>
+      </p:sp>
+      <p:sp>
+        <p:nvSpPr>
+          <p:cNvPr id="11" name="Text 9"/>
+          <p:cNvSpPr/>
+          <p:nvPr/>
+        </p:nvSpPr>
+        <p:spPr>
+          <a:xfrm>
+            <a:off x="685800" y="1874520"/>
+            <a:ext cx="658368" cy="457200"/>
+          </a:xfrm>
+          <a:prstGeom prst="rect">
+            <a:avLst/>
+          </a:prstGeom>
+          <a:noFill/>
+          <a:ln/>
+        </p:spPr>
+        <p:txBody>
+          <a:bodyPr wrap="square" lIns="0" tIns="0" rIns="0" bIns="0" rtlCol="0" anchor="ctr"/>
+          <a:lstStyle/>
+          <a:p>
+            <a:pPr indent="0" marL="0">
+              <a:buNone/>
+            </a:pPr>
+            <a:r>
+              <a:rPr lang="en-US" sz="860" b="1" dirty="0">
+                <a:solidFill>
+                  <a:srgbClr val="6E6A75"/>
+                </a:solidFill>
+                <a:latin typeface="Apple SD Gothic Neo" pitchFamily="34" charset="0"/>
+                <a:ea typeface="Apple SD Gothic Neo" pitchFamily="34" charset="-122"/>
+                <a:cs typeface="Apple SD Gothic Neo" pitchFamily="34" charset="-120"/>
+              </a:rPr>
+              <a:t>리스크</a:t>
+            </a:r>
+            <a:endParaRPr lang="en-US" sz="860" dirty="0"/>
+          </a:p>
+        </p:txBody>
+      </p:sp>
+      <p:sp>
+        <p:nvSpPr>
+          <p:cNvPr id="12" name="Text 10"/>
+          <p:cNvSpPr/>
+          <p:nvPr/>
+        </p:nvSpPr>
+        <p:spPr>
+          <a:xfrm>
+            <a:off x="1307592" y="1874520"/>
+            <a:ext cx="1444752" cy="457200"/>
+          </a:xfrm>
+          <a:prstGeom prst="rect">
+            <a:avLst/>
+          </a:prstGeom>
+          <a:noFill/>
+          <a:ln/>
+        </p:spPr>
+        <p:txBody>
+          <a:bodyPr wrap="square" lIns="0" tIns="0" rIns="0" bIns="0" rtlCol="0" anchor="ctr"/>
+          <a:lstStyle/>
+          <a:p>
+            <a:pPr indent="0" marL="0">
+              <a:buNone/>
+            </a:pPr>
+            <a:r>
+              <a:rPr lang="en-US" sz="900" b="1" dirty="0">
+                <a:solidFill>
+                  <a:srgbClr val="1C2B4A"/>
+                </a:solidFill>
+                <a:latin typeface="Apple SD Gothic Neo" pitchFamily="34" charset="0"/>
+                <a:ea typeface="Apple SD Gothic Neo" pitchFamily="34" charset="-122"/>
+                <a:cs typeface="Apple SD Gothic Neo" pitchFamily="34" charset="-120"/>
+              </a:rPr>
+              <a:t>안정 S</a:t>
+            </a:r>
+            <a:pPr indent="0" marL="0">
+              <a:buNone/>
+            </a:pPr>
+            <a:r>
+              <a:rPr lang="en-US" sz="900" dirty="0">
+                <a:solidFill>
+                  <a:srgbClr val="C9BBA4"/>
+                </a:solidFill>
+                <a:latin typeface="Apple SD Gothic Neo" pitchFamily="34" charset="0"/>
+                <a:ea typeface="Apple SD Gothic Neo" pitchFamily="34" charset="-122"/>
+                <a:cs typeface="Apple SD Gothic Neo" pitchFamily="34" charset="-120"/>
+              </a:rPr>
+              <a:t>  ↔  </a:t>
+            </a:r>
+            <a:pPr indent="0" marL="0">
+              <a:buNone/>
+            </a:pPr>
+            <a:r>
+              <a:rPr lang="en-US" sz="900" b="1" dirty="0">
+                <a:solidFill>
+                  <a:srgbClr val="E2611F"/>
+                </a:solidFill>
+                <a:latin typeface="Apple SD Gothic Neo" pitchFamily="34" charset="0"/>
+                <a:ea typeface="Apple SD Gothic Neo" pitchFamily="34" charset="-122"/>
+                <a:cs typeface="Apple SD Gothic Neo" pitchFamily="34" charset="-120"/>
+              </a:rPr>
+              <a:t>공격 A</a:t>
+            </a:r>
+            <a:endParaRPr lang="en-US" sz="900" dirty="0"/>
+          </a:p>
+        </p:txBody>
+      </p:sp>
+      <p:sp>
+        <p:nvSpPr>
+          <p:cNvPr id="13" name="Text 11"/>
+          <p:cNvSpPr/>
+          <p:nvPr/>
+        </p:nvSpPr>
+        <p:spPr>
+          <a:xfrm>
+            <a:off x="685800" y="2423160"/>
+            <a:ext cx="658368" cy="457200"/>
+          </a:xfrm>
+          <a:prstGeom prst="rect">
+            <a:avLst/>
+          </a:prstGeom>
+          <a:noFill/>
+          <a:ln/>
+        </p:spPr>
+        <p:txBody>
+          <a:bodyPr wrap="square" lIns="0" tIns="0" rIns="0" bIns="0" rtlCol="0" anchor="ctr"/>
+          <a:lstStyle/>
+          <a:p>
+            <a:pPr indent="0" marL="0">
+              <a:buNone/>
+            </a:pPr>
+            <a:r>
+              <a:rPr lang="en-US" sz="860" b="1" dirty="0">
+                <a:solidFill>
+                  <a:srgbClr val="6E6A75"/>
+                </a:solidFill>
+                <a:latin typeface="Apple SD Gothic Neo" pitchFamily="34" charset="0"/>
+                <a:ea typeface="Apple SD Gothic Neo" pitchFamily="34" charset="-122"/>
+                <a:cs typeface="Apple SD Gothic Neo" pitchFamily="34" charset="-120"/>
+              </a:rPr>
+              <a:t>기간</a:t>
+            </a:r>
+            <a:endParaRPr lang="en-US" sz="860" dirty="0"/>
+          </a:p>
+        </p:txBody>
+      </p:sp>
+      <p:sp>
+        <p:nvSpPr>
+          <p:cNvPr id="14" name="Text 12"/>
+          <p:cNvSpPr/>
+          <p:nvPr/>
+        </p:nvSpPr>
+        <p:spPr>
+          <a:xfrm>
+            <a:off x="1307592" y="2423160"/>
+            <a:ext cx="1444752" cy="457200"/>
+          </a:xfrm>
+          <a:prstGeom prst="rect">
+            <a:avLst/>
+          </a:prstGeom>
+          <a:noFill/>
+          <a:ln/>
+        </p:spPr>
+        <p:txBody>
+          <a:bodyPr wrap="square" lIns="0" tIns="0" rIns="0" bIns="0" rtlCol="0" anchor="ctr"/>
+          <a:lstStyle/>
+          <a:p>
+            <a:pPr indent="0" marL="0">
+              <a:buNone/>
+            </a:pPr>
+            <a:r>
+              <a:rPr lang="en-US" sz="900" b="1" dirty="0">
+                <a:solidFill>
+                  <a:srgbClr val="1C2B4A"/>
+                </a:solidFill>
+                <a:latin typeface="Apple SD Gothic Neo" pitchFamily="34" charset="0"/>
+                <a:ea typeface="Apple SD Gothic Neo" pitchFamily="34" charset="-122"/>
+                <a:cs typeface="Apple SD Gothic Neo" pitchFamily="34" charset="-120"/>
+              </a:rPr>
+              <a:t>장기 H</a:t>
+            </a:r>
+            <a:pPr indent="0" marL="0">
+              <a:buNone/>
+            </a:pPr>
+            <a:r>
+              <a:rPr lang="en-US" sz="900" dirty="0">
+                <a:solidFill>
+                  <a:srgbClr val="C9BBA4"/>
+                </a:solidFill>
+                <a:latin typeface="Apple SD Gothic Neo" pitchFamily="34" charset="0"/>
+                <a:ea typeface="Apple SD Gothic Neo" pitchFamily="34" charset="-122"/>
+                <a:cs typeface="Apple SD Gothic Neo" pitchFamily="34" charset="-120"/>
+              </a:rPr>
+              <a:t>  ↔  </a:t>
+            </a:r>
+            <a:pPr indent="0" marL="0">
+              <a:buNone/>
+            </a:pPr>
+            <a:r>
+              <a:rPr lang="en-US" sz="900" b="1" dirty="0">
+                <a:solidFill>
+                  <a:srgbClr val="E2611F"/>
+                </a:solidFill>
+                <a:latin typeface="Apple SD Gothic Neo" pitchFamily="34" charset="0"/>
+                <a:ea typeface="Apple SD Gothic Neo" pitchFamily="34" charset="-122"/>
+                <a:cs typeface="Apple SD Gothic Neo" pitchFamily="34" charset="-120"/>
+              </a:rPr>
+              <a:t>단기 T</a:t>
+            </a:r>
+            <a:endParaRPr lang="en-US" sz="900" dirty="0"/>
+          </a:p>
+        </p:txBody>
+      </p:sp>
+      <p:sp>
+        <p:nvSpPr>
+          <p:cNvPr id="15" name="Text 13"/>
+          <p:cNvSpPr/>
+          <p:nvPr/>
+        </p:nvSpPr>
+        <p:spPr>
+          <a:xfrm>
+            <a:off x="685800" y="2971800"/>
+            <a:ext cx="658368" cy="457200"/>
+          </a:xfrm>
+          <a:prstGeom prst="rect">
+            <a:avLst/>
+          </a:prstGeom>
+          <a:noFill/>
+          <a:ln/>
+        </p:spPr>
+        <p:txBody>
+          <a:bodyPr wrap="square" lIns="0" tIns="0" rIns="0" bIns="0" rtlCol="0" anchor="ctr"/>
+          <a:lstStyle/>
+          <a:p>
+            <a:pPr indent="0" marL="0">
+              <a:buNone/>
+            </a:pPr>
+            <a:r>
+              <a:rPr lang="en-US" sz="860" b="1" dirty="0">
+                <a:solidFill>
+                  <a:srgbClr val="6E6A75"/>
+                </a:solidFill>
+                <a:latin typeface="Apple SD Gothic Neo" pitchFamily="34" charset="0"/>
+                <a:ea typeface="Apple SD Gothic Neo" pitchFamily="34" charset="-122"/>
+                <a:cs typeface="Apple SD Gothic Neo" pitchFamily="34" charset="-120"/>
+              </a:rPr>
+              <a:t>목적</a:t>
+            </a:r>
+            <a:endParaRPr lang="en-US" sz="860" dirty="0"/>
+          </a:p>
+        </p:txBody>
+      </p:sp>
+      <p:sp>
+        <p:nvSpPr>
+          <p:cNvPr id="16" name="Text 14"/>
+          <p:cNvSpPr/>
+          <p:nvPr/>
+        </p:nvSpPr>
+        <p:spPr>
+          <a:xfrm>
+            <a:off x="1307592" y="2971800"/>
+            <a:ext cx="1444752" cy="457200"/>
+          </a:xfrm>
+          <a:prstGeom prst="rect">
+            <a:avLst/>
+          </a:prstGeom>
+          <a:noFill/>
+          <a:ln/>
+        </p:spPr>
+        <p:txBody>
+          <a:bodyPr wrap="square" lIns="0" tIns="0" rIns="0" bIns="0" rtlCol="0" anchor="ctr"/>
+          <a:lstStyle/>
+          <a:p>
+            <a:pPr indent="0" marL="0">
+              <a:buNone/>
+            </a:pPr>
+            <a:r>
+              <a:rPr lang="en-US" sz="900" b="1" dirty="0">
+                <a:solidFill>
+                  <a:srgbClr val="1C2B4A"/>
+                </a:solidFill>
+                <a:latin typeface="Apple SD Gothic Neo" pitchFamily="34" charset="0"/>
+                <a:ea typeface="Apple SD Gothic Neo" pitchFamily="34" charset="-122"/>
+                <a:cs typeface="Apple SD Gothic Neo" pitchFamily="34" charset="-120"/>
+              </a:rPr>
+              <a:t>실거주 R</a:t>
+            </a:r>
+            <a:pPr indent="0" marL="0">
+              <a:buNone/>
+            </a:pPr>
+            <a:r>
+              <a:rPr lang="en-US" sz="900" dirty="0">
+                <a:solidFill>
+                  <a:srgbClr val="C9BBA4"/>
+                </a:solidFill>
+                <a:latin typeface="Apple SD Gothic Neo" pitchFamily="34" charset="0"/>
+                <a:ea typeface="Apple SD Gothic Neo" pitchFamily="34" charset="-122"/>
+                <a:cs typeface="Apple SD Gothic Neo" pitchFamily="34" charset="-120"/>
+              </a:rPr>
+              <a:t>  ↔  </a:t>
+            </a:r>
+            <a:pPr indent="0" marL="0">
+              <a:buNone/>
+            </a:pPr>
+            <a:r>
+              <a:rPr lang="en-US" sz="900" b="1" dirty="0">
+                <a:solidFill>
+                  <a:srgbClr val="E2611F"/>
+                </a:solidFill>
+                <a:latin typeface="Apple SD Gothic Neo" pitchFamily="34" charset="0"/>
+                <a:ea typeface="Apple SD Gothic Neo" pitchFamily="34" charset="-122"/>
+                <a:cs typeface="Apple SD Gothic Neo" pitchFamily="34" charset="-120"/>
+              </a:rPr>
+              <a:t>투자 P</a:t>
+            </a:r>
+            <a:endParaRPr lang="en-US" sz="900" dirty="0"/>
+          </a:p>
+        </p:txBody>
+      </p:sp>
+      <p:sp>
+        <p:nvSpPr>
+          <p:cNvPr id="17" name="Text 15"/>
+          <p:cNvSpPr/>
+          <p:nvPr/>
+        </p:nvSpPr>
+        <p:spPr>
+          <a:xfrm>
+            <a:off x="685800" y="3520440"/>
+            <a:ext cx="658368" cy="457200"/>
+          </a:xfrm>
+          <a:prstGeom prst="rect">
+            <a:avLst/>
+          </a:prstGeom>
+          <a:noFill/>
+          <a:ln/>
+        </p:spPr>
+        <p:txBody>
+          <a:bodyPr wrap="square" lIns="0" tIns="0" rIns="0" bIns="0" rtlCol="0" anchor="ctr"/>
+          <a:lstStyle/>
+          <a:p>
+            <a:pPr indent="0" marL="0">
+              <a:buNone/>
+            </a:pPr>
+            <a:r>
+              <a:rPr lang="en-US" sz="860" b="1" dirty="0">
+                <a:solidFill>
+                  <a:srgbClr val="6E6A75"/>
+                </a:solidFill>
+                <a:latin typeface="Apple SD Gothic Neo" pitchFamily="34" charset="0"/>
+                <a:ea typeface="Apple SD Gothic Neo" pitchFamily="34" charset="-122"/>
+                <a:cs typeface="Apple SD Gothic Neo" pitchFamily="34" charset="-120"/>
+              </a:rPr>
+              <a:t>자금</a:t>
+            </a:r>
+            <a:endParaRPr lang="en-US" sz="860" dirty="0"/>
+          </a:p>
+        </p:txBody>
+      </p:sp>
+      <p:sp>
+        <p:nvSpPr>
+          <p:cNvPr id="18" name="Text 16"/>
+          <p:cNvSpPr/>
+          <p:nvPr/>
+        </p:nvSpPr>
+        <p:spPr>
+          <a:xfrm>
+            <a:off x="1307592" y="3520440"/>
+            <a:ext cx="1444752" cy="457200"/>
+          </a:xfrm>
+          <a:prstGeom prst="rect">
+            <a:avLst/>
+          </a:prstGeom>
+          <a:noFill/>
+          <a:ln/>
+        </p:spPr>
+        <p:txBody>
+          <a:bodyPr wrap="square" lIns="0" tIns="0" rIns="0" bIns="0" rtlCol="0" anchor="ctr"/>
+          <a:lstStyle/>
+          <a:p>
+            <a:pPr indent="0" marL="0">
+              <a:buNone/>
+            </a:pPr>
+            <a:r>
+              <a:rPr lang="en-US" sz="900" b="1" dirty="0">
+                <a:solidFill>
+                  <a:srgbClr val="1C2B4A"/>
+                </a:solidFill>
+                <a:latin typeface="Apple SD Gothic Neo" pitchFamily="34" charset="0"/>
+                <a:ea typeface="Apple SD Gothic Neo" pitchFamily="34" charset="-122"/>
+                <a:cs typeface="Apple SD Gothic Neo" pitchFamily="34" charset="-120"/>
+              </a:rPr>
+              <a:t>레버리지 G</a:t>
+            </a:r>
+            <a:pPr indent="0" marL="0">
+              <a:buNone/>
+            </a:pPr>
+            <a:r>
+              <a:rPr lang="en-US" sz="900" dirty="0">
+                <a:solidFill>
+                  <a:srgbClr val="C9BBA4"/>
+                </a:solidFill>
+                <a:latin typeface="Apple SD Gothic Neo" pitchFamily="34" charset="0"/>
+                <a:ea typeface="Apple SD Gothic Neo" pitchFamily="34" charset="-122"/>
+                <a:cs typeface="Apple SD Gothic Neo" pitchFamily="34" charset="-120"/>
+              </a:rPr>
+              <a:t>  ↔  </a:t>
+            </a:r>
+            <a:pPr indent="0" marL="0">
+              <a:buNone/>
+            </a:pPr>
+            <a:r>
+              <a:rPr lang="en-US" sz="900" b="1" dirty="0">
+                <a:solidFill>
+                  <a:srgbClr val="E2611F"/>
+                </a:solidFill>
+                <a:latin typeface="Apple SD Gothic Neo" pitchFamily="34" charset="0"/>
+                <a:ea typeface="Apple SD Gothic Neo" pitchFamily="34" charset="-122"/>
+                <a:cs typeface="Apple SD Gothic Neo" pitchFamily="34" charset="-120"/>
+              </a:rPr>
+              <a:t>자기자본 E</a:t>
+            </a:r>
+            <a:endParaRPr lang="en-US" sz="900" dirty="0"/>
+          </a:p>
+        </p:txBody>
+      </p:sp>
+      <p:sp>
+        <p:nvSpPr>
+          <p:cNvPr id="19" name="Shape 17"/>
+          <p:cNvSpPr/>
+          <p:nvPr/>
+        </p:nvSpPr>
+        <p:spPr>
+          <a:xfrm>
+            <a:off x="3072384" y="1371600"/>
+            <a:ext cx="2404872" cy="2788920"/>
+          </a:xfrm>
+          <a:prstGeom prst="rect">
+            <a:avLst/>
+          </a:prstGeom>
+          <a:solidFill>
+            <a:srgbClr val="FFFFFF"/>
+          </a:solidFill>
+          <a:ln w="9525">
+            <a:solidFill>
+              <a:srgbClr val="E5DDD0"/>
+            </a:solidFill>
+            <a:prstDash val="solid"/>
+          </a:ln>
+          <a:effectLst>
+            <a:outerShdw sx="100000" sy="100000" kx="0" ky="0" algn="bl" rotWithShape="0" blurRad="88900" dist="25400" dir="8100000">
+              <a:srgbClr val="1C2B4A">
+                <a:alpha val="14000"/>
+              </a:srgbClr>
+            </a:outerShdw>
+          </a:effectLst>
+        </p:spPr>
+      </p:sp>
+      <p:sp>
+        <p:nvSpPr>
+          <p:cNvPr id="20" name="Shape 18"/>
+          <p:cNvSpPr/>
+          <p:nvPr/>
+        </p:nvSpPr>
+        <p:spPr>
+          <a:xfrm>
+            <a:off x="3072384" y="1371600"/>
+            <a:ext cx="64008" cy="2788920"/>
           </a:xfrm>
           <a:prstGeom prst="rect">
             <a:avLst/>
@@ -36621,30 +36260,30 @@
       </p:sp>
       <p:sp>
         <p:nvSpPr>
-          <p:cNvPr id="38" name="Text 36"/>
-          <p:cNvSpPr/>
-          <p:nvPr/>
-        </p:nvSpPr>
-        <p:spPr>
-          <a:xfrm>
-            <a:off x="5230368" y="1572768"/>
-            <a:ext cx="3200400" cy="292608"/>
-          </a:xfrm>
-          <a:prstGeom prst="rect">
-            <a:avLst/>
-          </a:prstGeom>
-          <a:noFill/>
-          <a:ln/>
-        </p:spPr>
-        <p:txBody>
-          <a:bodyPr wrap="square" lIns="0" tIns="0" rIns="0" bIns="0" rtlCol="0" anchor="ctr"/>
-          <a:lstStyle/>
-          <a:p>
-            <a:pPr indent="0" marL="0">
-              <a:buNone/>
-            </a:pPr>
-            <a:r>
-              <a:rPr lang="en-US" sz="1300" b="1" dirty="0">
+          <p:cNvPr id="21" name="Text 19"/>
+          <p:cNvSpPr/>
+          <p:nvPr/>
+        </p:nvSpPr>
+        <p:spPr>
+          <a:xfrm>
+            <a:off x="3255264" y="1481328"/>
+            <a:ext cx="1581912" cy="274320"/>
+          </a:xfrm>
+          <a:prstGeom prst="rect">
+            <a:avLst/>
+          </a:prstGeom>
+          <a:noFill/>
+          <a:ln/>
+        </p:spPr>
+        <p:txBody>
+          <a:bodyPr wrap="square" lIns="0" tIns="0" rIns="0" bIns="0" rtlCol="0" anchor="ctr"/>
+          <a:lstStyle/>
+          <a:p>
+            <a:pPr indent="0" marL="0">
+              <a:buNone/>
+            </a:pPr>
+            <a:r>
+              <a:rPr lang="en-US" sz="1250" b="1" dirty="0">
                 <a:solidFill>
                   <a:srgbClr val="E2611F"/>
                 </a:solidFill>
@@ -36652,42 +36291,638 @@
                 <a:ea typeface="Apple SD Gothic Neo" pitchFamily="34" charset="-122"/>
                 <a:cs typeface="Apple SD Gothic Neo" pitchFamily="34" charset="-120"/>
               </a:rPr>
+              <a:t>경매 트랙</a:t>
+            </a:r>
+            <a:endParaRPr lang="en-US" sz="1250" dirty="0"/>
+          </a:p>
+        </p:txBody>
+      </p:sp>
+      <p:sp>
+        <p:nvSpPr>
+          <p:cNvPr id="22" name="Text 20"/>
+          <p:cNvSpPr/>
+          <p:nvPr/>
+        </p:nvSpPr>
+        <p:spPr>
+          <a:xfrm>
+            <a:off x="4334256" y="1490472"/>
+            <a:ext cx="987552" cy="256032"/>
+          </a:xfrm>
+          <a:prstGeom prst="rect">
+            <a:avLst/>
+          </a:prstGeom>
+          <a:noFill/>
+          <a:ln/>
+        </p:spPr>
+        <p:txBody>
+          <a:bodyPr wrap="square" lIns="0" tIns="0" rIns="0" bIns="0" rtlCol="0" anchor="ctr"/>
+          <a:lstStyle/>
+          <a:p>
+            <a:pPr algn="r" indent="0" marL="0">
+              <a:buNone/>
+            </a:pPr>
+            <a:r>
+              <a:rPr lang="en-US" sz="850" dirty="0">
+                <a:solidFill>
+                  <a:srgbClr val="6E6A75"/>
+                </a:solidFill>
+                <a:latin typeface="Apple SD Gothic Neo" pitchFamily="34" charset="0"/>
+                <a:ea typeface="Apple SD Gothic Neo" pitchFamily="34" charset="-122"/>
+                <a:cs typeface="Apple SD Gothic Neo" pitchFamily="34" charset="-120"/>
+              </a:rPr>
+              <a:t>A-scnr</a:t>
+            </a:r>
+            <a:endParaRPr lang="en-US" sz="850" dirty="0"/>
+          </a:p>
+        </p:txBody>
+      </p:sp>
+      <p:sp>
+        <p:nvSpPr>
+          <p:cNvPr id="23" name="Text 21"/>
+          <p:cNvSpPr/>
+          <p:nvPr/>
+        </p:nvSpPr>
+        <p:spPr>
+          <a:xfrm>
+            <a:off x="3255264" y="1874520"/>
+            <a:ext cx="658368" cy="457200"/>
+          </a:xfrm>
+          <a:prstGeom prst="rect">
+            <a:avLst/>
+          </a:prstGeom>
+          <a:noFill/>
+          <a:ln/>
+        </p:spPr>
+        <p:txBody>
+          <a:bodyPr wrap="square" lIns="0" tIns="0" rIns="0" bIns="0" rtlCol="0" anchor="ctr"/>
+          <a:lstStyle/>
+          <a:p>
+            <a:pPr indent="0" marL="0">
+              <a:buNone/>
+            </a:pPr>
+            <a:r>
+              <a:rPr lang="en-US" sz="860" b="1" dirty="0">
+                <a:solidFill>
+                  <a:srgbClr val="6E6A75"/>
+                </a:solidFill>
+                <a:latin typeface="Apple SD Gothic Neo" pitchFamily="34" charset="0"/>
+                <a:ea typeface="Apple SD Gothic Neo" pitchFamily="34" charset="-122"/>
+                <a:cs typeface="Apple SD Gothic Neo" pitchFamily="34" charset="-120"/>
+              </a:rPr>
+              <a:t>자금</a:t>
+            </a:r>
+            <a:endParaRPr lang="en-US" sz="860" dirty="0"/>
+          </a:p>
+        </p:txBody>
+      </p:sp>
+      <p:sp>
+        <p:nvSpPr>
+          <p:cNvPr id="24" name="Text 22"/>
+          <p:cNvSpPr/>
+          <p:nvPr/>
+        </p:nvSpPr>
+        <p:spPr>
+          <a:xfrm>
+            <a:off x="3877056" y="1874520"/>
+            <a:ext cx="1444752" cy="457200"/>
+          </a:xfrm>
+          <a:prstGeom prst="rect">
+            <a:avLst/>
+          </a:prstGeom>
+          <a:noFill/>
+          <a:ln/>
+        </p:spPr>
+        <p:txBody>
+          <a:bodyPr wrap="square" lIns="0" tIns="0" rIns="0" bIns="0" rtlCol="0" anchor="ctr"/>
+          <a:lstStyle/>
+          <a:p>
+            <a:pPr indent="0" marL="0">
+              <a:buNone/>
+            </a:pPr>
+            <a:r>
+              <a:rPr lang="en-US" sz="900" b="1" dirty="0">
+                <a:solidFill>
+                  <a:srgbClr val="1C2B4A"/>
+                </a:solidFill>
+                <a:latin typeface="Apple SD Gothic Neo" pitchFamily="34" charset="0"/>
+                <a:ea typeface="Apple SD Gothic Neo" pitchFamily="34" charset="-122"/>
+                <a:cs typeface="Apple SD Gothic Neo" pitchFamily="34" charset="-120"/>
+              </a:rPr>
+              <a:t>소액분산 s</a:t>
+            </a:r>
+            <a:pPr indent="0" marL="0">
+              <a:buNone/>
+            </a:pPr>
+            <a:r>
+              <a:rPr lang="en-US" sz="900" dirty="0">
+                <a:solidFill>
+                  <a:srgbClr val="C9BBA4"/>
+                </a:solidFill>
+                <a:latin typeface="Apple SD Gothic Neo" pitchFamily="34" charset="0"/>
+                <a:ea typeface="Apple SD Gothic Neo" pitchFamily="34" charset="-122"/>
+                <a:cs typeface="Apple SD Gothic Neo" pitchFamily="34" charset="-120"/>
+              </a:rPr>
+              <a:t>  ↔  </a:t>
+            </a:r>
+            <a:pPr indent="0" marL="0">
+              <a:buNone/>
+            </a:pPr>
+            <a:r>
+              <a:rPr lang="en-US" sz="900" b="1" dirty="0">
+                <a:solidFill>
+                  <a:srgbClr val="E2611F"/>
+                </a:solidFill>
+                <a:latin typeface="Apple SD Gothic Neo" pitchFamily="34" charset="0"/>
+                <a:ea typeface="Apple SD Gothic Neo" pitchFamily="34" charset="-122"/>
+                <a:cs typeface="Apple SD Gothic Neo" pitchFamily="34" charset="-120"/>
+              </a:rPr>
+              <a:t>대액집중 b</a:t>
+            </a:r>
+            <a:endParaRPr lang="en-US" sz="900" dirty="0"/>
+          </a:p>
+        </p:txBody>
+      </p:sp>
+      <p:sp>
+        <p:nvSpPr>
+          <p:cNvPr id="25" name="Text 23"/>
+          <p:cNvSpPr/>
+          <p:nvPr/>
+        </p:nvSpPr>
+        <p:spPr>
+          <a:xfrm>
+            <a:off x="3255264" y="2423160"/>
+            <a:ext cx="658368" cy="457200"/>
+          </a:xfrm>
+          <a:prstGeom prst="rect">
+            <a:avLst/>
+          </a:prstGeom>
+          <a:noFill/>
+          <a:ln/>
+        </p:spPr>
+        <p:txBody>
+          <a:bodyPr wrap="square" lIns="0" tIns="0" rIns="0" bIns="0" rtlCol="0" anchor="ctr"/>
+          <a:lstStyle/>
+          <a:p>
+            <a:pPr indent="0" marL="0">
+              <a:buNone/>
+            </a:pPr>
+            <a:r>
+              <a:rPr lang="en-US" sz="860" b="1" dirty="0">
+                <a:solidFill>
+                  <a:srgbClr val="6E6A75"/>
+                </a:solidFill>
+                <a:latin typeface="Apple SD Gothic Neo" pitchFamily="34" charset="0"/>
+                <a:ea typeface="Apple SD Gothic Neo" pitchFamily="34" charset="-122"/>
+                <a:cs typeface="Apple SD Gothic Neo" pitchFamily="34" charset="-120"/>
+              </a:rPr>
+              <a:t>난이도</a:t>
+            </a:r>
+            <a:endParaRPr lang="en-US" sz="860" dirty="0"/>
+          </a:p>
+        </p:txBody>
+      </p:sp>
+      <p:sp>
+        <p:nvSpPr>
+          <p:cNvPr id="26" name="Text 24"/>
+          <p:cNvSpPr/>
+          <p:nvPr/>
+        </p:nvSpPr>
+        <p:spPr>
+          <a:xfrm>
+            <a:off x="3877056" y="2423160"/>
+            <a:ext cx="1444752" cy="457200"/>
+          </a:xfrm>
+          <a:prstGeom prst="rect">
+            <a:avLst/>
+          </a:prstGeom>
+          <a:noFill/>
+          <a:ln/>
+        </p:spPr>
+        <p:txBody>
+          <a:bodyPr wrap="square" lIns="0" tIns="0" rIns="0" bIns="0" rtlCol="0" anchor="ctr"/>
+          <a:lstStyle/>
+          <a:p>
+            <a:pPr indent="0" marL="0">
+              <a:buNone/>
+            </a:pPr>
+            <a:r>
+              <a:rPr lang="en-US" sz="900" b="1" dirty="0">
+                <a:solidFill>
+                  <a:srgbClr val="1C2B4A"/>
+                </a:solidFill>
+                <a:latin typeface="Apple SD Gothic Neo" pitchFamily="34" charset="0"/>
+                <a:ea typeface="Apple SD Gothic Neo" pitchFamily="34" charset="-122"/>
+                <a:cs typeface="Apple SD Gothic Neo" pitchFamily="34" charset="-120"/>
+              </a:rPr>
+              <a:t>안전입찰 c</a:t>
+            </a:r>
+            <a:pPr indent="0" marL="0">
+              <a:buNone/>
+            </a:pPr>
+            <a:r>
+              <a:rPr lang="en-US" sz="900" dirty="0">
+                <a:solidFill>
+                  <a:srgbClr val="C9BBA4"/>
+                </a:solidFill>
+                <a:latin typeface="Apple SD Gothic Neo" pitchFamily="34" charset="0"/>
+                <a:ea typeface="Apple SD Gothic Neo" pitchFamily="34" charset="-122"/>
+                <a:cs typeface="Apple SD Gothic Neo" pitchFamily="34" charset="-120"/>
+              </a:rPr>
+              <a:t>  ↔  </a:t>
+            </a:r>
+            <a:pPr indent="0" marL="0">
+              <a:buNone/>
+            </a:pPr>
+            <a:r>
+              <a:rPr lang="en-US" sz="900" b="1" dirty="0">
+                <a:solidFill>
+                  <a:srgbClr val="E2611F"/>
+                </a:solidFill>
+                <a:latin typeface="Apple SD Gothic Neo" pitchFamily="34" charset="0"/>
+                <a:ea typeface="Apple SD Gothic Neo" pitchFamily="34" charset="-122"/>
+                <a:cs typeface="Apple SD Gothic Neo" pitchFamily="34" charset="-120"/>
+              </a:rPr>
+              <a:t>특수물건 x</a:t>
+            </a:r>
+            <a:endParaRPr lang="en-US" sz="900" dirty="0"/>
+          </a:p>
+        </p:txBody>
+      </p:sp>
+      <p:sp>
+        <p:nvSpPr>
+          <p:cNvPr id="27" name="Text 25"/>
+          <p:cNvSpPr/>
+          <p:nvPr/>
+        </p:nvSpPr>
+        <p:spPr>
+          <a:xfrm>
+            <a:off x="3255264" y="2971800"/>
+            <a:ext cx="658368" cy="457200"/>
+          </a:xfrm>
+          <a:prstGeom prst="rect">
+            <a:avLst/>
+          </a:prstGeom>
+          <a:noFill/>
+          <a:ln/>
+        </p:spPr>
+        <p:txBody>
+          <a:bodyPr wrap="square" lIns="0" tIns="0" rIns="0" bIns="0" rtlCol="0" anchor="ctr"/>
+          <a:lstStyle/>
+          <a:p>
+            <a:pPr indent="0" marL="0">
+              <a:buNone/>
+            </a:pPr>
+            <a:r>
+              <a:rPr lang="en-US" sz="860" b="1" dirty="0">
+                <a:solidFill>
+                  <a:srgbClr val="6E6A75"/>
+                </a:solidFill>
+                <a:latin typeface="Apple SD Gothic Neo" pitchFamily="34" charset="0"/>
+                <a:ea typeface="Apple SD Gothic Neo" pitchFamily="34" charset="-122"/>
+                <a:cs typeface="Apple SD Gothic Neo" pitchFamily="34" charset="-120"/>
+              </a:rPr>
+              <a:t>지역</a:t>
+            </a:r>
+            <a:endParaRPr lang="en-US" sz="860" dirty="0"/>
+          </a:p>
+        </p:txBody>
+      </p:sp>
+      <p:sp>
+        <p:nvSpPr>
+          <p:cNvPr id="28" name="Text 26"/>
+          <p:cNvSpPr/>
+          <p:nvPr/>
+        </p:nvSpPr>
+        <p:spPr>
+          <a:xfrm>
+            <a:off x="3877056" y="2971800"/>
+            <a:ext cx="1444752" cy="457200"/>
+          </a:xfrm>
+          <a:prstGeom prst="rect">
+            <a:avLst/>
+          </a:prstGeom>
+          <a:noFill/>
+          <a:ln/>
+        </p:spPr>
+        <p:txBody>
+          <a:bodyPr wrap="square" lIns="0" tIns="0" rIns="0" bIns="0" rtlCol="0" anchor="ctr"/>
+          <a:lstStyle/>
+          <a:p>
+            <a:pPr indent="0" marL="0">
+              <a:buNone/>
+            </a:pPr>
+            <a:r>
+              <a:rPr lang="en-US" sz="900" b="1" dirty="0">
+                <a:solidFill>
+                  <a:srgbClr val="1C2B4A"/>
+                </a:solidFill>
+                <a:latin typeface="Apple SD Gothic Neo" pitchFamily="34" charset="0"/>
+                <a:ea typeface="Apple SD Gothic Neo" pitchFamily="34" charset="-122"/>
+                <a:cs typeface="Apple SD Gothic Neo" pitchFamily="34" charset="-120"/>
+              </a:rPr>
+              <a:t>연고지 n</a:t>
+            </a:r>
+            <a:pPr indent="0" marL="0">
+              <a:buNone/>
+            </a:pPr>
+            <a:r>
+              <a:rPr lang="en-US" sz="900" dirty="0">
+                <a:solidFill>
+                  <a:srgbClr val="C9BBA4"/>
+                </a:solidFill>
+                <a:latin typeface="Apple SD Gothic Neo" pitchFamily="34" charset="0"/>
+                <a:ea typeface="Apple SD Gothic Neo" pitchFamily="34" charset="-122"/>
+                <a:cs typeface="Apple SD Gothic Neo" pitchFamily="34" charset="-120"/>
+              </a:rPr>
+              <a:t>  ↔  </a:t>
+            </a:r>
+            <a:pPr indent="0" marL="0">
+              <a:buNone/>
+            </a:pPr>
+            <a:r>
+              <a:rPr lang="en-US" sz="900" b="1" dirty="0">
+                <a:solidFill>
+                  <a:srgbClr val="E2611F"/>
+                </a:solidFill>
+                <a:latin typeface="Apple SD Gothic Neo" pitchFamily="34" charset="0"/>
+                <a:ea typeface="Apple SD Gothic Neo" pitchFamily="34" charset="-122"/>
+                <a:cs typeface="Apple SD Gothic Neo" pitchFamily="34" charset="-120"/>
+              </a:rPr>
+              <a:t>전국추적 w</a:t>
+            </a:r>
+            <a:endParaRPr lang="en-US" sz="900" dirty="0"/>
+          </a:p>
+        </p:txBody>
+      </p:sp>
+      <p:sp>
+        <p:nvSpPr>
+          <p:cNvPr id="29" name="Text 27"/>
+          <p:cNvSpPr/>
+          <p:nvPr/>
+        </p:nvSpPr>
+        <p:spPr>
+          <a:xfrm>
+            <a:off x="3255264" y="3520440"/>
+            <a:ext cx="658368" cy="457200"/>
+          </a:xfrm>
+          <a:prstGeom prst="rect">
+            <a:avLst/>
+          </a:prstGeom>
+          <a:noFill/>
+          <a:ln/>
+        </p:spPr>
+        <p:txBody>
+          <a:bodyPr wrap="square" lIns="0" tIns="0" rIns="0" bIns="0" rtlCol="0" anchor="ctr"/>
+          <a:lstStyle/>
+          <a:p>
+            <a:pPr indent="0" marL="0">
+              <a:buNone/>
+            </a:pPr>
+            <a:r>
+              <a:rPr lang="en-US" sz="860" b="1" dirty="0">
+                <a:solidFill>
+                  <a:srgbClr val="6E6A75"/>
+                </a:solidFill>
+                <a:latin typeface="Apple SD Gothic Neo" pitchFamily="34" charset="0"/>
+                <a:ea typeface="Apple SD Gothic Neo" pitchFamily="34" charset="-122"/>
+                <a:cs typeface="Apple SD Gothic Neo" pitchFamily="34" charset="-120"/>
+              </a:rPr>
+              <a:t>용도</a:t>
+            </a:r>
+            <a:endParaRPr lang="en-US" sz="860" dirty="0"/>
+          </a:p>
+        </p:txBody>
+      </p:sp>
+      <p:sp>
+        <p:nvSpPr>
+          <p:cNvPr id="30" name="Text 28"/>
+          <p:cNvSpPr/>
+          <p:nvPr/>
+        </p:nvSpPr>
+        <p:spPr>
+          <a:xfrm>
+            <a:off x="3877056" y="3520440"/>
+            <a:ext cx="1444752" cy="457200"/>
+          </a:xfrm>
+          <a:prstGeom prst="rect">
+            <a:avLst/>
+          </a:prstGeom>
+          <a:noFill/>
+          <a:ln/>
+        </p:spPr>
+        <p:txBody>
+          <a:bodyPr wrap="square" lIns="0" tIns="0" rIns="0" bIns="0" rtlCol="0" anchor="ctr"/>
+          <a:lstStyle/>
+          <a:p>
+            <a:pPr indent="0" marL="0">
+              <a:buNone/>
+            </a:pPr>
+            <a:r>
+              <a:rPr lang="en-US" sz="900" b="1" dirty="0">
+                <a:solidFill>
+                  <a:srgbClr val="1C2B4A"/>
+                </a:solidFill>
+                <a:latin typeface="Apple SD Gothic Neo" pitchFamily="34" charset="0"/>
+                <a:ea typeface="Apple SD Gothic Neo" pitchFamily="34" charset="-122"/>
+                <a:cs typeface="Apple SD Gothic Neo" pitchFamily="34" charset="-120"/>
+              </a:rPr>
+              <a:t>실수요 r</a:t>
+            </a:r>
+            <a:pPr indent="0" marL="0">
+              <a:buNone/>
+            </a:pPr>
+            <a:r>
+              <a:rPr lang="en-US" sz="900" dirty="0">
+                <a:solidFill>
+                  <a:srgbClr val="C9BBA4"/>
+                </a:solidFill>
+                <a:latin typeface="Apple SD Gothic Neo" pitchFamily="34" charset="0"/>
+                <a:ea typeface="Apple SD Gothic Neo" pitchFamily="34" charset="-122"/>
+                <a:cs typeface="Apple SD Gothic Neo" pitchFamily="34" charset="-120"/>
+              </a:rPr>
+              <a:t>  ↔  </a:t>
+            </a:r>
+            <a:pPr indent="0" marL="0">
+              <a:buNone/>
+            </a:pPr>
+            <a:r>
+              <a:rPr lang="en-US" sz="900" b="1" dirty="0">
+                <a:solidFill>
+                  <a:srgbClr val="E2611F"/>
+                </a:solidFill>
+                <a:latin typeface="Apple SD Gothic Neo" pitchFamily="34" charset="0"/>
+                <a:ea typeface="Apple SD Gothic Neo" pitchFamily="34" charset="-122"/>
+                <a:cs typeface="Apple SD Gothic Neo" pitchFamily="34" charset="-120"/>
+              </a:rPr>
+              <a:t>단기매각 f</a:t>
+            </a:r>
+            <a:endParaRPr lang="en-US" sz="900" dirty="0"/>
+          </a:p>
+        </p:txBody>
+      </p:sp>
+      <p:sp>
+        <p:nvSpPr>
+          <p:cNvPr id="31" name="Text 29"/>
+          <p:cNvSpPr/>
+          <p:nvPr/>
+        </p:nvSpPr>
+        <p:spPr>
+          <a:xfrm>
+            <a:off x="502920" y="4261104"/>
+            <a:ext cx="5394960" cy="274320"/>
+          </a:xfrm>
+          <a:prstGeom prst="rect">
+            <a:avLst/>
+          </a:prstGeom>
+          <a:noFill/>
+          <a:ln/>
+        </p:spPr>
+        <p:txBody>
+          <a:bodyPr wrap="square" lIns="0" tIns="0" rIns="0" bIns="0" rtlCol="0" anchor="ctr"/>
+          <a:lstStyle/>
+          <a:p>
+            <a:pPr indent="0" marL="0">
+              <a:buNone/>
+            </a:pPr>
+            <a:r>
+              <a:rPr lang="en-US" sz="1000" i="1" dirty="0">
+                <a:solidFill>
+                  <a:srgbClr val="6E6A75"/>
+                </a:solidFill>
+                <a:latin typeface="Apple SD Gothic Neo" pitchFamily="34" charset="0"/>
+                <a:ea typeface="Apple SD Gothic Neo" pitchFamily="34" charset="-122"/>
+                <a:cs typeface="Apple SD Gothic Neo" pitchFamily="34" charset="-120"/>
+              </a:rPr>
+              <a:t>4축 × 2극 × 2트랙(매매·경매) = 총 32유형</a:t>
+            </a:r>
+            <a:endParaRPr lang="en-US" sz="1000" dirty="0"/>
+          </a:p>
+        </p:txBody>
+      </p:sp>
+      <p:sp>
+        <p:nvSpPr>
+          <p:cNvPr id="32" name="Shape 30"/>
+          <p:cNvSpPr/>
+          <p:nvPr/>
+        </p:nvSpPr>
+        <p:spPr>
+          <a:xfrm>
+            <a:off x="5760720" y="1371600"/>
+            <a:ext cx="2880360" cy="3127248"/>
+          </a:xfrm>
+          <a:prstGeom prst="rect">
+            <a:avLst/>
+          </a:prstGeom>
+          <a:solidFill>
+            <a:srgbClr val="FFFFFF"/>
+          </a:solidFill>
+          <a:ln w="9525">
+            <a:solidFill>
+              <a:srgbClr val="E5DDD0"/>
+            </a:solidFill>
+            <a:prstDash val="solid"/>
+          </a:ln>
+          <a:effectLst>
+            <a:outerShdw sx="100000" sy="100000" kx="0" ky="0" algn="bl" rotWithShape="0" blurRad="88900" dist="25400" dir="8100000">
+              <a:srgbClr val="1C2B4A">
+                <a:alpha val="14000"/>
+              </a:srgbClr>
+            </a:outerShdw>
+          </a:effectLst>
+        </p:spPr>
+      </p:sp>
+      <p:sp>
+        <p:nvSpPr>
+          <p:cNvPr id="33" name="Shape 31"/>
+          <p:cNvSpPr/>
+          <p:nvPr/>
+        </p:nvSpPr>
+        <p:spPr>
+          <a:xfrm>
+            <a:off x="5760720" y="1371600"/>
+            <a:ext cx="64008" cy="3127248"/>
+          </a:xfrm>
+          <a:prstGeom prst="rect">
+            <a:avLst/>
+          </a:prstGeom>
+          <a:solidFill>
+            <a:srgbClr val="E2611F"/>
+          </a:solidFill>
+          <a:ln/>
+        </p:spPr>
+      </p:sp>
+      <p:sp>
+        <p:nvSpPr>
+          <p:cNvPr id="34" name="Text 32"/>
+          <p:cNvSpPr/>
+          <p:nvPr/>
+        </p:nvSpPr>
+        <p:spPr>
+          <a:xfrm>
+            <a:off x="5943600" y="1499616"/>
+            <a:ext cx="2560320" cy="274320"/>
+          </a:xfrm>
+          <a:prstGeom prst="rect">
+            <a:avLst/>
+          </a:prstGeom>
+          <a:noFill/>
+          <a:ln/>
+        </p:spPr>
+        <p:txBody>
+          <a:bodyPr wrap="square" lIns="0" tIns="0" rIns="0" bIns="0" rtlCol="0" anchor="ctr"/>
+          <a:lstStyle/>
+          <a:p>
+            <a:pPr indent="0" marL="0">
+              <a:buNone/>
+            </a:pPr>
+            <a:r>
+              <a:rPr lang="en-US" sz="1200" b="1" dirty="0">
+                <a:solidFill>
+                  <a:srgbClr val="E2611F"/>
+                </a:solidFill>
+                <a:latin typeface="Apple SD Gothic Neo" pitchFamily="34" charset="0"/>
+                <a:ea typeface="Apple SD Gothic Neo" pitchFamily="34" charset="-122"/>
+                <a:cs typeface="Apple SD Gothic Neo" pitchFamily="34" charset="-120"/>
+              </a:rPr>
               <a:t>이번 모듈에서 만드는 것</a:t>
             </a:r>
-            <a:endParaRPr lang="en-US" sz="1300" dirty="0"/>
-          </a:p>
-        </p:txBody>
-      </p:sp>
-      <p:sp>
-        <p:nvSpPr>
-          <p:cNvPr id="39" name="Text 37"/>
-          <p:cNvSpPr/>
-          <p:nvPr/>
-        </p:nvSpPr>
-        <p:spPr>
-          <a:xfrm>
-            <a:off x="5285232" y="1965960"/>
-            <a:ext cx="3200400" cy="2377440"/>
-          </a:xfrm>
-          <a:prstGeom prst="rect">
-            <a:avLst/>
-          </a:prstGeom>
-          <a:noFill/>
-          <a:ln/>
-        </p:spPr>
-        <p:txBody>
-          <a:bodyPr wrap="square" lIns="0" tIns="0" rIns="0" bIns="0" rtlCol="0" anchor="ctr"/>
-          <a:lstStyle/>
-          <a:p>
-            <a:pPr marL="101600" indent="-101600">
+            <a:endParaRPr lang="en-US" sz="1200" dirty="0"/>
+          </a:p>
+        </p:txBody>
+      </p:sp>
+      <p:sp>
+        <p:nvSpPr>
+          <p:cNvPr id="35" name="Text 33"/>
+          <p:cNvSpPr/>
+          <p:nvPr/>
+        </p:nvSpPr>
+        <p:spPr>
+          <a:xfrm>
+            <a:off x="5998464" y="1847088"/>
+            <a:ext cx="2487168" cy="2606040"/>
+          </a:xfrm>
+          <a:prstGeom prst="rect">
+            <a:avLst/>
+          </a:prstGeom>
+          <a:noFill/>
+          <a:ln/>
+        </p:spPr>
+        <p:txBody>
+          <a:bodyPr wrap="square" lIns="0" tIns="0" rIns="0" bIns="0" rtlCol="0" anchor="ctr"/>
+          <a:lstStyle/>
+          <a:p>
+            <a:pPr marL="88900" indent="-88900">
+              <a:lnSpc>
+                <a:spcPct val="112000"/>
+              </a:lnSpc>
               <a:spcAft>
-                <a:spcPts val="1000"/>
+                <a:spcPts val="800"/>
               </a:spcAft>
               <a:buSzPct val="100000"/>
               <a:buChar char="•"/>
             </a:pPr>
             <a:r>
-              <a:rPr lang="en-US" sz="1100" dirty="0">
+              <a:rPr lang="en-US" sz="900" dirty="0">
                 <a:solidFill>
                   <a:srgbClr val="26262E"/>
                 </a:solidFill>
@@ -36695,20 +36930,23 @@
                 <a:ea typeface="Apple SD Gothic Neo" pitchFamily="34" charset="-122"/>
                 <a:cs typeface="Apple SD Gothic Neo" pitchFamily="34" charset="-120"/>
               </a:rPr>
-              <a:t>AI에게 12문항 성향 설문 설계시키기</a:t>
-            </a:r>
-            <a:endParaRPr lang="en-US" sz="1100" dirty="0"/>
-          </a:p>
-          <a:p>
-            <a:pPr marL="101600" indent="-101600">
+              <a:t>AI에게 진단 문항·채점 엔진 설계시키기 (축별 점수 합산)</a:t>
+            </a:r>
+            <a:endParaRPr lang="en-US" sz="900" dirty="0"/>
+          </a:p>
+          <a:p>
+            <a:pPr marL="88900" indent="-88900">
+              <a:lnSpc>
+                <a:spcPct val="112000"/>
+              </a:lnSpc>
               <a:spcAft>
-                <a:spcPts val="1000"/>
+                <a:spcPts val="800"/>
               </a:spcAft>
               <a:buSzPct val="100000"/>
               <a:buChar char="•"/>
             </a:pPr>
             <a:r>
-              <a:rPr lang="en-US" sz="1100" dirty="0">
+              <a:rPr lang="en-US" sz="900" dirty="0">
                 <a:solidFill>
                   <a:srgbClr val="26262E"/>
                 </a:solidFill>
@@ -36716,20 +36954,23 @@
                 <a:ea typeface="Apple SD Gothic Neo" pitchFamily="34" charset="-122"/>
                 <a:cs typeface="Apple SD Gothic Neo" pitchFamily="34" charset="-120"/>
               </a:rPr>
-              <a:t>응답 → 16유형 자동 판정 로직</a:t>
-            </a:r>
-            <a:endParaRPr lang="en-US" sz="1100" dirty="0"/>
-          </a:p>
-          <a:p>
-            <a:pPr marL="101600" indent="-101600">
+              <a:t>유형 프로필 — 강점·약점·맹점, 적합 물건, 함정, 체크리스트</a:t>
+            </a:r>
+            <a:endParaRPr lang="en-US" sz="900" dirty="0"/>
+          </a:p>
+          <a:p>
+            <a:pPr marL="88900" indent="-88900">
+              <a:lnSpc>
+                <a:spcPct val="112000"/>
+              </a:lnSpc>
               <a:spcAft>
-                <a:spcPts val="1000"/>
+                <a:spcPts val="800"/>
               </a:spcAft>
               <a:buSzPct val="100000"/>
               <a:buChar char="•"/>
             </a:pPr>
             <a:r>
-              <a:rPr lang="en-US" sz="1100" dirty="0">
+              <a:rPr lang="en-US" sz="900" dirty="0">
                 <a:solidFill>
                   <a:srgbClr val="26262E"/>
                 </a:solidFill>
@@ -36737,20 +36978,23 @@
                 <a:ea typeface="Apple SD Gothic Neo" pitchFamily="34" charset="-122"/>
                 <a:cs typeface="Apple SD Gothic Neo" pitchFamily="34" charset="-120"/>
               </a:rPr>
-              <a:t>유형별 추천 전략 매핑 (예: 안정+현금흐름 → 소형 아파트 월세 세팅)</a:t>
-            </a:r>
-            <a:endParaRPr lang="en-US" sz="1100" dirty="0"/>
-          </a:p>
-          <a:p>
-            <a:pPr marL="101600" indent="-101600">
+              <a:t>규제 반영 (6·27/9·7/10·15 대책) — 보유수·규제지역별 대출·세금 경고</a:t>
+            </a:r>
+            <a:endParaRPr lang="en-US" sz="900" dirty="0"/>
+          </a:p>
+          <a:p>
+            <a:pPr marL="88900" indent="-88900">
+              <a:lnSpc>
+                <a:spcPct val="112000"/>
+              </a:lnSpc>
               <a:spcAft>
-                <a:spcPts val="1000"/>
+                <a:spcPts val="800"/>
               </a:spcAft>
               <a:buSzPct val="100000"/>
               <a:buChar char="•"/>
             </a:pPr>
             <a:r>
-              <a:rPr lang="en-US" sz="1100" dirty="0">
+              <a:rPr lang="en-US" sz="900" dirty="0">
                 <a:solidFill>
                   <a:srgbClr val="26262E"/>
                 </a:solidFill>
@@ -36758,15 +37002,15 @@
                 <a:ea typeface="Apple SD Gothic Neo" pitchFamily="34" charset="-122"/>
                 <a:cs typeface="Apple SD Gothic Neo" pitchFamily="34" charset="-120"/>
               </a:rPr>
-              <a:t>내 유형이 이후 모든 실습의 필터가 됩니다 — 검색 조건, 대시보드 지표, 입찰 기준까지</a:t>
-            </a:r>
-            <a:endParaRPr lang="en-US" sz="1100" dirty="0"/>
-          </a:p>
-        </p:txBody>
-      </p:sp>
-      <p:sp>
-        <p:nvSpPr>
-          <p:cNvPr id="40" name="Text 38"/>
+              <a:t>결과 → 법원경매 검색조건(JSON)으로 변환 → 모듈 03 크롤러 입력</a:t>
+            </a:r>
+            <a:endParaRPr lang="en-US" sz="900" dirty="0"/>
+          </a:p>
+        </p:txBody>
+      </p:sp>
+      <p:sp>
+        <p:nvSpPr>
+          <p:cNvPr id="36" name="Text 34"/>
           <p:cNvSpPr/>
           <p:nvPr/>
         </p:nvSpPr>
@@ -36805,7 +37049,7 @@
       </p:sp>
       <p:sp>
         <p:nvSpPr>
-          <p:cNvPr id="41" name="Text 39"/>
+          <p:cNvPr id="37" name="Text 35"/>
           <p:cNvSpPr/>
           <p:nvPr/>
         </p:nvSpPr>

--- a/docs/slides/AI부동산경매투자_강의슬라이드.pptx
+++ b/docs/slides/AI부동산경매투자_강의슬라이드.pptx
@@ -161,7 +161,9 @@
     <c:autoTitleDeleted val="1"/>
     <c:plotArea>
       <c:layout/>
-      <c:lineChart>
+      <c:barChart>
+        <c:barDir val="col"/>
+        <c:grouping val="clustered"/>
         <c:varyColors val="0"/>
         <c:ser>
           <c:idx val="0"/>
@@ -181,13 +183,6 @@
             <a:solidFill>
               <a:srgbClr val="E2611F"/>
             </a:solidFill>
-            <a:ln w="31750" cap="flat">
-              <a:solidFill>
-                <a:srgbClr val="E2611F"/>
-              </a:solidFill>
-              <a:prstDash val="solid"/>
-              <a:round/>
-            </a:ln>
             <a:effectLst/>
           </c:spPr>
           <c:invertIfNegative val="0"/>
@@ -215,46 +210,26 @@
             <c:showBubbleSize val="0"/>
             <c:showLeaderLines val="0"/>
           </c:dLbls>
-          <c:marker>
-            <c:symbol val="circle"/>
-            <c:size val="6"/>
-            <c:spPr>
-              <a:solidFill>
-                <a:srgbClr val="E2611F"/>
-              </a:solidFill>
-              <a:ln w="9525" cap="flat">
-                <a:solidFill>
-                  <a:srgbClr val="E2611F"/>
-                </a:solidFill>
-                <a:prstDash val="solid"/>
-                <a:round/>
-              </a:ln>
-              <a:effectLst/>
-            </c:spPr>
-          </c:marker>
           <c:cat>
             <c:multiLvlStrRef>
-              <c:f>Sheet1!$A$2:$A$7</c:f>
+              <c:f>Sheet1!$A$2:$A$6</c:f>
               <c:multiLvlStrCache>
-                <c:ptCount val="6"/>
+                <c:ptCount val="5"/>
                 <c:lvl>
                   <c:pt idx="0">
-                    <c:v>24.1Q</c:v>
+                    <c:v>101동</c:v>
                   </c:pt>
                   <c:pt idx="1">
-                    <c:v>24.3Q</c:v>
+                    <c:v>102동</c:v>
                   </c:pt>
                   <c:pt idx="2">
-                    <c:v>25.1Q</c:v>
+                    <c:v>103동</c:v>
                   </c:pt>
                   <c:pt idx="3">
-                    <c:v>25.3Q</c:v>
+                    <c:v>104동</c:v>
                   </c:pt>
                   <c:pt idx="4">
-                    <c:v>26.1Q</c:v>
-                  </c:pt>
-                  <c:pt idx="5">
-                    <c:v>26.2Q</c:v>
+                    <c:v>105동</c:v>
                   </c:pt>
                 </c:lvl>
               </c:multiLvlStrCache>
@@ -262,32 +237,28 @@
           </c:cat>
           <c:val>
             <c:numRef>
-              <c:f>Sheet1!$B$2:$B$7</c:f>
+              <c:f>Sheet1!$B$2:$B$6</c:f>
               <c:numCache>
                 <c:formatCode>General</c:formatCode>
-                <c:ptCount val="6"/>
+                <c:ptCount val="5"/>
                 <c:pt idx="0">
-                  <c:v>1480</c:v>
+                  <c:v>1620</c:v>
                 </c:pt>
                 <c:pt idx="1">
-                  <c:v>1445</c:v>
+                  <c:v>1585</c:v>
                 </c:pt>
                 <c:pt idx="2">
-                  <c:v>1510</c:v>
+                  <c:v>1710</c:v>
                 </c:pt>
                 <c:pt idx="3">
-                  <c:v>1585</c:v>
+                  <c:v>1540</c:v>
                 </c:pt>
                 <c:pt idx="4">
-                  <c:v>1660</c:v>
-                </c:pt>
-                <c:pt idx="5">
-                  <c:v>1695</c:v>
+                  <c:v>1668</c:v>
                 </c:pt>
               </c:numCache>
             </c:numRef>
           </c:val>
-          <c:smooth val="1"/>
         </c:ser>
         <c:dLbls>
           <c:numFmt formatCode="#,##0" sourceLinked="0"/>
@@ -313,11 +284,12 @@
           <c:showBubbleSize val="0"/>
           <c:showLeaderLines val="0"/>
         </c:dLbls>
-        <c:marker val="1"/>
+        <c:gapWidth val="150"/>
+        <c:overlap val="0"/>
         <c:axId val="2094734554"/>
         <c:axId val="2094734552"/>
         <c:axId val="2094734556"/>
-      </c:lineChart>
+      </c:barChart>
       <c:catAx>
         <c:axId val="2094734554"/>
         <c:scaling>
@@ -40826,7 +40798,7 @@
                 <a:ea typeface="Apple SD Gothic Neo" pitchFamily="34" charset="-122"/>
                 <a:cs typeface="Apple SD Gothic Neo" pitchFamily="34" charset="-120"/>
               </a:rPr>
-              <a:t>실거래가 API로 아파트 단지 분해하기</a:t>
+              <a:t>apt-value — 단지 하나의 가치 구조 분해</a:t>
             </a:r>
             <a:endParaRPr lang="en-US" sz="2700" dirty="0"/>
           </a:p>
@@ -40938,7 +40910,7 @@
         </p:nvSpPr>
         <p:spPr>
           <a:xfrm>
-            <a:off x="502920" y="1371600"/>
+            <a:off x="502920" y="1335024"/>
             <a:ext cx="3749040" cy="274320"/>
           </a:xfrm>
           <a:prstGeom prst="rect">
@@ -40955,7 +40927,7 @@
               <a:buNone/>
             </a:pPr>
             <a:r>
-              <a:rPr lang="en-US" sz="1250" b="1" dirty="0">
+              <a:rPr lang="en-US" sz="1150" b="1" dirty="0">
                 <a:solidFill>
                   <a:srgbClr val="1C2B4A"/>
                 </a:solidFill>
@@ -40963,9 +40935,9 @@
                 <a:ea typeface="Apple SD Gothic Neo" pitchFamily="34" charset="-122"/>
                 <a:cs typeface="Apple SD Gothic Neo" pitchFamily="34" charset="-120"/>
               </a:rPr>
-              <a:t>데이터 소스</a:t>
-            </a:r>
-            <a:endParaRPr lang="en-US" sz="1250" dirty="0"/>
+              <a:t>데이터 소스 (공공데이터포털)</a:t>
+            </a:r>
+            <a:endParaRPr lang="en-US" sz="1150" dirty="0"/>
           </a:p>
         </p:txBody>
       </p:sp>
@@ -40977,28 +40949,28 @@
         </p:nvSpPr>
         <p:spPr>
           <a:xfrm>
-            <a:off x="548640" y="1691640"/>
-            <a:ext cx="3749040" cy="822960"/>
-          </a:xfrm>
-          <a:prstGeom prst="rect">
-            <a:avLst/>
-          </a:prstGeom>
-          <a:noFill/>
-          <a:ln/>
-        </p:spPr>
-        <p:txBody>
-          <a:bodyPr wrap="square" lIns="0" tIns="0" rIns="0" bIns="0" rtlCol="0" anchor="ctr"/>
-          <a:lstStyle/>
-          <a:p>
-            <a:pPr marL="101600" indent="-101600">
+            <a:off x="548640" y="1627632"/>
+            <a:ext cx="3749040" cy="868680"/>
+          </a:xfrm>
+          <a:prstGeom prst="rect">
+            <a:avLst/>
+          </a:prstGeom>
+          <a:noFill/>
+          <a:ln/>
+        </p:spPr>
+        <p:txBody>
+          <a:bodyPr wrap="square" lIns="0" tIns="0" rIns="0" bIns="0" rtlCol="0" anchor="ctr"/>
+          <a:lstStyle/>
+          <a:p>
+            <a:pPr marL="88900" indent="-88900">
               <a:spcAft>
-                <a:spcPts val="800"/>
+                <a:spcPts val="600"/>
               </a:spcAft>
               <a:buSzPct val="100000"/>
               <a:buChar char="•"/>
             </a:pPr>
             <a:r>
-              <a:rPr lang="en-US" sz="1080" dirty="0">
+              <a:rPr lang="en-US" sz="980" dirty="0">
                 <a:solidFill>
                   <a:srgbClr val="26262E"/>
                 </a:solidFill>
@@ -41006,20 +40978,20 @@
                 <a:ea typeface="Apple SD Gothic Neo" pitchFamily="34" charset="-122"/>
                 <a:cs typeface="Apple SD Gothic Neo" pitchFamily="34" charset="-120"/>
               </a:rPr>
-              <a:t>국토교통부 실거래가 공개시스템 API — 매매 + 전월세</a:t>
-            </a:r>
-            <a:endParaRPr lang="en-US" sz="1080" dirty="0"/>
-          </a:p>
-          <a:p>
-            <a:pPr marL="101600" indent="-101600">
+              <a:t>국토부 실거래가 — 매매·전월세</a:t>
+            </a:r>
+            <a:endParaRPr lang="en-US" sz="980" dirty="0"/>
+          </a:p>
+          <a:p>
+            <a:pPr marL="88900" indent="-88900">
               <a:spcAft>
-                <a:spcPts val="800"/>
+                <a:spcPts val="600"/>
               </a:spcAft>
               <a:buSzPct val="100000"/>
               <a:buChar char="•"/>
             </a:pPr>
             <a:r>
-              <a:rPr lang="en-US" sz="1080" dirty="0">
+              <a:rPr lang="en-US" sz="980" dirty="0">
                 <a:solidFill>
                   <a:srgbClr val="26262E"/>
                 </a:solidFill>
@@ -41027,81 +40999,20 @@
                 <a:ea typeface="Apple SD Gothic Neo" pitchFamily="34" charset="-122"/>
                 <a:cs typeface="Apple SD Gothic Neo" pitchFamily="34" charset="-120"/>
               </a:rPr>
-              <a:t>공동주택 기본정보 — 세대수 · 동수 · 준공연도</a:t>
-            </a:r>
-            <a:endParaRPr lang="en-US" sz="1080" dirty="0"/>
-          </a:p>
-        </p:txBody>
-      </p:sp>
-      <p:sp>
-        <p:nvSpPr>
-          <p:cNvPr id="9" name="Text 7"/>
-          <p:cNvSpPr/>
-          <p:nvPr/>
-        </p:nvSpPr>
-        <p:spPr>
-          <a:xfrm>
-            <a:off x="502920" y="2651760"/>
-            <a:ext cx="3749040" cy="274320"/>
-          </a:xfrm>
-          <a:prstGeom prst="rect">
-            <a:avLst/>
-          </a:prstGeom>
-          <a:noFill/>
-          <a:ln/>
-        </p:spPr>
-        <p:txBody>
-          <a:bodyPr wrap="square" lIns="0" tIns="0" rIns="0" bIns="0" rtlCol="0" anchor="ctr"/>
-          <a:lstStyle/>
-          <a:p>
-            <a:pPr indent="0" marL="0">
-              <a:buNone/>
-            </a:pPr>
-            <a:r>
-              <a:rPr lang="en-US" sz="1250" b="1" dirty="0">
-                <a:solidFill>
-                  <a:srgbClr val="E2611F"/>
-                </a:solidFill>
-                <a:latin typeface="Apple SD Gothic Neo" pitchFamily="34" charset="0"/>
-                <a:ea typeface="Apple SD Gothic Neo" pitchFamily="34" charset="-122"/>
-                <a:cs typeface="Apple SD Gothic Neo" pitchFamily="34" charset="-120"/>
-              </a:rPr>
-              <a:t>이번 모듈에서 계산하는 것</a:t>
-            </a:r>
-            <a:endParaRPr lang="en-US" sz="1250" dirty="0"/>
-          </a:p>
-        </p:txBody>
-      </p:sp>
-      <p:sp>
-        <p:nvSpPr>
-          <p:cNvPr id="10" name="Text 8"/>
-          <p:cNvSpPr/>
-          <p:nvPr/>
-        </p:nvSpPr>
-        <p:spPr>
-          <a:xfrm>
-            <a:off x="548640" y="2971800"/>
-            <a:ext cx="3749040" cy="1463040"/>
-          </a:xfrm>
-          <a:prstGeom prst="rect">
-            <a:avLst/>
-          </a:prstGeom>
-          <a:noFill/>
-          <a:ln/>
-        </p:spPr>
-        <p:txBody>
-          <a:bodyPr wrap="square" lIns="0" tIns="0" rIns="0" bIns="0" rtlCol="0" anchor="ctr"/>
-          <a:lstStyle/>
-          <a:p>
-            <a:pPr marL="101600" indent="-101600">
+              <a:t>공동주택 기본정보(15058453) — 세대수·동수</a:t>
+            </a:r>
+            <a:endParaRPr lang="en-US" sz="980" dirty="0"/>
+          </a:p>
+          <a:p>
+            <a:pPr marL="88900" indent="-88900">
               <a:spcAft>
-                <a:spcPts val="800"/>
+                <a:spcPts val="600"/>
               </a:spcAft>
               <a:buSzPct val="100000"/>
               <a:buChar char="•"/>
             </a:pPr>
             <a:r>
-              <a:rPr lang="en-US" sz="1080" dirty="0">
+              <a:rPr lang="en-US" sz="980" dirty="0">
                 <a:solidFill>
                   <a:srgbClr val="26262E"/>
                 </a:solidFill>
@@ -41109,20 +41020,81 @@
                 <a:ea typeface="Apple SD Gothic Neo" pitchFamily="34" charset="-122"/>
                 <a:cs typeface="Apple SD Gothic Neo" pitchFamily="34" charset="-120"/>
               </a:rPr>
-              <a:t>평당가 추이 — 저점 대비 얼마나 올랐나</a:t>
-            </a:r>
-            <a:endParaRPr lang="en-US" sz="1080" dirty="0"/>
-          </a:p>
-          <a:p>
-            <a:pPr marL="101600" indent="-101600">
+              <a:t>단지 목록(15057332) — 단지명 → kaptCode</a:t>
+            </a:r>
+            <a:endParaRPr lang="en-US" sz="980" dirty="0"/>
+          </a:p>
+        </p:txBody>
+      </p:sp>
+      <p:sp>
+        <p:nvSpPr>
+          <p:cNvPr id="9" name="Text 7"/>
+          <p:cNvSpPr/>
+          <p:nvPr/>
+        </p:nvSpPr>
+        <p:spPr>
+          <a:xfrm>
+            <a:off x="502920" y="2578608"/>
+            <a:ext cx="3749040" cy="274320"/>
+          </a:xfrm>
+          <a:prstGeom prst="rect">
+            <a:avLst/>
+          </a:prstGeom>
+          <a:noFill/>
+          <a:ln/>
+        </p:spPr>
+        <p:txBody>
+          <a:bodyPr wrap="square" lIns="0" tIns="0" rIns="0" bIns="0" rtlCol="0" anchor="ctr"/>
+          <a:lstStyle/>
+          <a:p>
+            <a:pPr indent="0" marL="0">
+              <a:buNone/>
+            </a:pPr>
+            <a:r>
+              <a:rPr lang="en-US" sz="1150" b="1" dirty="0">
+                <a:solidFill>
+                  <a:srgbClr val="E2611F"/>
+                </a:solidFill>
+                <a:latin typeface="Apple SD Gothic Neo" pitchFamily="34" charset="0"/>
+                <a:ea typeface="Apple SD Gothic Neo" pitchFamily="34" charset="-122"/>
+                <a:cs typeface="Apple SD Gothic Neo" pitchFamily="34" charset="-120"/>
+              </a:rPr>
+              <a:t>단지를 이렇게 분해한다</a:t>
+            </a:r>
+            <a:endParaRPr lang="en-US" sz="1150" dirty="0"/>
+          </a:p>
+        </p:txBody>
+      </p:sp>
+      <p:sp>
+        <p:nvSpPr>
+          <p:cNvPr id="10" name="Text 8"/>
+          <p:cNvSpPr/>
+          <p:nvPr/>
+        </p:nvSpPr>
+        <p:spPr>
+          <a:xfrm>
+            <a:off x="548640" y="2871216"/>
+            <a:ext cx="3749040" cy="1143000"/>
+          </a:xfrm>
+          <a:prstGeom prst="rect">
+            <a:avLst/>
+          </a:prstGeom>
+          <a:noFill/>
+          <a:ln/>
+        </p:spPr>
+        <p:txBody>
+          <a:bodyPr wrap="square" lIns="0" tIns="0" rIns="0" bIns="0" rtlCol="0" anchor="ctr"/>
+          <a:lstStyle/>
+          <a:p>
+            <a:pPr marL="88900" indent="-88900">
               <a:spcAft>
-                <a:spcPts val="800"/>
+                <a:spcPts val="600"/>
               </a:spcAft>
               <a:buSzPct val="100000"/>
               <a:buChar char="•"/>
             </a:pPr>
             <a:r>
-              <a:rPr lang="en-US" sz="1080" dirty="0">
+              <a:rPr lang="en-US" sz="980" dirty="0">
                 <a:solidFill>
                   <a:srgbClr val="26262E"/>
                 </a:solidFill>
@@ -41130,20 +41102,20 @@
                 <a:ea typeface="Apple SD Gothic Neo" pitchFamily="34" charset="-122"/>
                 <a:cs typeface="Apple SD Gothic Neo" pitchFamily="34" charset="-120"/>
               </a:rPr>
-              <a:t>동별 · 층별 · 평형별 가격 차이</a:t>
-            </a:r>
-            <a:endParaRPr lang="en-US" sz="1080" dirty="0"/>
-          </a:p>
-          <a:p>
-            <a:pPr marL="101600" indent="-101600">
+              <a:t>단지 스펙 — 세대수·동수·준공연식</a:t>
+            </a:r>
+            <a:endParaRPr lang="en-US" sz="980" dirty="0"/>
+          </a:p>
+          <a:p>
+            <a:pPr marL="88900" indent="-88900">
               <a:spcAft>
-                <a:spcPts val="800"/>
+                <a:spcPts val="600"/>
               </a:spcAft>
               <a:buSzPct val="100000"/>
               <a:buChar char="•"/>
             </a:pPr>
             <a:r>
-              <a:rPr lang="en-US" sz="1080" dirty="0">
+              <a:rPr lang="en-US" sz="980" dirty="0">
                 <a:solidFill>
                   <a:srgbClr val="26262E"/>
                 </a:solidFill>
@@ -41151,20 +41123,20 @@
                 <a:ea typeface="Apple SD Gothic Neo" pitchFamily="34" charset="-122"/>
                 <a:cs typeface="Apple SD Gothic Neo" pitchFamily="34" charset="-120"/>
               </a:rPr>
-              <a:t>전세가율과 갭 — 실투자금 계산</a:t>
-            </a:r>
-            <a:endParaRPr lang="en-US" sz="1080" dirty="0"/>
-          </a:p>
-          <a:p>
-            <a:pPr marL="101600" indent="-101600">
+              <a:t>동별 가치 — 어느 동이 비싼가</a:t>
+            </a:r>
+            <a:endParaRPr lang="en-US" sz="980" dirty="0"/>
+          </a:p>
+          <a:p>
+            <a:pPr marL="88900" indent="-88900">
               <a:spcAft>
-                <a:spcPts val="800"/>
+                <a:spcPts val="600"/>
               </a:spcAft>
               <a:buSzPct val="100000"/>
               <a:buChar char="•"/>
             </a:pPr>
             <a:r>
-              <a:rPr lang="en-US" sz="1080" dirty="0">
+              <a:rPr lang="en-US" sz="980" dirty="0">
                 <a:solidFill>
                   <a:srgbClr val="26262E"/>
                 </a:solidFill>
@@ -41172,15 +41144,78 @@
                 <a:ea typeface="Apple SD Gothic Neo" pitchFamily="34" charset="-122"/>
                 <a:cs typeface="Apple SD Gothic Neo" pitchFamily="34" charset="-120"/>
               </a:rPr>
-              <a:t>감정가 vs 실거래 시세 교차 검증 (M03 연계)</a:t>
-            </a:r>
-            <a:endParaRPr lang="en-US" sz="1080" dirty="0"/>
-          </a:p>
-        </p:txBody>
-      </p:sp>
-      <p:sp>
-        <p:nvSpPr>
-          <p:cNvPr id="11" name="Shape 9"/>
+              <a:t>층별 프리미엄 — 저층 vs 로열층</a:t>
+            </a:r>
+            <a:endParaRPr lang="en-US" sz="980" dirty="0"/>
+          </a:p>
+          <a:p>
+            <a:pPr marL="88900" indent="-88900">
+              <a:spcAft>
+                <a:spcPts val="600"/>
+              </a:spcAft>
+              <a:buSzPct val="100000"/>
+              <a:buChar char="•"/>
+            </a:pPr>
+            <a:r>
+              <a:rPr lang="en-US" sz="980" dirty="0">
+                <a:solidFill>
+                  <a:srgbClr val="26262E"/>
+                </a:solidFill>
+                <a:latin typeface="Apple SD Gothic Neo" pitchFamily="34" charset="0"/>
+                <a:ea typeface="Apple SD Gothic Neo" pitchFamily="34" charset="-122"/>
+                <a:cs typeface="Apple SD Gothic Neo" pitchFamily="34" charset="-120"/>
+              </a:rPr>
+              <a:t>평형별 실거래 가격대 (59·84·전용 등)</a:t>
+            </a:r>
+            <a:endParaRPr lang="en-US" sz="980" dirty="0"/>
+          </a:p>
+        </p:txBody>
+      </p:sp>
+      <p:sp>
+        <p:nvSpPr>
+          <p:cNvPr id="11" name="Text 9"/>
+          <p:cNvSpPr/>
+          <p:nvPr/>
+        </p:nvSpPr>
+        <p:spPr>
+          <a:xfrm>
+            <a:off x="548640" y="4114800"/>
+            <a:ext cx="3794760" cy="457200"/>
+          </a:xfrm>
+          <a:prstGeom prst="rect">
+            <a:avLst/>
+          </a:prstGeom>
+          <a:noFill/>
+          <a:ln/>
+        </p:spPr>
+        <p:txBody>
+          <a:bodyPr wrap="square" lIns="0" tIns="0" rIns="0" bIns="0" rtlCol="0" anchor="ctr"/>
+          <a:lstStyle/>
+          <a:p>
+            <a:pPr indent="0" marL="0">
+              <a:lnSpc>
+                <a:spcPct val="115000"/>
+              </a:lnSpc>
+              <a:buNone/>
+            </a:pPr>
+            <a:r>
+              <a:rPr lang="en-US" sz="830" i="1" dirty="0">
+                <a:solidFill>
+                  <a:srgbClr val="6E6A75"/>
+                </a:solidFill>
+                <a:latin typeface="Apple SD Gothic Neo" pitchFamily="34" charset="0"/>
+                <a:ea typeface="Apple SD Gothic Neo" pitchFamily="34" charset="-122"/>
+                <a:cs typeface="Apple SD Gothic Neo" pitchFamily="34" charset="-120"/>
+              </a:rPr>
+              <a:t>동·층 프리미엄은 ‘평형 효과를 제거한 뒤’ 계산 — 향(방향)은 공공데이터에 없어 다루지 않음.</a:t>
+            </a:r>
+            <a:endParaRPr lang="en-US" sz="830" dirty="0"/>
+          </a:p>
+        </p:txBody>
+      </p:sp>
+      <p:sp>
+        <p:nvSpPr>
+          <p:cNvPr id="12" name="Shape 10"/>
           <p:cNvSpPr/>
           <p:nvPr/>
         </p:nvSpPr>
@@ -41212,13 +41247,13 @@
       </p:sp>
       <p:graphicFrame>
         <p:nvGraphicFramePr>
-          <p:cNvPr id="12" name="Chart 0" descr=""/>
+          <p:cNvPr id="13" name="Chart 0" descr=""/>
           <p:cNvGraphicFramePr/>
           <p:nvPr/>
         </p:nvGraphicFramePr>
         <p:xfrm>
           <a:off x="5029200" y="1572768"/>
-          <a:ext cx="3474720" cy="2514600"/>
+          <a:ext cx="3474720" cy="2487168"/>
         </p:xfrm>
         <a:graphic xmlns:a="http://schemas.openxmlformats.org/drawingml/2006/main">
           <a:graphicData uri="http://schemas.openxmlformats.org/drawingml/2006/chart">
@@ -41228,7 +41263,7 @@
       </p:graphicFrame>
       <p:sp>
         <p:nvSpPr>
-          <p:cNvPr id="13" name="Text 10"/>
+          <p:cNvPr id="14" name="Text 11"/>
           <p:cNvSpPr/>
           <p:nvPr/>
         </p:nvSpPr>
@@ -41259,7 +41294,7 @@
                 <a:ea typeface="Apple SD Gothic Neo" pitchFamily="34" charset="-122"/>
                 <a:cs typeface="Apple SD Gothic Neo" pitchFamily="34" charset="-120"/>
               </a:rPr>
-              <a:t>예시: ○○단지 84㎡ 평당가 추이 — 실습에서 직접 뽑아봅니다</a:t>
+              <a:t>예시: ○○단지 동별 평당가 — 같은 단지도 동마다 다릅니다</a:t>
             </a:r>
             <a:endParaRPr lang="en-US" sz="900" dirty="0"/>
           </a:p>
@@ -41267,7 +41302,7 @@
       </p:sp>
       <p:sp>
         <p:nvSpPr>
-          <p:cNvPr id="14" name="Text 11"/>
+          <p:cNvPr id="15" name="Text 12"/>
           <p:cNvSpPr/>
           <p:nvPr/>
         </p:nvSpPr>
@@ -41306,7 +41341,7 @@
       </p:sp>
       <p:sp>
         <p:nvSpPr>
-          <p:cNvPr id="15" name="Text 12"/>
+          <p:cNvPr id="16" name="Text 13"/>
           <p:cNvSpPr/>
           <p:nvPr/>
         </p:nvSpPr>
@@ -43080,7 +43115,7 @@
                 <a:ea typeface="Apple SD Gothic Neo" pitchFamily="34" charset="-122"/>
                 <a:cs typeface="Apple SD Gothic Neo" pitchFamily="34" charset="-120"/>
               </a:rPr>
-              <a:t>지역분석 — 어디를 볼지 데이터로 정한다</a:t>
+              <a:t>realprice-flow — 한 지역의 시장 흐름 읽기</a:t>
             </a:r>
             <a:endParaRPr lang="en-US" sz="2700" dirty="0"/>
           </a:p>
@@ -43186,14 +43221,53 @@
       </p:sp>
       <p:sp>
         <p:nvSpPr>
-          <p:cNvPr id="7" name="Shape 5"/>
-          <p:cNvSpPr/>
-          <p:nvPr/>
-        </p:nvSpPr>
-        <p:spPr>
-          <a:xfrm>
-            <a:off x="502920" y="1371600"/>
-            <a:ext cx="3931920" cy="1170432"/>
+          <p:cNvPr id="7" name="Text 5"/>
+          <p:cNvSpPr/>
+          <p:nvPr/>
+        </p:nvSpPr>
+        <p:spPr>
+          <a:xfrm>
+            <a:off x="502920" y="1225296"/>
+            <a:ext cx="8138160" cy="274320"/>
+          </a:xfrm>
+          <a:prstGeom prst="rect">
+            <a:avLst/>
+          </a:prstGeom>
+          <a:noFill/>
+          <a:ln/>
+        </p:spPr>
+        <p:txBody>
+          <a:bodyPr wrap="square" lIns="0" tIns="0" rIns="0" bIns="0" rtlCol="0" anchor="ctr"/>
+          <a:lstStyle/>
+          <a:p>
+            <a:pPr indent="0" marL="0">
+              <a:buNone/>
+            </a:pPr>
+            <a:r>
+              <a:rPr lang="en-US" sz="1100" dirty="0">
+                <a:solidFill>
+                  <a:srgbClr val="26262E"/>
+                </a:solidFill>
+                <a:latin typeface="Apple SD Gothic Neo" pitchFamily="34" charset="0"/>
+                <a:ea typeface="Apple SD Gothic Neo" pitchFamily="34" charset="-122"/>
+                <a:cs typeface="Apple SD Gothic Neo" pitchFamily="34" charset="-120"/>
+              </a:rPr>
+              <a:t>국토부 실거래가를 여러 해치 모아 시군구 하나의 흐름을 계산합니다.</a:t>
+            </a:r>
+            <a:endParaRPr lang="en-US" sz="1100" dirty="0"/>
+          </a:p>
+        </p:txBody>
+      </p:sp>
+      <p:sp>
+        <p:nvSpPr>
+          <p:cNvPr id="8" name="Shape 6"/>
+          <p:cNvSpPr/>
+          <p:nvPr/>
+        </p:nvSpPr>
+        <p:spPr>
+          <a:xfrm>
+            <a:off x="502920" y="1572768"/>
+            <a:ext cx="3931920" cy="1097280"/>
           </a:xfrm>
           <a:prstGeom prst="rect">
             <a:avLst/>
@@ -43218,14 +43292,14 @@
       </p:sp>
       <p:sp>
         <p:nvSpPr>
-          <p:cNvPr id="8" name="Shape 6"/>
-          <p:cNvSpPr/>
-          <p:nvPr/>
-        </p:nvSpPr>
-        <p:spPr>
-          <a:xfrm>
-            <a:off x="502920" y="1371600"/>
-            <a:ext cx="64008" cy="1170432"/>
+          <p:cNvPr id="9" name="Shape 7"/>
+          <p:cNvSpPr/>
+          <p:nvPr/>
+        </p:nvSpPr>
+        <p:spPr>
+          <a:xfrm>
+            <a:off x="502920" y="1572768"/>
+            <a:ext cx="64008" cy="1097280"/>
           </a:xfrm>
           <a:prstGeom prst="rect">
             <a:avLst/>
@@ -43238,13 +43312,13 @@
       </p:sp>
       <p:sp>
         <p:nvSpPr>
-          <p:cNvPr id="9" name="Shape 7"/>
-          <p:cNvSpPr/>
-          <p:nvPr/>
-        </p:nvSpPr>
-        <p:spPr>
-          <a:xfrm>
-            <a:off x="685800" y="1536192"/>
+          <p:cNvPr id="10" name="Shape 8"/>
+          <p:cNvSpPr/>
+          <p:nvPr/>
+        </p:nvSpPr>
+        <p:spPr>
+          <a:xfrm>
+            <a:off x="685800" y="1728216"/>
             <a:ext cx="457200" cy="457200"/>
           </a:xfrm>
           <a:prstGeom prst="ellipse">
@@ -43258,7 +43332,7 @@
       </p:sp>
       <p:pic>
         <p:nvPicPr>
-          <p:cNvPr id="10" name="Image 0" descr="preencoded.png">    </p:cNvPr>
+          <p:cNvPr id="11" name="Image 0" descr="preencoded.png">    </p:cNvPr>
           <p:cNvPicPr>
             <a:picLocks noChangeAspect="1"/>
           </p:cNvPicPr>
@@ -43272,7 +43346,7 @@
         </p:blipFill>
         <p:spPr>
           <a:xfrm>
-            <a:off x="804672" y="1655064"/>
+            <a:off x="804672" y="1847088"/>
             <a:ext cx="219456" cy="219456"/>
           </a:xfrm>
           <a:prstGeom prst="rect">
@@ -43282,13 +43356,13 @@
       </p:pic>
       <p:sp>
         <p:nvSpPr>
-          <p:cNvPr id="11" name="Text 8"/>
-          <p:cNvSpPr/>
-          <p:nvPr/>
-        </p:nvSpPr>
-        <p:spPr>
-          <a:xfrm>
-            <a:off x="1280160" y="1499616"/>
+          <p:cNvPr id="12" name="Text 9"/>
+          <p:cNvSpPr/>
+          <p:nvPr/>
+        </p:nvSpPr>
+        <p:spPr>
+          <a:xfrm>
+            <a:off x="1280160" y="1691640"/>
             <a:ext cx="3017520" cy="320040"/>
           </a:xfrm>
           <a:prstGeom prst="rect">
@@ -43305,7 +43379,7 @@
               <a:buNone/>
             </a:pPr>
             <a:r>
-              <a:rPr lang="en-US" sz="1250" b="1" dirty="0">
+              <a:rPr lang="en-US" sz="1200" b="1" dirty="0">
                 <a:solidFill>
                   <a:srgbClr val="26262E"/>
                 </a:solidFill>
@@ -43313,22 +43387,22 @@
                 <a:ea typeface="Apple SD Gothic Neo" pitchFamily="34" charset="-122"/>
                 <a:cs typeface="Apple SD Gothic Neo" pitchFamily="34" charset="-120"/>
               </a:rPr>
-              <a:t>공급 물량</a:t>
-            </a:r>
-            <a:endParaRPr lang="en-US" sz="1250" dirty="0"/>
-          </a:p>
-        </p:txBody>
-      </p:sp>
-      <p:sp>
-        <p:nvSpPr>
-          <p:cNvPr id="12" name="Text 9"/>
-          <p:cNvSpPr/>
-          <p:nvPr/>
-        </p:nvSpPr>
-        <p:spPr>
-          <a:xfrm>
-            <a:off x="1280160" y="1828800"/>
-            <a:ext cx="2971800" cy="621792"/>
+              <a:t>평당가 추이</a:t>
+            </a:r>
+            <a:endParaRPr lang="en-US" sz="1200" dirty="0"/>
+          </a:p>
+        </p:txBody>
+      </p:sp>
+      <p:sp>
+        <p:nvSpPr>
+          <p:cNvPr id="13" name="Text 10"/>
+          <p:cNvSpPr/>
+          <p:nvPr/>
+        </p:nvSpPr>
+        <p:spPr>
+          <a:xfrm>
+            <a:off x="1280160" y="2011680"/>
+            <a:ext cx="2971800" cy="566928"/>
           </a:xfrm>
           <a:prstGeom prst="rect">
             <a:avLst/>
@@ -43347,7 +43421,7 @@
               <a:buNone/>
             </a:pPr>
             <a:r>
-              <a:rPr lang="en-US" sz="980" dirty="0">
+              <a:rPr lang="en-US" sz="930" dirty="0">
                 <a:solidFill>
                   <a:srgbClr val="6E6A75"/>
                 </a:solidFill>
@@ -43355,22 +43429,22 @@
                 <a:ea typeface="Apple SD Gothic Neo" pitchFamily="34" charset="-122"/>
                 <a:cs typeface="Apple SD Gothic Neo" pitchFamily="34" charset="-120"/>
               </a:rPr>
-              <a:t>입주 예정 물량이 몰리는 시점 = 전세가 하락 · 가격 조정 가능성</a:t>
-            </a:r>
-            <a:endParaRPr lang="en-US" sz="980" dirty="0"/>
-          </a:p>
-        </p:txBody>
-      </p:sp>
-      <p:sp>
-        <p:nvSpPr>
-          <p:cNvPr id="13" name="Shape 10"/>
-          <p:cNvSpPr/>
-          <p:nvPr/>
-        </p:nvSpPr>
-        <p:spPr>
-          <a:xfrm>
-            <a:off x="4709160" y="1371600"/>
-            <a:ext cx="3931920" cy="1170432"/>
+              <a:t>월별 중앙값 + 3개월 이동중앙값 — 저점 대비 상승률</a:t>
+            </a:r>
+            <a:endParaRPr lang="en-US" sz="930" dirty="0"/>
+          </a:p>
+        </p:txBody>
+      </p:sp>
+      <p:sp>
+        <p:nvSpPr>
+          <p:cNvPr id="14" name="Shape 11"/>
+          <p:cNvSpPr/>
+          <p:nvPr/>
+        </p:nvSpPr>
+        <p:spPr>
+          <a:xfrm>
+            <a:off x="4709160" y="1572768"/>
+            <a:ext cx="3931920" cy="1097280"/>
           </a:xfrm>
           <a:prstGeom prst="rect">
             <a:avLst/>
@@ -43395,14 +43469,14 @@
       </p:sp>
       <p:sp>
         <p:nvSpPr>
-          <p:cNvPr id="14" name="Shape 11"/>
-          <p:cNvSpPr/>
-          <p:nvPr/>
-        </p:nvSpPr>
-        <p:spPr>
-          <a:xfrm>
-            <a:off x="4709160" y="1371600"/>
-            <a:ext cx="64008" cy="1170432"/>
+          <p:cNvPr id="15" name="Shape 12"/>
+          <p:cNvSpPr/>
+          <p:nvPr/>
+        </p:nvSpPr>
+        <p:spPr>
+          <a:xfrm>
+            <a:off x="4709160" y="1572768"/>
+            <a:ext cx="64008" cy="1097280"/>
           </a:xfrm>
           <a:prstGeom prst="rect">
             <a:avLst/>
@@ -43415,13 +43489,13 @@
       </p:sp>
       <p:sp>
         <p:nvSpPr>
-          <p:cNvPr id="15" name="Shape 12"/>
-          <p:cNvSpPr/>
-          <p:nvPr/>
-        </p:nvSpPr>
-        <p:spPr>
-          <a:xfrm>
-            <a:off x="4892040" y="1536192"/>
+          <p:cNvPr id="16" name="Shape 13"/>
+          <p:cNvSpPr/>
+          <p:nvPr/>
+        </p:nvSpPr>
+        <p:spPr>
+          <a:xfrm>
+            <a:off x="4892040" y="1728216"/>
             <a:ext cx="457200" cy="457200"/>
           </a:xfrm>
           <a:prstGeom prst="ellipse">
@@ -43435,7 +43509,7 @@
       </p:sp>
       <p:pic>
         <p:nvPicPr>
-          <p:cNvPr id="16" name="Image 1" descr="preencoded.png">    </p:cNvPr>
+          <p:cNvPr id="17" name="Image 1" descr="preencoded.png">    </p:cNvPr>
           <p:cNvPicPr>
             <a:picLocks noChangeAspect="1"/>
           </p:cNvPicPr>
@@ -43449,7 +43523,7 @@
         </p:blipFill>
         <p:spPr>
           <a:xfrm>
-            <a:off x="5010912" y="1655064"/>
+            <a:off x="5010912" y="1847088"/>
             <a:ext cx="219456" cy="219456"/>
           </a:xfrm>
           <a:prstGeom prst="rect">
@@ -43459,13 +43533,13 @@
       </p:pic>
       <p:sp>
         <p:nvSpPr>
-          <p:cNvPr id="17" name="Text 13"/>
-          <p:cNvSpPr/>
-          <p:nvPr/>
-        </p:nvSpPr>
-        <p:spPr>
-          <a:xfrm>
-            <a:off x="5486400" y="1499616"/>
+          <p:cNvPr id="18" name="Text 14"/>
+          <p:cNvSpPr/>
+          <p:nvPr/>
+        </p:nvSpPr>
+        <p:spPr>
+          <a:xfrm>
+            <a:off x="5486400" y="1691640"/>
             <a:ext cx="3017520" cy="320040"/>
           </a:xfrm>
           <a:prstGeom prst="rect">
@@ -43482,7 +43556,7 @@
               <a:buNone/>
             </a:pPr>
             <a:r>
-              <a:rPr lang="en-US" sz="1250" b="1" dirty="0">
+              <a:rPr lang="en-US" sz="1200" b="1" dirty="0">
                 <a:solidFill>
                   <a:srgbClr val="26262E"/>
                 </a:solidFill>
@@ -43490,22 +43564,22 @@
                 <a:ea typeface="Apple SD Gothic Neo" pitchFamily="34" charset="-122"/>
                 <a:cs typeface="Apple SD Gothic Neo" pitchFamily="34" charset="-120"/>
               </a:rPr>
-              <a:t>미분양 추이</a:t>
-            </a:r>
-            <a:endParaRPr lang="en-US" sz="1250" dirty="0"/>
-          </a:p>
-        </p:txBody>
-      </p:sp>
-      <p:sp>
-        <p:nvSpPr>
-          <p:cNvPr id="18" name="Text 14"/>
-          <p:cNvSpPr/>
-          <p:nvPr/>
-        </p:nvSpPr>
-        <p:spPr>
-          <a:xfrm>
-            <a:off x="5486400" y="1828800"/>
-            <a:ext cx="2971800" cy="621792"/>
+              <a:t>전세가율 · 갭</a:t>
+            </a:r>
+            <a:endParaRPr lang="en-US" sz="1200" dirty="0"/>
+          </a:p>
+        </p:txBody>
+      </p:sp>
+      <p:sp>
+        <p:nvSpPr>
+          <p:cNvPr id="19" name="Text 15"/>
+          <p:cNvSpPr/>
+          <p:nvPr/>
+        </p:nvSpPr>
+        <p:spPr>
+          <a:xfrm>
+            <a:off x="5486400" y="2011680"/>
+            <a:ext cx="2971800" cy="566928"/>
           </a:xfrm>
           <a:prstGeom prst="rect">
             <a:avLst/>
@@ -43524,7 +43598,7 @@
               <a:buNone/>
             </a:pPr>
             <a:r>
-              <a:rPr lang="en-US" sz="980" dirty="0">
+              <a:rPr lang="en-US" sz="930" dirty="0">
                 <a:solidFill>
                   <a:srgbClr val="6E6A75"/>
                 </a:solidFill>
@@ -43532,22 +43606,22 @@
                 <a:ea typeface="Apple SD Gothic Neo" pitchFamily="34" charset="-122"/>
                 <a:cs typeface="Apple SD Gothic Neo" pitchFamily="34" charset="-120"/>
               </a:rPr>
-              <a:t>증가세면 경고, 감소 전환이면 바닥 신호로 해석되는 대표 지표</a:t>
-            </a:r>
-            <a:endParaRPr lang="en-US" sz="980" dirty="0"/>
-          </a:p>
-        </p:txBody>
-      </p:sp>
-      <p:sp>
-        <p:nvSpPr>
-          <p:cNvPr id="19" name="Shape 15"/>
-          <p:cNvSpPr/>
-          <p:nvPr/>
-        </p:nvSpPr>
-        <p:spPr>
-          <a:xfrm>
-            <a:off x="502920" y="2770632"/>
-            <a:ext cx="3931920" cy="1170432"/>
+              <a:t>매매/전세로 실투자금 계산, 갭 작은 단지 랭킹</a:t>
+            </a:r>
+            <a:endParaRPr lang="en-US" sz="930" dirty="0"/>
+          </a:p>
+        </p:txBody>
+      </p:sp>
+      <p:sp>
+        <p:nvSpPr>
+          <p:cNvPr id="20" name="Shape 16"/>
+          <p:cNvSpPr/>
+          <p:nvPr/>
+        </p:nvSpPr>
+        <p:spPr>
+          <a:xfrm>
+            <a:off x="502920" y="2871216"/>
+            <a:ext cx="3931920" cy="1097280"/>
           </a:xfrm>
           <a:prstGeom prst="rect">
             <a:avLst/>
@@ -43572,14 +43646,14 @@
       </p:sp>
       <p:sp>
         <p:nvSpPr>
-          <p:cNvPr id="20" name="Shape 16"/>
-          <p:cNvSpPr/>
-          <p:nvPr/>
-        </p:nvSpPr>
-        <p:spPr>
-          <a:xfrm>
-            <a:off x="502920" y="2770632"/>
-            <a:ext cx="64008" cy="1170432"/>
+          <p:cNvPr id="21" name="Shape 17"/>
+          <p:cNvSpPr/>
+          <p:nvPr/>
+        </p:nvSpPr>
+        <p:spPr>
+          <a:xfrm>
+            <a:off x="502920" y="2871216"/>
+            <a:ext cx="64008" cy="1097280"/>
           </a:xfrm>
           <a:prstGeom prst="rect">
             <a:avLst/>
@@ -43592,13 +43666,13 @@
       </p:sp>
       <p:sp>
         <p:nvSpPr>
-          <p:cNvPr id="21" name="Shape 17"/>
-          <p:cNvSpPr/>
-          <p:nvPr/>
-        </p:nvSpPr>
-        <p:spPr>
-          <a:xfrm>
-            <a:off x="685800" y="2935224"/>
+          <p:cNvPr id="22" name="Shape 18"/>
+          <p:cNvSpPr/>
+          <p:nvPr/>
+        </p:nvSpPr>
+        <p:spPr>
+          <a:xfrm>
+            <a:off x="685800" y="3026664"/>
             <a:ext cx="457200" cy="457200"/>
           </a:xfrm>
           <a:prstGeom prst="ellipse">
@@ -43612,7 +43686,7 @@
       </p:sp>
       <p:pic>
         <p:nvPicPr>
-          <p:cNvPr id="22" name="Image 2" descr="preencoded.png">    </p:cNvPr>
+          <p:cNvPr id="23" name="Image 2" descr="preencoded.png">    </p:cNvPr>
           <p:cNvPicPr>
             <a:picLocks noChangeAspect="1"/>
           </p:cNvPicPr>
@@ -43626,7 +43700,7 @@
         </p:blipFill>
         <p:spPr>
           <a:xfrm>
-            <a:off x="804672" y="3054096"/>
+            <a:off x="804672" y="3145536"/>
             <a:ext cx="219456" cy="219456"/>
           </a:xfrm>
           <a:prstGeom prst="rect">
@@ -43636,13 +43710,13 @@
       </p:pic>
       <p:sp>
         <p:nvSpPr>
-          <p:cNvPr id="23" name="Text 18"/>
-          <p:cNvSpPr/>
-          <p:nvPr/>
-        </p:nvSpPr>
-        <p:spPr>
-          <a:xfrm>
-            <a:off x="1280160" y="2898648"/>
+          <p:cNvPr id="24" name="Text 19"/>
+          <p:cNvSpPr/>
+          <p:nvPr/>
+        </p:nvSpPr>
+        <p:spPr>
+          <a:xfrm>
+            <a:off x="1280160" y="2990088"/>
             <a:ext cx="3017520" cy="320040"/>
           </a:xfrm>
           <a:prstGeom prst="rect">
@@ -43659,7 +43733,7 @@
               <a:buNone/>
             </a:pPr>
             <a:r>
-              <a:rPr lang="en-US" sz="1250" b="1" dirty="0">
+              <a:rPr lang="en-US" sz="1200" b="1" dirty="0">
                 <a:solidFill>
                   <a:srgbClr val="26262E"/>
                 </a:solidFill>
@@ -43667,22 +43741,22 @@
                 <a:ea typeface="Apple SD Gothic Neo" pitchFamily="34" charset="-122"/>
                 <a:cs typeface="Apple SD Gothic Neo" pitchFamily="34" charset="-120"/>
               </a:rPr>
-              <a:t>인구 · 세대 이동</a:t>
-            </a:r>
-            <a:endParaRPr lang="en-US" sz="1250" dirty="0"/>
-          </a:p>
-        </p:txBody>
-      </p:sp>
-      <p:sp>
-        <p:nvSpPr>
-          <p:cNvPr id="24" name="Text 19"/>
-          <p:cNvSpPr/>
-          <p:nvPr/>
-        </p:nvSpPr>
-        <p:spPr>
-          <a:xfrm>
-            <a:off x="1280160" y="3227832"/>
-            <a:ext cx="2971800" cy="621792"/>
+              <a:t>동네별 · 평형/연식별</a:t>
+            </a:r>
+            <a:endParaRPr lang="en-US" sz="1200" dirty="0"/>
+          </a:p>
+        </p:txBody>
+      </p:sp>
+      <p:sp>
+        <p:nvSpPr>
+          <p:cNvPr id="25" name="Text 20"/>
+          <p:cNvSpPr/>
+          <p:nvPr/>
+        </p:nvSpPr>
+        <p:spPr>
+          <a:xfrm>
+            <a:off x="1280160" y="3310128"/>
+            <a:ext cx="2971800" cy="566928"/>
           </a:xfrm>
           <a:prstGeom prst="rect">
             <a:avLst/>
@@ -43701,7 +43775,7 @@
               <a:buNone/>
             </a:pPr>
             <a:r>
-              <a:rPr lang="en-US" sz="980" dirty="0">
+              <a:rPr lang="en-US" sz="930" dirty="0">
                 <a:solidFill>
                   <a:srgbClr val="6E6A75"/>
                 </a:solidFill>
@@ -43709,22 +43783,22 @@
                 <a:ea typeface="Apple SD Gothic Neo" pitchFamily="34" charset="-122"/>
                 <a:cs typeface="Apple SD Gothic Neo" pitchFamily="34" charset="-120"/>
               </a:rPr>
-              <a:t>전입이 꾸준한 지역인가 — 수요의 방향을 보여주는 근본 지표</a:t>
-            </a:r>
-            <a:endParaRPr lang="en-US" sz="980" dirty="0"/>
-          </a:p>
-        </p:txBody>
-      </p:sp>
-      <p:sp>
-        <p:nvSpPr>
-          <p:cNvPr id="25" name="Shape 20"/>
-          <p:cNvSpPr/>
-          <p:nvPr/>
-        </p:nvSpPr>
-        <p:spPr>
-          <a:xfrm>
-            <a:off x="4709160" y="2770632"/>
-            <a:ext cx="3931920" cy="1170432"/>
+              <a:t>구 안에서 어디가·어떤 평형이 더 올랐나</a:t>
+            </a:r>
+            <a:endParaRPr lang="en-US" sz="930" dirty="0"/>
+          </a:p>
+        </p:txBody>
+      </p:sp>
+      <p:sp>
+        <p:nvSpPr>
+          <p:cNvPr id="26" name="Shape 21"/>
+          <p:cNvSpPr/>
+          <p:nvPr/>
+        </p:nvSpPr>
+        <p:spPr>
+          <a:xfrm>
+            <a:off x="4709160" y="2871216"/>
+            <a:ext cx="3931920" cy="1097280"/>
           </a:xfrm>
           <a:prstGeom prst="rect">
             <a:avLst/>
@@ -43749,14 +43823,14 @@
       </p:sp>
       <p:sp>
         <p:nvSpPr>
-          <p:cNvPr id="26" name="Shape 21"/>
-          <p:cNvSpPr/>
-          <p:nvPr/>
-        </p:nvSpPr>
-        <p:spPr>
-          <a:xfrm>
-            <a:off x="4709160" y="2770632"/>
-            <a:ext cx="64008" cy="1170432"/>
+          <p:cNvPr id="27" name="Shape 22"/>
+          <p:cNvSpPr/>
+          <p:nvPr/>
+        </p:nvSpPr>
+        <p:spPr>
+          <a:xfrm>
+            <a:off x="4709160" y="2871216"/>
+            <a:ext cx="64008" cy="1097280"/>
           </a:xfrm>
           <a:prstGeom prst="rect">
             <a:avLst/>
@@ -43769,13 +43843,13 @@
       </p:sp>
       <p:sp>
         <p:nvSpPr>
-          <p:cNvPr id="27" name="Shape 22"/>
-          <p:cNvSpPr/>
-          <p:nvPr/>
-        </p:nvSpPr>
-        <p:spPr>
-          <a:xfrm>
-            <a:off x="4892040" y="2935224"/>
+          <p:cNvPr id="28" name="Shape 23"/>
+          <p:cNvSpPr/>
+          <p:nvPr/>
+        </p:nvSpPr>
+        <p:spPr>
+          <a:xfrm>
+            <a:off x="4892040" y="3026664"/>
             <a:ext cx="457200" cy="457200"/>
           </a:xfrm>
           <a:prstGeom prst="ellipse">
@@ -43789,7 +43863,7 @@
       </p:sp>
       <p:pic>
         <p:nvPicPr>
-          <p:cNvPr id="28" name="Image 3" descr="preencoded.png">    </p:cNvPr>
+          <p:cNvPr id="29" name="Image 3" descr="preencoded.png">    </p:cNvPr>
           <p:cNvPicPr>
             <a:picLocks noChangeAspect="1"/>
           </p:cNvPicPr>
@@ -43803,7 +43877,7 @@
         </p:blipFill>
         <p:spPr>
           <a:xfrm>
-            <a:off x="5010912" y="3054096"/>
+            <a:off x="5010912" y="3145536"/>
             <a:ext cx="219456" cy="219456"/>
           </a:xfrm>
           <a:prstGeom prst="rect">
@@ -43813,13 +43887,13 @@
       </p:pic>
       <p:sp>
         <p:nvSpPr>
-          <p:cNvPr id="29" name="Text 23"/>
-          <p:cNvSpPr/>
-          <p:nvPr/>
-        </p:nvSpPr>
-        <p:spPr>
-          <a:xfrm>
-            <a:off x="5486400" y="2898648"/>
+          <p:cNvPr id="30" name="Text 24"/>
+          <p:cNvSpPr/>
+          <p:nvPr/>
+        </p:nvSpPr>
+        <p:spPr>
+          <a:xfrm>
+            <a:off x="5486400" y="2990088"/>
             <a:ext cx="3017520" cy="320040"/>
           </a:xfrm>
           <a:prstGeom prst="rect">
@@ -43836,7 +43910,7 @@
               <a:buNone/>
             </a:pPr>
             <a:r>
-              <a:rPr lang="en-US" sz="1250" b="1" dirty="0">
+              <a:rPr lang="en-US" sz="1200" b="1" dirty="0">
                 <a:solidFill>
                   <a:srgbClr val="26262E"/>
                 </a:solidFill>
@@ -43844,22 +43918,22 @@
                 <a:ea typeface="Apple SD Gothic Neo" pitchFamily="34" charset="-122"/>
                 <a:cs typeface="Apple SD Gothic Neo" pitchFamily="34" charset="-120"/>
               </a:rPr>
-              <a:t>거래량 · 매물</a:t>
-            </a:r>
-            <a:endParaRPr lang="en-US" sz="1250" dirty="0"/>
-          </a:p>
-        </p:txBody>
-      </p:sp>
-      <p:sp>
-        <p:nvSpPr>
-          <p:cNvPr id="30" name="Text 24"/>
-          <p:cNvSpPr/>
-          <p:nvPr/>
-        </p:nvSpPr>
-        <p:spPr>
-          <a:xfrm>
-            <a:off x="5486400" y="3227832"/>
-            <a:ext cx="2971800" cy="621792"/>
+              <a:t>임대수익률 · 계약해제율</a:t>
+            </a:r>
+            <a:endParaRPr lang="en-US" sz="1200" dirty="0"/>
+          </a:p>
+        </p:txBody>
+      </p:sp>
+      <p:sp>
+        <p:nvSpPr>
+          <p:cNvPr id="31" name="Text 25"/>
+          <p:cNvSpPr/>
+          <p:nvPr/>
+        </p:nvSpPr>
+        <p:spPr>
+          <a:xfrm>
+            <a:off x="5486400" y="3310128"/>
+            <a:ext cx="2971800" cy="566928"/>
           </a:xfrm>
           <a:prstGeom prst="rect">
             <a:avLst/>
@@ -43878,15 +43952,94 @@
               <a:buNone/>
             </a:pPr>
             <a:r>
+              <a:rPr lang="en-US" sz="930" dirty="0">
+                <a:solidFill>
+                  <a:srgbClr val="6E6A75"/>
+                </a:solidFill>
+                <a:latin typeface="Apple SD Gothic Neo" pitchFamily="34" charset="0"/>
+                <a:ea typeface="Apple SD Gothic Neo" pitchFamily="34" charset="-122"/>
+                <a:cs typeface="Apple SD Gothic Neo" pitchFamily="34" charset="-120"/>
+              </a:rPr>
+              <a:t>월세 기준 수익률, 해제 급증 = 과열 신호</a:t>
+            </a:r>
+            <a:endParaRPr lang="en-US" sz="930" dirty="0"/>
+          </a:p>
+        </p:txBody>
+      </p:sp>
+      <p:sp>
+        <p:nvSpPr>
+          <p:cNvPr id="32" name="Shape 26"/>
+          <p:cNvSpPr/>
+          <p:nvPr/>
+        </p:nvSpPr>
+        <p:spPr>
+          <a:xfrm>
+            <a:off x="502920" y="4169664"/>
+            <a:ext cx="8138160" cy="566928"/>
+          </a:xfrm>
+          <a:prstGeom prst="rect">
+            <a:avLst/>
+          </a:prstGeom>
+          <a:solidFill>
+            <a:srgbClr val="1C2B4A"/>
+          </a:solidFill>
+          <a:ln/>
+        </p:spPr>
+      </p:sp>
+      <p:sp>
+        <p:nvSpPr>
+          <p:cNvPr id="33" name="Text 27"/>
+          <p:cNvSpPr/>
+          <p:nvPr/>
+        </p:nvSpPr>
+        <p:spPr>
+          <a:xfrm>
+            <a:off x="704088" y="4169664"/>
+            <a:ext cx="7772400" cy="566928"/>
+          </a:xfrm>
+          <a:prstGeom prst="rect">
+            <a:avLst/>
+          </a:prstGeom>
+          <a:noFill/>
+          <a:ln/>
+        </p:spPr>
+        <p:txBody>
+          <a:bodyPr wrap="square" lIns="0" tIns="0" rIns="0" bIns="0" rtlCol="0" anchor="ctr"/>
+          <a:lstStyle/>
+          <a:p>
+            <a:pPr indent="0" marL="0">
+              <a:lnSpc>
+                <a:spcPct val="115000"/>
+              </a:lnSpc>
+              <a:buNone/>
+            </a:pPr>
+            <a:r>
+              <a:rPr lang="en-US" sz="980" b="1" dirty="0">
+                <a:solidFill>
+                  <a:srgbClr val="FFB78A"/>
+                </a:solidFill>
+                <a:latin typeface="Apple SD Gothic Neo" pitchFamily="34" charset="0"/>
+                <a:ea typeface="Apple SD Gothic Neo" pitchFamily="34" charset="-122"/>
+                <a:cs typeface="Apple SD Gothic Neo" pitchFamily="34" charset="-120"/>
+              </a:rPr>
+              <a:t>산출물  </a:t>
+            </a:r>
+            <a:pPr indent="0" marL="0">
+              <a:lnSpc>
+                <a:spcPct val="115000"/>
+              </a:lnSpc>
+              <a:buNone/>
+            </a:pPr>
+            <a:r>
               <a:rPr lang="en-US" sz="980" dirty="0">
                 <a:solidFill>
-                  <a:srgbClr val="6E6A75"/>
-                </a:solidFill>
-                <a:latin typeface="Apple SD Gothic Neo" pitchFamily="34" charset="0"/>
-                <a:ea typeface="Apple SD Gothic Neo" pitchFamily="34" charset="-122"/>
-                <a:cs typeface="Apple SD Gothic Neo" pitchFamily="34" charset="-120"/>
-              </a:rPr>
-              <a:t>거래량 급증 + 매물 감소 조합은 시장 전환의 조기 신호</a:t>
+                  <a:srgbClr val="FFFFFF"/>
+                </a:solidFill>
+                <a:latin typeface="Apple SD Gothic Neo" pitchFamily="34" charset="0"/>
+                <a:ea typeface="Apple SD Gothic Neo" pitchFamily="34" charset="-122"/>
+                <a:cs typeface="Apple SD Gothic Neo" pitchFamily="34" charset="-120"/>
+              </a:rPr>
+              <a:t>크림+오렌지 톤 HTML 리포트 — 상승률은 첫/마지막 6개월 평균으로, ‘중앙값 기반·참고용’ 한계 명시. 내 성향(M02)과 결합해 타깃 지역 확정.</a:t>
             </a:r>
             <a:endParaRPr lang="en-US" sz="980" dirty="0"/>
           </a:p>
@@ -43894,80 +44047,7 @@
       </p:sp>
       <p:sp>
         <p:nvSpPr>
-          <p:cNvPr id="31" name="Shape 25"/>
-          <p:cNvSpPr/>
-          <p:nvPr/>
-        </p:nvSpPr>
-        <p:spPr>
-          <a:xfrm>
-            <a:off x="502920" y="4041648"/>
-            <a:ext cx="8138160" cy="512064"/>
-          </a:xfrm>
-          <a:prstGeom prst="rect">
-            <a:avLst/>
-          </a:prstGeom>
-          <a:solidFill>
-            <a:srgbClr val="1C2B4A"/>
-          </a:solidFill>
-          <a:ln/>
-        </p:spPr>
-      </p:sp>
-      <p:sp>
-        <p:nvSpPr>
-          <p:cNvPr id="32" name="Text 26"/>
-          <p:cNvSpPr/>
-          <p:nvPr/>
-        </p:nvSpPr>
-        <p:spPr>
-          <a:xfrm>
-            <a:off x="731520" y="4041648"/>
-            <a:ext cx="7680960" cy="512064"/>
-          </a:xfrm>
-          <a:prstGeom prst="rect">
-            <a:avLst/>
-          </a:prstGeom>
-          <a:noFill/>
-          <a:ln/>
-        </p:spPr>
-        <p:txBody>
-          <a:bodyPr wrap="square" lIns="0" tIns="0" rIns="0" bIns="0" rtlCol="0" anchor="ctr"/>
-          <a:lstStyle/>
-          <a:p>
-            <a:pPr indent="0" marL="0">
-              <a:buNone/>
-            </a:pPr>
-            <a:r>
-              <a:rPr lang="en-US" sz="1150" b="1" dirty="0">
-                <a:solidFill>
-                  <a:srgbClr val="FFB78A"/>
-                </a:solidFill>
-                <a:latin typeface="Apple SD Gothic Neo" pitchFamily="34" charset="0"/>
-                <a:ea typeface="Apple SD Gothic Neo" pitchFamily="34" charset="-122"/>
-                <a:cs typeface="Apple SD Gothic Neo" pitchFamily="34" charset="-120"/>
-              </a:rPr>
-              <a:t>실습 산출물  </a:t>
-            </a:r>
-            <a:pPr indent="0" marL="0">
-              <a:buNone/>
-            </a:pPr>
-            <a:r>
-              <a:rPr lang="en-US" sz="1150" dirty="0">
-                <a:solidFill>
-                  <a:srgbClr val="FFFFFF"/>
-                </a:solidFill>
-                <a:latin typeface="Apple SD Gothic Neo" pitchFamily="34" charset="0"/>
-                <a:ea typeface="Apple SD Gothic Neo" pitchFamily="34" charset="-122"/>
-                <a:cs typeface="Apple SD Gothic Neo" pitchFamily="34" charset="-120"/>
-              </a:rPr>
-              <a:t>후보 지역 3곳 비교 대시보드 → 내 성향(M02)과 결합해 타깃 지역 확정</a:t>
-            </a:r>
-            <a:endParaRPr lang="en-US" sz="1150" dirty="0"/>
-          </a:p>
-        </p:txBody>
-      </p:sp>
-      <p:sp>
-        <p:nvSpPr>
-          <p:cNvPr id="33" name="Text 27"/>
+          <p:cNvPr id="34" name="Text 28"/>
           <p:cNvSpPr/>
           <p:nvPr/>
         </p:nvSpPr>
@@ -44006,7 +44086,7 @@
       </p:sp>
       <p:sp>
         <p:nvSpPr>
-          <p:cNvPr id="34" name="Text 28"/>
+          <p:cNvPr id="35" name="Text 29"/>
           <p:cNvSpPr/>
           <p:nvPr/>
         </p:nvSpPr>

--- a/docs/slides/AI부동산경매투자_강의슬라이드.pptx
+++ b/docs/slides/AI부동산경매투자_강의슬라이드.pptx
@@ -35434,7 +35434,7 @@
         <p:spPr>
           <a:xfrm>
             <a:off x="5678424" y="3520440"/>
-            <a:ext cx="1289304" cy="420624"/>
+            <a:ext cx="1604772" cy="420624"/>
           </a:xfrm>
           <a:prstGeom prst="roundRect">
             <a:avLst>
@@ -35461,7 +35461,7 @@
         <p:spPr>
           <a:xfrm>
             <a:off x="5678424" y="3520440"/>
-            <a:ext cx="1289304" cy="420624"/>
+            <a:ext cx="1604772" cy="420624"/>
           </a:xfrm>
           <a:prstGeom prst="rect">
             <a:avLst/>
@@ -35499,7 +35499,7 @@
                 <a:ea typeface="Apple SD Gothic Neo" pitchFamily="34" charset="-122"/>
                 <a:cs typeface="Apple SD Gothic Neo" pitchFamily="34" charset="-120"/>
               </a:rPr>
-              <a:t>텔레그램 봇</a:t>
+              <a:t>뉴스·텔레그램 봇</a:t>
             </a:r>
             <a:endParaRPr lang="en-US" sz="1050" dirty="0"/>
           </a:p>
@@ -40388,7 +40388,7 @@
                 <a:ea typeface="Apple SD Gothic Neo" pitchFamily="34" charset="-122"/>
                 <a:cs typeface="Apple SD Gothic Neo" pitchFamily="34" charset="-120"/>
               </a:rPr>
-              <a:t>텔레그램으로 받아보고, 채팅으로 명령한다</a:t>
+              <a:t>auction_news — 매일 뉴스 브리핑 + 양방향 봇</a:t>
             </a:r>
             <a:endParaRPr lang="en-US" sz="2700" dirty="0"/>
           </a:p>
@@ -40500,8 +40500,8 @@
         </p:nvSpPr>
         <p:spPr>
           <a:xfrm>
-            <a:off x="502920" y="1481328"/>
-            <a:ext cx="402336" cy="402336"/>
+            <a:off x="502920" y="1463040"/>
+            <a:ext cx="365760" cy="365760"/>
           </a:xfrm>
           <a:prstGeom prst="ellipse">
             <a:avLst/>
@@ -40520,8 +40520,8 @@
         </p:nvSpPr>
         <p:spPr>
           <a:xfrm>
-            <a:off x="502920" y="1470355"/>
-            <a:ext cx="402336" cy="402336"/>
+            <a:off x="502920" y="1452067"/>
+            <a:ext cx="365760" cy="365760"/>
           </a:xfrm>
           <a:prstGeom prst="rect">
             <a:avLst/>
@@ -40537,7 +40537,7 @@
               <a:buNone/>
             </a:pPr>
             <a:r>
-              <a:rPr lang="en-US" sz="1300" b="1" dirty="0">
+              <a:rPr lang="en-US" sz="1200" b="1" dirty="0">
                 <a:solidFill>
                   <a:srgbClr val="FFFFFF"/>
                 </a:solidFill>
@@ -40547,7 +40547,7 @@
               </a:rPr>
               <a:t>1</a:t>
             </a:r>
-            <a:endParaRPr lang="en-US" sz="1300" dirty="0"/>
+            <a:endParaRPr lang="en-US" sz="1200" dirty="0"/>
           </a:p>
         </p:txBody>
       </p:sp>
@@ -40559,8 +40559,8 @@
         </p:nvSpPr>
         <p:spPr>
           <a:xfrm>
-            <a:off x="1051560" y="1453896"/>
-            <a:ext cx="3566160" cy="475488"/>
+            <a:off x="1014984" y="1444752"/>
+            <a:ext cx="3602736" cy="438912"/>
           </a:xfrm>
           <a:prstGeom prst="rect">
             <a:avLst/>
@@ -40584,8 +40584,8 @@
         </p:nvSpPr>
         <p:spPr>
           <a:xfrm>
-            <a:off x="1051560" y="1453896"/>
-            <a:ext cx="64008" cy="475488"/>
+            <a:off x="1014984" y="1444752"/>
+            <a:ext cx="64008" cy="438912"/>
           </a:xfrm>
           <a:prstGeom prst="rect">
             <a:avLst/>
@@ -40604,24 +40604,27 @@
         </p:nvSpPr>
         <p:spPr>
           <a:xfrm>
-            <a:off x="1252728" y="1453896"/>
-            <a:ext cx="3291840" cy="475488"/>
-          </a:xfrm>
-          <a:prstGeom prst="rect">
-            <a:avLst/>
-          </a:prstGeom>
-          <a:noFill/>
-          <a:ln/>
-        </p:spPr>
-        <p:txBody>
-          <a:bodyPr wrap="square" lIns="0" tIns="0" rIns="0" bIns="0" rtlCol="0" anchor="ctr"/>
-          <a:lstStyle/>
-          <a:p>
-            <a:pPr indent="0" marL="0">
-              <a:buNone/>
-            </a:pPr>
-            <a:r>
-              <a:rPr lang="en-US" sz="1080" dirty="0">
+            <a:off x="1197864" y="1444752"/>
+            <a:ext cx="3383280" cy="438912"/>
+          </a:xfrm>
+          <a:prstGeom prst="rect">
+            <a:avLst/>
+          </a:prstGeom>
+          <a:noFill/>
+          <a:ln/>
+        </p:spPr>
+        <p:txBody>
+          <a:bodyPr wrap="square" lIns="0" tIns="0" rIns="0" bIns="0" rtlCol="0" anchor="ctr"/>
+          <a:lstStyle/>
+          <a:p>
+            <a:pPr indent="0" marL="0">
+              <a:lnSpc>
+                <a:spcPct val="100000"/>
+              </a:lnSpc>
+              <a:buNone/>
+            </a:pPr>
+            <a:r>
+              <a:rPr lang="en-US" sz="930" dirty="0">
                 <a:solidFill>
                   <a:srgbClr val="26262E"/>
                 </a:solidFill>
@@ -40629,9 +40632,9 @@
                 <a:ea typeface="Apple SD Gothic Neo" pitchFamily="34" charset="-122"/>
                 <a:cs typeface="Apple SD Gothic Neo" pitchFamily="34" charset="-120"/>
               </a:rPr>
-              <a:t>매일 아침 스케줄러 실행</a:t>
-            </a:r>
-            <a:endParaRPr lang="en-US" sz="1080" dirty="0"/>
+              <a:t>평일 06:30 자동 실행 (cron)</a:t>
+            </a:r>
+            <a:endParaRPr lang="en-US" sz="930" dirty="0"/>
           </a:p>
         </p:txBody>
       </p:sp>
@@ -40643,8 +40646,8 @@
         </p:nvSpPr>
         <p:spPr>
           <a:xfrm>
-            <a:off x="704088" y="1883664"/>
-            <a:ext cx="0" cy="365760"/>
+            <a:off x="685800" y="1828800"/>
+            <a:ext cx="0" cy="219456"/>
           </a:xfrm>
           <a:prstGeom prst="line">
             <a:avLst/>
@@ -40666,8 +40669,8 @@
         </p:nvSpPr>
         <p:spPr>
           <a:xfrm>
-            <a:off x="502920" y="2249424"/>
-            <a:ext cx="402336" cy="402336"/>
+            <a:off x="502920" y="2066544"/>
+            <a:ext cx="365760" cy="365760"/>
           </a:xfrm>
           <a:prstGeom prst="ellipse">
             <a:avLst/>
@@ -40686,8 +40689,8 @@
         </p:nvSpPr>
         <p:spPr>
           <a:xfrm>
-            <a:off x="502920" y="2238451"/>
-            <a:ext cx="402336" cy="402336"/>
+            <a:off x="502920" y="2055571"/>
+            <a:ext cx="365760" cy="365760"/>
           </a:xfrm>
           <a:prstGeom prst="rect">
             <a:avLst/>
@@ -40703,7 +40706,7 @@
               <a:buNone/>
             </a:pPr>
             <a:r>
-              <a:rPr lang="en-US" sz="1300" b="1" dirty="0">
+              <a:rPr lang="en-US" sz="1200" b="1" dirty="0">
                 <a:solidFill>
                   <a:srgbClr val="FFFFFF"/>
                 </a:solidFill>
@@ -40713,7 +40716,7 @@
               </a:rPr>
               <a:t>2</a:t>
             </a:r>
-            <a:endParaRPr lang="en-US" sz="1300" dirty="0"/>
+            <a:endParaRPr lang="en-US" sz="1200" dirty="0"/>
           </a:p>
         </p:txBody>
       </p:sp>
@@ -40725,8 +40728,8 @@
         </p:nvSpPr>
         <p:spPr>
           <a:xfrm>
-            <a:off x="1051560" y="2221992"/>
-            <a:ext cx="3566160" cy="475488"/>
+            <a:off x="1014984" y="2048256"/>
+            <a:ext cx="3602736" cy="438912"/>
           </a:xfrm>
           <a:prstGeom prst="rect">
             <a:avLst/>
@@ -40750,8 +40753,8 @@
         </p:nvSpPr>
         <p:spPr>
           <a:xfrm>
-            <a:off x="1051560" y="2221992"/>
-            <a:ext cx="64008" cy="475488"/>
+            <a:off x="1014984" y="2048256"/>
+            <a:ext cx="64008" cy="438912"/>
           </a:xfrm>
           <a:prstGeom prst="rect">
             <a:avLst/>
@@ -40770,24 +40773,27 @@
         </p:nvSpPr>
         <p:spPr>
           <a:xfrm>
-            <a:off x="1252728" y="2221992"/>
-            <a:ext cx="3291840" cy="475488"/>
-          </a:xfrm>
-          <a:prstGeom prst="rect">
-            <a:avLst/>
-          </a:prstGeom>
-          <a:noFill/>
-          <a:ln/>
-        </p:spPr>
-        <p:txBody>
-          <a:bodyPr wrap="square" lIns="0" tIns="0" rIns="0" bIns="0" rtlCol="0" anchor="ctr"/>
-          <a:lstStyle/>
-          <a:p>
-            <a:pPr indent="0" marL="0">
-              <a:buNone/>
-            </a:pPr>
-            <a:r>
-              <a:rPr lang="en-US" sz="1080" dirty="0">
+            <a:off x="1197864" y="2048256"/>
+            <a:ext cx="3383280" cy="438912"/>
+          </a:xfrm>
+          <a:prstGeom prst="rect">
+            <a:avLst/>
+          </a:prstGeom>
+          <a:noFill/>
+          <a:ln/>
+        </p:spPr>
+        <p:txBody>
+          <a:bodyPr wrap="square" lIns="0" tIns="0" rIns="0" bIns="0" rtlCol="0" anchor="ctr"/>
+          <a:lstStyle/>
+          <a:p>
+            <a:pPr indent="0" marL="0">
+              <a:lnSpc>
+                <a:spcPct val="100000"/>
+              </a:lnSpc>
+              <a:buNone/>
+            </a:pPr>
+            <a:r>
+              <a:rPr lang="en-US" sz="930" dirty="0">
                 <a:solidFill>
                   <a:srgbClr val="26262E"/>
                 </a:solidFill>
@@ -40795,9 +40801,9 @@
                 <a:ea typeface="Apple SD Gothic Neo" pitchFamily="34" charset="-122"/>
                 <a:cs typeface="Apple SD Gothic Neo" pitchFamily="34" charset="-120"/>
               </a:rPr>
-              <a:t>크롤러가 신건 수집 · 관심조건 필터</a:t>
-            </a:r>
-            <a:endParaRPr lang="en-US" sz="1080" dirty="0"/>
+              <a:t>수집가 3명 병렬 — 정책·금리 / 시장·청약 / 경매·NPL</a:t>
+            </a:r>
+            <a:endParaRPr lang="en-US" sz="930" dirty="0"/>
           </a:p>
         </p:txBody>
       </p:sp>
@@ -40809,8 +40815,8 @@
         </p:nvSpPr>
         <p:spPr>
           <a:xfrm>
-            <a:off x="704088" y="2651760"/>
-            <a:ext cx="0" cy="365760"/>
+            <a:off x="685800" y="2432304"/>
+            <a:ext cx="0" cy="219456"/>
           </a:xfrm>
           <a:prstGeom prst="line">
             <a:avLst/>
@@ -40832,14 +40838,14 @@
         </p:nvSpPr>
         <p:spPr>
           <a:xfrm>
-            <a:off x="502920" y="3017520"/>
-            <a:ext cx="402336" cy="402336"/>
+            <a:off x="502920" y="2670048"/>
+            <a:ext cx="365760" cy="365760"/>
           </a:xfrm>
           <a:prstGeom prst="ellipse">
             <a:avLst/>
           </a:prstGeom>
           <a:solidFill>
-            <a:srgbClr val="E2611F"/>
+            <a:srgbClr val="1C2B4A"/>
           </a:solidFill>
           <a:ln/>
         </p:spPr>
@@ -40852,8 +40858,8 @@
         </p:nvSpPr>
         <p:spPr>
           <a:xfrm>
-            <a:off x="502920" y="3006547"/>
-            <a:ext cx="402336" cy="402336"/>
+            <a:off x="502920" y="2659075"/>
+            <a:ext cx="365760" cy="365760"/>
           </a:xfrm>
           <a:prstGeom prst="rect">
             <a:avLst/>
@@ -40869,7 +40875,7 @@
               <a:buNone/>
             </a:pPr>
             <a:r>
-              <a:rPr lang="en-US" sz="1300" b="1" dirty="0">
+              <a:rPr lang="en-US" sz="1200" b="1" dirty="0">
                 <a:solidFill>
                   <a:srgbClr val="FFFFFF"/>
                 </a:solidFill>
@@ -40879,7 +40885,7 @@
               </a:rPr>
               <a:t>3</a:t>
             </a:r>
-            <a:endParaRPr lang="en-US" sz="1300" dirty="0"/>
+            <a:endParaRPr lang="en-US" sz="1200" dirty="0"/>
           </a:p>
         </p:txBody>
       </p:sp>
@@ -40891,8 +40897,8 @@
         </p:nvSpPr>
         <p:spPr>
           <a:xfrm>
-            <a:off x="1051560" y="2990088"/>
-            <a:ext cx="3566160" cy="475488"/>
+            <a:off x="1014984" y="2651760"/>
+            <a:ext cx="3602736" cy="438912"/>
           </a:xfrm>
           <a:prstGeom prst="rect">
             <a:avLst/>
@@ -40916,14 +40922,14 @@
         </p:nvSpPr>
         <p:spPr>
           <a:xfrm>
-            <a:off x="1051560" y="2990088"/>
-            <a:ext cx="64008" cy="475488"/>
-          </a:xfrm>
-          <a:prstGeom prst="rect">
-            <a:avLst/>
-          </a:prstGeom>
-          <a:solidFill>
-            <a:srgbClr val="E2611F"/>
+            <a:off x="1014984" y="2651760"/>
+            <a:ext cx="64008" cy="438912"/>
+          </a:xfrm>
+          <a:prstGeom prst="rect">
+            <a:avLst/>
+          </a:prstGeom>
+          <a:solidFill>
+            <a:srgbClr val="1C2B4A"/>
           </a:solidFill>
           <a:ln/>
         </p:spPr>
@@ -40936,24 +40942,27 @@
         </p:nvSpPr>
         <p:spPr>
           <a:xfrm>
-            <a:off x="1252728" y="2990088"/>
-            <a:ext cx="3291840" cy="475488"/>
-          </a:xfrm>
-          <a:prstGeom prst="rect">
-            <a:avLst/>
-          </a:prstGeom>
-          <a:noFill/>
-          <a:ln/>
-        </p:spPr>
-        <p:txBody>
-          <a:bodyPr wrap="square" lIns="0" tIns="0" rIns="0" bIns="0" rtlCol="0" anchor="ctr"/>
-          <a:lstStyle/>
-          <a:p>
-            <a:pPr indent="0" marL="0">
-              <a:buNone/>
-            </a:pPr>
-            <a:r>
-              <a:rPr lang="en-US" sz="1080" dirty="0">
+            <a:off x="1197864" y="2651760"/>
+            <a:ext cx="3383280" cy="438912"/>
+          </a:xfrm>
+          <a:prstGeom prst="rect">
+            <a:avLst/>
+          </a:prstGeom>
+          <a:noFill/>
+          <a:ln/>
+        </p:spPr>
+        <p:txBody>
+          <a:bodyPr wrap="square" lIns="0" tIns="0" rIns="0" bIns="0" rtlCol="0" anchor="ctr"/>
+          <a:lstStyle/>
+          <a:p>
+            <a:pPr indent="0" marL="0">
+              <a:lnSpc>
+                <a:spcPct val="100000"/>
+              </a:lnSpc>
+              <a:buNone/>
+            </a:pPr>
+            <a:r>
+              <a:rPr lang="en-US" sz="930" dirty="0">
                 <a:solidFill>
                   <a:srgbClr val="26262E"/>
                 </a:solidFill>
@@ -40961,9 +40970,9 @@
                 <a:ea typeface="Apple SD Gothic Neo" pitchFamily="34" charset="-122"/>
                 <a:cs typeface="Apple SD Gothic Neo" pitchFamily="34" charset="-120"/>
               </a:rPr>
-              <a:t>텔레그램으로 요약 발송</a:t>
-            </a:r>
-            <a:endParaRPr lang="en-US" sz="1080" dirty="0"/>
+              <a:t>편집·검증가가 통합·사실검증 → 일일 브리핑</a:t>
+            </a:r>
+            <a:endParaRPr lang="en-US" sz="930" dirty="0"/>
           </a:p>
         </p:txBody>
       </p:sp>
@@ -40975,8 +40984,8 @@
         </p:nvSpPr>
         <p:spPr>
           <a:xfrm>
-            <a:off x="704088" y="3419856"/>
-            <a:ext cx="0" cy="365760"/>
+            <a:off x="685800" y="3035808"/>
+            <a:ext cx="0" cy="219456"/>
           </a:xfrm>
           <a:prstGeom prst="line">
             <a:avLst/>
@@ -40998,8 +41007,8 @@
         </p:nvSpPr>
         <p:spPr>
           <a:xfrm>
-            <a:off x="502920" y="3785616"/>
-            <a:ext cx="402336" cy="402336"/>
+            <a:off x="502920" y="3273552"/>
+            <a:ext cx="365760" cy="365760"/>
           </a:xfrm>
           <a:prstGeom prst="ellipse">
             <a:avLst/>
@@ -41018,8 +41027,8 @@
         </p:nvSpPr>
         <p:spPr>
           <a:xfrm>
-            <a:off x="502920" y="3774643"/>
-            <a:ext cx="402336" cy="402336"/>
+            <a:off x="502920" y="3262579"/>
+            <a:ext cx="365760" cy="365760"/>
           </a:xfrm>
           <a:prstGeom prst="rect">
             <a:avLst/>
@@ -41035,7 +41044,7 @@
               <a:buNone/>
             </a:pPr>
             <a:r>
-              <a:rPr lang="en-US" sz="1300" b="1" dirty="0">
+              <a:rPr lang="en-US" sz="1200" b="1" dirty="0">
                 <a:solidFill>
                   <a:srgbClr val="FFFFFF"/>
                 </a:solidFill>
@@ -41045,7 +41054,7 @@
               </a:rPr>
               <a:t>4</a:t>
             </a:r>
-            <a:endParaRPr lang="en-US" sz="1300" dirty="0"/>
+            <a:endParaRPr lang="en-US" sz="1200" dirty="0"/>
           </a:p>
         </p:txBody>
       </p:sp>
@@ -41057,8 +41066,8 @@
         </p:nvSpPr>
         <p:spPr>
           <a:xfrm>
-            <a:off x="1051560" y="3758184"/>
-            <a:ext cx="3566160" cy="475488"/>
+            <a:off x="1014984" y="3255264"/>
+            <a:ext cx="3602736" cy="438912"/>
           </a:xfrm>
           <a:prstGeom prst="rect">
             <a:avLst/>
@@ -41082,8 +41091,8 @@
         </p:nvSpPr>
         <p:spPr>
           <a:xfrm>
-            <a:off x="1051560" y="3758184"/>
-            <a:ext cx="64008" cy="475488"/>
+            <a:off x="1014984" y="3255264"/>
+            <a:ext cx="64008" cy="438912"/>
           </a:xfrm>
           <a:prstGeom prst="rect">
             <a:avLst/>
@@ -41102,24 +41111,27 @@
         </p:nvSpPr>
         <p:spPr>
           <a:xfrm>
-            <a:off x="1252728" y="3758184"/>
-            <a:ext cx="3291840" cy="475488"/>
-          </a:xfrm>
-          <a:prstGeom prst="rect">
-            <a:avLst/>
-          </a:prstGeom>
-          <a:noFill/>
-          <a:ln/>
-        </p:spPr>
-        <p:txBody>
-          <a:bodyPr wrap="square" lIns="0" tIns="0" rIns="0" bIns="0" rtlCol="0" anchor="ctr"/>
-          <a:lstStyle/>
-          <a:p>
-            <a:pPr indent="0" marL="0">
-              <a:buNone/>
-            </a:pPr>
-            <a:r>
-              <a:rPr lang="en-US" sz="1080" dirty="0">
+            <a:off x="1197864" y="3255264"/>
+            <a:ext cx="3383280" cy="438912"/>
+          </a:xfrm>
+          <a:prstGeom prst="rect">
+            <a:avLst/>
+          </a:prstGeom>
+          <a:noFill/>
+          <a:ln/>
+        </p:spPr>
+        <p:txBody>
+          <a:bodyPr wrap="square" lIns="0" tIns="0" rIns="0" bIns="0" rtlCol="0" anchor="ctr"/>
+          <a:lstStyle/>
+          <a:p>
+            <a:pPr indent="0" marL="0">
+              <a:lnSpc>
+                <a:spcPct val="100000"/>
+              </a:lnSpc>
+              <a:buNone/>
+            </a:pPr>
+            <a:r>
+              <a:rPr lang="en-US" sz="930" dirty="0">
                 <a:solidFill>
                   <a:srgbClr val="26262E"/>
                 </a:solidFill>
@@ -41127,15 +41139,184 @@
                 <a:ea typeface="Apple SD Gothic Neo" pitchFamily="34" charset="-122"/>
                 <a:cs typeface="Apple SD Gothic Neo" pitchFamily="34" charset="-120"/>
               </a:rPr>
-              <a:t>채팅 명령 → 봇이 크롤러 호출 → 즉시 회신</a:t>
-            </a:r>
-            <a:endParaRPr lang="en-US" sz="1080" dirty="0"/>
+              <a:t>발송: 파일 · macOS 알림 · 이메일 · 텔레그램</a:t>
+            </a:r>
+            <a:endParaRPr lang="en-US" sz="930" dirty="0"/>
           </a:p>
         </p:txBody>
       </p:sp>
       <p:sp>
         <p:nvSpPr>
           <p:cNvPr id="30" name="Shape 28"/>
+          <p:cNvSpPr/>
+          <p:nvPr/>
+        </p:nvSpPr>
+        <p:spPr>
+          <a:xfrm>
+            <a:off x="685800" y="3639312"/>
+            <a:ext cx="0" cy="219456"/>
+          </a:xfrm>
+          <a:prstGeom prst="line">
+            <a:avLst/>
+          </a:prstGeom>
+          <a:noFill/>
+          <a:ln w="19050">
+            <a:solidFill>
+              <a:srgbClr val="C9BBA4"/>
+            </a:solidFill>
+            <a:prstDash val="solid"/>
+          </a:ln>
+        </p:spPr>
+      </p:sp>
+      <p:sp>
+        <p:nvSpPr>
+          <p:cNvPr id="31" name="Shape 29"/>
+          <p:cNvSpPr/>
+          <p:nvPr/>
+        </p:nvSpPr>
+        <p:spPr>
+          <a:xfrm>
+            <a:off x="502920" y="3877056"/>
+            <a:ext cx="365760" cy="365760"/>
+          </a:xfrm>
+          <a:prstGeom prst="ellipse">
+            <a:avLst/>
+          </a:prstGeom>
+          <a:solidFill>
+            <a:srgbClr val="E2611F"/>
+          </a:solidFill>
+          <a:ln/>
+        </p:spPr>
+      </p:sp>
+      <p:sp>
+        <p:nvSpPr>
+          <p:cNvPr id="32" name="Text 30"/>
+          <p:cNvSpPr/>
+          <p:nvPr/>
+        </p:nvSpPr>
+        <p:spPr>
+          <a:xfrm>
+            <a:off x="502920" y="3866083"/>
+            <a:ext cx="365760" cy="365760"/>
+          </a:xfrm>
+          <a:prstGeom prst="rect">
+            <a:avLst/>
+          </a:prstGeom>
+          <a:noFill/>
+          <a:ln/>
+        </p:spPr>
+        <p:txBody>
+          <a:bodyPr wrap="square" lIns="0" tIns="0" rIns="0" bIns="0" rtlCol="0" anchor="ctr"/>
+          <a:lstStyle/>
+          <a:p>
+            <a:pPr algn="ctr" indent="0" marL="0">
+              <a:buNone/>
+            </a:pPr>
+            <a:r>
+              <a:rPr lang="en-US" sz="1200" b="1" dirty="0">
+                <a:solidFill>
+                  <a:srgbClr val="FFFFFF"/>
+                </a:solidFill>
+                <a:latin typeface="Apple SD Gothic Neo" pitchFamily="34" charset="0"/>
+                <a:ea typeface="Apple SD Gothic Neo" pitchFamily="34" charset="-122"/>
+                <a:cs typeface="Apple SD Gothic Neo" pitchFamily="34" charset="-120"/>
+              </a:rPr>
+              <a:t>5</a:t>
+            </a:r>
+            <a:endParaRPr lang="en-US" sz="1200" dirty="0"/>
+          </a:p>
+        </p:txBody>
+      </p:sp>
+      <p:sp>
+        <p:nvSpPr>
+          <p:cNvPr id="33" name="Shape 31"/>
+          <p:cNvSpPr/>
+          <p:nvPr/>
+        </p:nvSpPr>
+        <p:spPr>
+          <a:xfrm>
+            <a:off x="1014984" y="3858768"/>
+            <a:ext cx="3602736" cy="438912"/>
+          </a:xfrm>
+          <a:prstGeom prst="rect">
+            <a:avLst/>
+          </a:prstGeom>
+          <a:solidFill>
+            <a:srgbClr val="FFFFFF"/>
+          </a:solidFill>
+          <a:ln w="9525">
+            <a:solidFill>
+              <a:srgbClr val="E5DDD0"/>
+            </a:solidFill>
+            <a:prstDash val="solid"/>
+          </a:ln>
+        </p:spPr>
+      </p:sp>
+      <p:sp>
+        <p:nvSpPr>
+          <p:cNvPr id="34" name="Shape 32"/>
+          <p:cNvSpPr/>
+          <p:nvPr/>
+        </p:nvSpPr>
+        <p:spPr>
+          <a:xfrm>
+            <a:off x="1014984" y="3858768"/>
+            <a:ext cx="64008" cy="438912"/>
+          </a:xfrm>
+          <a:prstGeom prst="rect">
+            <a:avLst/>
+          </a:prstGeom>
+          <a:solidFill>
+            <a:srgbClr val="E2611F"/>
+          </a:solidFill>
+          <a:ln/>
+        </p:spPr>
+      </p:sp>
+      <p:sp>
+        <p:nvSpPr>
+          <p:cNvPr id="35" name="Text 33"/>
+          <p:cNvSpPr/>
+          <p:nvPr/>
+        </p:nvSpPr>
+        <p:spPr>
+          <a:xfrm>
+            <a:off x="1197864" y="3858768"/>
+            <a:ext cx="3383280" cy="438912"/>
+          </a:xfrm>
+          <a:prstGeom prst="rect">
+            <a:avLst/>
+          </a:prstGeom>
+          <a:noFill/>
+          <a:ln/>
+        </p:spPr>
+        <p:txBody>
+          <a:bodyPr wrap="square" lIns="0" tIns="0" rIns="0" bIns="0" rtlCol="0" anchor="ctr"/>
+          <a:lstStyle/>
+          <a:p>
+            <a:pPr indent="0" marL="0">
+              <a:lnSpc>
+                <a:spcPct val="100000"/>
+              </a:lnSpc>
+              <a:buNone/>
+            </a:pPr>
+            <a:r>
+              <a:rPr lang="en-US" sz="930" dirty="0">
+                <a:solidFill>
+                  <a:srgbClr val="26262E"/>
+                </a:solidFill>
+                <a:latin typeface="Apple SD Gothic Neo" pitchFamily="34" charset="0"/>
+                <a:ea typeface="Apple SD Gothic Neo" pitchFamily="34" charset="-122"/>
+                <a:cs typeface="Apple SD Gothic Neo" pitchFamily="34" charset="-120"/>
+              </a:rPr>
+              <a:t>채팅 명령 → 봇이 하네스에 지시 → 결과 회신</a:t>
+            </a:r>
+            <a:endParaRPr lang="en-US" sz="930" dirty="0"/>
+          </a:p>
+        </p:txBody>
+      </p:sp>
+      <p:sp>
+        <p:nvSpPr>
+          <p:cNvPr id="36" name="Shape 34"/>
           <p:cNvSpPr/>
           <p:nvPr/>
         </p:nvSpPr>
@@ -41160,7 +41341,7 @@
       </p:sp>
       <p:sp>
         <p:nvSpPr>
-          <p:cNvPr id="31" name="Text 29"/>
+          <p:cNvPr id="37" name="Text 35"/>
           <p:cNvSpPr/>
           <p:nvPr/>
         </p:nvSpPr>
@@ -41193,7 +41374,7 @@
                 <a:ea typeface="Apple SD Gothic Neo" pitchFamily="34" charset="-122"/>
                 <a:cs typeface="Apple SD Gothic Neo" pitchFamily="34" charset="-120"/>
               </a:rPr>
-              <a:t>Telegram</a:t>
+              <a:t>Telegram · 06:30</a:t>
             </a:r>
             <a:endParaRPr lang="en-US" sz="1050" dirty="0"/>
           </a:p>
@@ -41201,18 +41382,18 @@
       </p:sp>
       <p:sp>
         <p:nvSpPr>
-          <p:cNvPr id="32" name="Shape 30"/>
+          <p:cNvPr id="38" name="Shape 36"/>
           <p:cNvSpPr/>
           <p:nvPr/>
         </p:nvSpPr>
         <p:spPr>
           <a:xfrm>
             <a:off x="5120640" y="1874520"/>
-            <a:ext cx="2651760" cy="1051560"/>
+            <a:ext cx="2926080" cy="1371600"/>
           </a:xfrm>
           <a:prstGeom prst="roundRect">
             <a:avLst>
-              <a:gd name="adj" fmla="val 10435"/>
+              <a:gd name="adj" fmla="val 8000"/>
             </a:avLst>
           </a:prstGeom>
           <a:solidFill>
@@ -41228,14 +41409,14 @@
       </p:sp>
       <p:sp>
         <p:nvSpPr>
-          <p:cNvPr id="33" name="Text 31"/>
-          <p:cNvSpPr/>
-          <p:nvPr/>
-        </p:nvSpPr>
-        <p:spPr>
-          <a:xfrm>
-            <a:off x="5257800" y="1938528"/>
-            <a:ext cx="2423160" cy="914400"/>
+          <p:cNvPr id="39" name="Text 37"/>
+          <p:cNvSpPr/>
+          <p:nvPr/>
+        </p:nvSpPr>
+        <p:spPr>
+          <a:xfrm>
+            <a:off x="5248656" y="1938528"/>
+            <a:ext cx="2697480" cy="1234440"/>
           </a:xfrm>
           <a:prstGeom prst="rect">
             <a:avLst/>
@@ -41249,12 +41430,12 @@
           <a:p>
             <a:pPr indent="0" marL="0">
               <a:lnSpc>
-                <a:spcPct val="115000"/>
+                <a:spcPct val="120000"/>
               </a:lnSpc>
               <a:buNone/>
             </a:pPr>
             <a:r>
-              <a:rPr lang="en-US" sz="900" b="1" dirty="0">
+              <a:rPr lang="en-US" sz="850" b="1" dirty="0">
                 <a:solidFill>
                   <a:srgbClr val="26262E"/>
                 </a:solidFill>
@@ -41262,17 +41443,17 @@
                 <a:ea typeface="Apple SD Gothic Neo" pitchFamily="34" charset="-122"/>
                 <a:cs typeface="Apple SD Gothic Neo" pitchFamily="34" charset="-120"/>
               </a:rPr>
-              <a:t>오늘의 신건 3건
+              <a:t>📰 오늘의 부동산·경매 브리핑
 </a:t>
             </a:r>
             <a:pPr indent="0" marL="0">
               <a:lnSpc>
-                <a:spcPct val="115000"/>
+                <a:spcPct val="120000"/>
               </a:lnSpc>
               <a:buNone/>
             </a:pPr>
             <a:r>
-              <a:rPr lang="en-US" sz="900" dirty="0">
+              <a:rPr lang="en-US" sz="850" dirty="0">
                 <a:solidFill>
                   <a:srgbClr val="6E6A75"/>
                 </a:solidFill>
@@ -41280,19 +41461,19 @@
                 <a:ea typeface="Apple SD Gothic Neo" pitchFamily="34" charset="-122"/>
                 <a:cs typeface="Apple SD Gothic Neo" pitchFamily="34" charset="-120"/>
               </a:rPr>
-              <a:t>의정부 아파트 · 유찰1회</a:t>
-            </a:r>
-            <a:endParaRPr lang="en-US" sz="900" dirty="0"/>
+              <a:t>· 정책: 스트레스DSR 3단계 후속 공지</a:t>
+            </a:r>
+            <a:endParaRPr lang="en-US" sz="850" dirty="0"/>
           </a:p>
           <a:p>
             <a:pPr indent="0" marL="0">
               <a:lnSpc>
-                <a:spcPct val="115000"/>
+                <a:spcPct val="120000"/>
               </a:lnSpc>
               <a:buNone/>
             </a:pPr>
             <a:r>
-              <a:rPr lang="en-US" sz="900" dirty="0">
+              <a:rPr lang="en-US" sz="850" dirty="0">
                 <a:solidFill>
                   <a:srgbClr val="6E6A75"/>
                 </a:solidFill>
@@ -41300,19 +41481,19 @@
                 <a:ea typeface="Apple SD Gothic Neo" pitchFamily="34" charset="-122"/>
                 <a:cs typeface="Apple SD Gothic Neo" pitchFamily="34" charset="-120"/>
               </a:rPr>
-              <a:t>최저가 3.2억 (감정가 4.6억)</a:t>
-            </a:r>
-            <a:endParaRPr lang="en-US" sz="900" dirty="0"/>
+              <a:t>· 시장: 강남 전세가율 하락 지속</a:t>
+            </a:r>
+            <a:endParaRPr lang="en-US" sz="850" dirty="0"/>
           </a:p>
           <a:p>
             <a:pPr indent="0" marL="0">
               <a:lnSpc>
-                <a:spcPct val="115000"/>
+                <a:spcPct val="120000"/>
               </a:lnSpc>
               <a:buNone/>
             </a:pPr>
             <a:r>
-              <a:rPr lang="en-US" sz="900" dirty="0">
+              <a:rPr lang="en-US" sz="850" dirty="0">
                 <a:solidFill>
                   <a:srgbClr val="6E6A75"/>
                 </a:solidFill>
@@ -41320,26 +41501,46 @@
                 <a:ea typeface="Apple SD Gothic Neo" pitchFamily="34" charset="-122"/>
                 <a:cs typeface="Apple SD Gothic Neo" pitchFamily="34" charset="-120"/>
               </a:rPr>
-              <a:t>2026타경1234 외 2건</a:t>
-            </a:r>
-            <a:endParaRPr lang="en-US" sz="900" dirty="0"/>
-          </a:p>
-        </p:txBody>
-      </p:sp>
-      <p:sp>
-        <p:nvSpPr>
-          <p:cNvPr id="34" name="Shape 32"/>
-          <p:cNvSpPr/>
-          <p:nvPr/>
-        </p:nvSpPr>
-        <p:spPr>
-          <a:xfrm>
-            <a:off x="6035040" y="3063240"/>
-            <a:ext cx="2423160" cy="502920"/>
+              <a:t>· 경매·NPL: 수도권 낙찰가율 반등</a:t>
+            </a:r>
+            <a:endParaRPr lang="en-US" sz="850" dirty="0"/>
+          </a:p>
+          <a:p>
+            <a:pPr indent="0" marL="0">
+              <a:lnSpc>
+                <a:spcPct val="120000"/>
+              </a:lnSpc>
+              <a:buNone/>
+            </a:pPr>
+            <a:r>
+              <a:rPr lang="en-US" sz="850" dirty="0">
+                <a:solidFill>
+                  <a:srgbClr val="6E6A75"/>
+                </a:solidFill>
+                <a:latin typeface="Apple SD Gothic Neo" pitchFamily="34" charset="0"/>
+                <a:ea typeface="Apple SD Gothic Neo" pitchFamily="34" charset="-122"/>
+                <a:cs typeface="Apple SD Gothic Neo" pitchFamily="34" charset="-120"/>
+              </a:rPr>
+              <a:t>(출처 링크 · 사실검증 완료)</a:t>
+            </a:r>
+            <a:endParaRPr lang="en-US" sz="850" dirty="0"/>
+          </a:p>
+        </p:txBody>
+      </p:sp>
+      <p:sp>
+        <p:nvSpPr>
+          <p:cNvPr id="40" name="Shape 38"/>
+          <p:cNvSpPr/>
+          <p:nvPr/>
+        </p:nvSpPr>
+        <p:spPr>
+          <a:xfrm>
+            <a:off x="5943600" y="3401568"/>
+            <a:ext cx="2514600" cy="457200"/>
           </a:xfrm>
           <a:prstGeom prst="roundRect">
             <a:avLst>
-              <a:gd name="adj" fmla="val 21818"/>
+              <a:gd name="adj" fmla="val 24000"/>
             </a:avLst>
           </a:prstGeom>
           <a:solidFill>
@@ -41350,14 +41551,14 @@
       </p:sp>
       <p:sp>
         <p:nvSpPr>
-          <p:cNvPr id="35" name="Text 33"/>
-          <p:cNvSpPr/>
-          <p:nvPr/>
-        </p:nvSpPr>
-        <p:spPr>
-          <a:xfrm>
-            <a:off x="6144768" y="3063240"/>
-            <a:ext cx="2240280" cy="502920"/>
+          <p:cNvPr id="41" name="Text 39"/>
+          <p:cNvSpPr/>
+          <p:nvPr/>
+        </p:nvSpPr>
+        <p:spPr>
+          <a:xfrm>
+            <a:off x="6053328" y="3401568"/>
+            <a:ext cx="2331720" cy="457200"/>
           </a:xfrm>
           <a:prstGeom prst="rect">
             <a:avLst/>
@@ -41381,7 +41582,7 @@
                 <a:ea typeface="Apple SD Gothic Neo" pitchFamily="34" charset="-122"/>
                 <a:cs typeface="Apple SD Gothic Neo" pitchFamily="34" charset="-120"/>
               </a:rPr>
-              <a:t>“양주시 다세대 유찰 2회 검색해줘”</a:t>
+              <a:t>“청약 관련만 다시 정리해줘”</a:t>
             </a:r>
             <a:endParaRPr lang="en-US" sz="900" dirty="0"/>
           </a:p>
@@ -41389,18 +41590,18 @@
       </p:sp>
       <p:sp>
         <p:nvSpPr>
-          <p:cNvPr id="36" name="Shape 34"/>
-          <p:cNvSpPr/>
-          <p:nvPr/>
-        </p:nvSpPr>
-        <p:spPr>
-          <a:xfrm>
-            <a:off x="5120640" y="3703320"/>
-            <a:ext cx="2286000" cy="502920"/>
+          <p:cNvPr id="42" name="Shape 40"/>
+          <p:cNvSpPr/>
+          <p:nvPr/>
+        </p:nvSpPr>
+        <p:spPr>
+          <a:xfrm>
+            <a:off x="5120640" y="3950208"/>
+            <a:ext cx="2468880" cy="457200"/>
           </a:xfrm>
           <a:prstGeom prst="roundRect">
             <a:avLst>
-              <a:gd name="adj" fmla="val 21818"/>
+              <a:gd name="adj" fmla="val 24000"/>
             </a:avLst>
           </a:prstGeom>
           <a:solidFill>
@@ -41416,14 +41617,14 @@
       </p:sp>
       <p:sp>
         <p:nvSpPr>
-          <p:cNvPr id="37" name="Text 35"/>
-          <p:cNvSpPr/>
-          <p:nvPr/>
-        </p:nvSpPr>
-        <p:spPr>
-          <a:xfrm>
-            <a:off x="5257800" y="3703320"/>
-            <a:ext cx="2103120" cy="502920"/>
+          <p:cNvPr id="43" name="Text 41"/>
+          <p:cNvSpPr/>
+          <p:nvPr/>
+        </p:nvSpPr>
+        <p:spPr>
+          <a:xfrm>
+            <a:off x="5248656" y="3950208"/>
+            <a:ext cx="2286000" cy="457200"/>
           </a:xfrm>
           <a:prstGeom prst="rect">
             <a:avLst/>
@@ -41447,7 +41648,7 @@
                 <a:ea typeface="Apple SD Gothic Neo" pitchFamily="34" charset="-122"/>
                 <a:cs typeface="Apple SD Gothic Neo" pitchFamily="34" charset="-120"/>
               </a:rPr>
-              <a:t>검색 중… 7건 발견, CSV 첨부</a:t>
+              <a:t>청약 뉴스 4건 재정리, 문서 첨부</a:t>
             </a:r>
             <a:endParaRPr lang="en-US" sz="900" dirty="0"/>
           </a:p>
@@ -41455,7 +41656,7 @@
       </p:sp>
       <p:sp>
         <p:nvSpPr>
-          <p:cNvPr id="38" name="Text 36"/>
+          <p:cNvPr id="44" name="Text 42"/>
           <p:cNvSpPr/>
           <p:nvPr/>
         </p:nvSpPr>
@@ -41494,7 +41695,7 @@
       </p:sp>
       <p:sp>
         <p:nvSpPr>
-          <p:cNvPr id="39" name="Text 37"/>
+          <p:cNvPr id="45" name="Text 43"/>
           <p:cNvSpPr/>
           <p:nvPr/>
         </p:nvSpPr>
